--- a/项目相关/宣发/医疗AI助手系统介绍 20260416.pptx
+++ b/项目相关/宣发/医疗AI助手系统介绍 20260416.pptx
@@ -19738,10 +19738,14 @@
           <p:cNvPicPr>
             <a:picLocks noChangeAspect="1"/>
           </p:cNvPicPr>
-          <p:nvPr/>
-        </p:nvPicPr>
-        <p:blipFill>
-          <a:blip r:embed="rId7"/>
+          <p:nvPr>
+            <p:custDataLst>
+              <p:tags r:id="rId7"/>
+            </p:custDataLst>
+          </p:nvPr>
+        </p:nvPicPr>
+        <p:blipFill>
+          <a:blip r:embed="rId8"/>
           <a:stretch>
             <a:fillRect/>
           </a:stretch>
@@ -19762,10 +19766,14 @@
           <p:cNvPicPr>
             <a:picLocks noChangeAspect="1"/>
           </p:cNvPicPr>
-          <p:nvPr/>
-        </p:nvPicPr>
-        <p:blipFill>
-          <a:blip r:embed="rId8"/>
+          <p:nvPr>
+            <p:custDataLst>
+              <p:tags r:id="rId9"/>
+            </p:custDataLst>
+          </p:nvPr>
+        </p:nvPicPr>
+        <p:blipFill>
+          <a:blip r:embed="rId10"/>
           <a:stretch>
             <a:fillRect/>
           </a:stretch>
@@ -19786,10 +19794,14 @@
           <p:cNvPicPr>
             <a:picLocks noChangeAspect="1"/>
           </p:cNvPicPr>
-          <p:nvPr/>
-        </p:nvPicPr>
-        <p:blipFill>
-          <a:blip r:embed="rId9"/>
+          <p:nvPr>
+            <p:custDataLst>
+              <p:tags r:id="rId11"/>
+            </p:custDataLst>
+          </p:nvPr>
+        </p:nvPicPr>
+        <p:blipFill>
+          <a:blip r:embed="rId12"/>
           <a:stretch>
             <a:fillRect/>
           </a:stretch>
@@ -19808,7 +19820,11 @@
         <p:nvSpPr>
           <p:cNvPr id="16" name="Text 5"/>
           <p:cNvSpPr/>
-          <p:nvPr/>
+          <p:nvPr>
+            <p:custDataLst>
+              <p:tags r:id="rId13"/>
+            </p:custDataLst>
+          </p:nvPr>
         </p:nvSpPr>
         <p:spPr>
           <a:xfrm>
@@ -19846,7 +19862,11 @@
         <p:nvSpPr>
           <p:cNvPr id="17" name="Text 6"/>
           <p:cNvSpPr/>
-          <p:nvPr/>
+          <p:nvPr>
+            <p:custDataLst>
+              <p:tags r:id="rId14"/>
+            </p:custDataLst>
+          </p:nvPr>
         </p:nvSpPr>
         <p:spPr>
           <a:xfrm>
@@ -19908,10 +19928,14 @@
           <p:cNvPicPr>
             <a:picLocks noChangeAspect="1"/>
           </p:cNvPicPr>
-          <p:nvPr/>
-        </p:nvPicPr>
-        <p:blipFill>
-          <a:blip r:embed="rId7"/>
+          <p:nvPr>
+            <p:custDataLst>
+              <p:tags r:id="rId15"/>
+            </p:custDataLst>
+          </p:nvPr>
+        </p:nvPicPr>
+        <p:blipFill>
+          <a:blip r:embed="rId8"/>
           <a:stretch>
             <a:fillRect/>
           </a:stretch>
@@ -19932,10 +19956,14 @@
           <p:cNvPicPr>
             <a:picLocks noChangeAspect="1"/>
           </p:cNvPicPr>
-          <p:nvPr/>
-        </p:nvPicPr>
-        <p:blipFill>
-          <a:blip r:embed="rId8"/>
+          <p:nvPr>
+            <p:custDataLst>
+              <p:tags r:id="rId16"/>
+            </p:custDataLst>
+          </p:nvPr>
+        </p:nvPicPr>
+        <p:blipFill>
+          <a:blip r:embed="rId10"/>
           <a:stretch>
             <a:fillRect/>
           </a:stretch>
@@ -19956,10 +19984,14 @@
           <p:cNvPicPr>
             <a:picLocks noChangeAspect="1"/>
           </p:cNvPicPr>
-          <p:nvPr/>
-        </p:nvPicPr>
-        <p:blipFill>
-          <a:blip r:embed="rId10"/>
+          <p:nvPr>
+            <p:custDataLst>
+              <p:tags r:id="rId17"/>
+            </p:custDataLst>
+          </p:nvPr>
+        </p:nvPicPr>
+        <p:blipFill>
+          <a:blip r:embed="rId18"/>
           <a:stretch>
             <a:fillRect/>
           </a:stretch>
@@ -19978,7 +20010,11 @@
         <p:nvSpPr>
           <p:cNvPr id="21" name="Text 7"/>
           <p:cNvSpPr/>
-          <p:nvPr/>
+          <p:nvPr>
+            <p:custDataLst>
+              <p:tags r:id="rId19"/>
+            </p:custDataLst>
+          </p:nvPr>
         </p:nvSpPr>
         <p:spPr>
           <a:xfrm>
@@ -20016,7 +20052,11 @@
         <p:nvSpPr>
           <p:cNvPr id="22" name="Text 8"/>
           <p:cNvSpPr/>
-          <p:nvPr/>
+          <p:nvPr>
+            <p:custDataLst>
+              <p:tags r:id="rId20"/>
+            </p:custDataLst>
+          </p:nvPr>
         </p:nvSpPr>
         <p:spPr>
           <a:xfrm>
@@ -20066,7 +20106,7 @@
                 <a:ea typeface="等线" panose="02010600030101010101" pitchFamily="34" charset="-122"/>
                 <a:cs typeface="等线" panose="02010600030101010101" pitchFamily="34" charset="-120"/>
               </a:rPr>
-              <a:t>原则上传云端，确保数据安全与合规。</a:t>
+              <a:t>原则，确保数据安全与合规。</a:t>
             </a:r>
             <a:endParaRPr lang="en-US" sz="1050" dirty="0"/>
           </a:p>
@@ -20078,10 +20118,14 @@
           <p:cNvPicPr>
             <a:picLocks noChangeAspect="1"/>
           </p:cNvPicPr>
-          <p:nvPr/>
-        </p:nvPicPr>
-        <p:blipFill>
-          <a:blip r:embed="rId7"/>
+          <p:nvPr>
+            <p:custDataLst>
+              <p:tags r:id="rId21"/>
+            </p:custDataLst>
+          </p:nvPr>
+        </p:nvPicPr>
+        <p:blipFill>
+          <a:blip r:embed="rId8"/>
           <a:stretch>
             <a:fillRect/>
           </a:stretch>
@@ -20102,10 +20146,14 @@
           <p:cNvPicPr>
             <a:picLocks noChangeAspect="1"/>
           </p:cNvPicPr>
-          <p:nvPr/>
-        </p:nvPicPr>
-        <p:blipFill>
-          <a:blip r:embed="rId8"/>
+          <p:nvPr>
+            <p:custDataLst>
+              <p:tags r:id="rId22"/>
+            </p:custDataLst>
+          </p:nvPr>
+        </p:nvPicPr>
+        <p:blipFill>
+          <a:blip r:embed="rId10"/>
           <a:stretch>
             <a:fillRect/>
           </a:stretch>
@@ -20126,10 +20174,14 @@
           <p:cNvPicPr>
             <a:picLocks noChangeAspect="1"/>
           </p:cNvPicPr>
-          <p:nvPr/>
-        </p:nvPicPr>
-        <p:blipFill>
-          <a:blip r:embed="rId10"/>
+          <p:nvPr>
+            <p:custDataLst>
+              <p:tags r:id="rId23"/>
+            </p:custDataLst>
+          </p:nvPr>
+        </p:nvPicPr>
+        <p:blipFill>
+          <a:blip r:embed="rId18"/>
           <a:stretch>
             <a:fillRect/>
           </a:stretch>
@@ -20148,7 +20200,11 @@
         <p:nvSpPr>
           <p:cNvPr id="26" name="Text 9"/>
           <p:cNvSpPr/>
-          <p:nvPr/>
+          <p:nvPr>
+            <p:custDataLst>
+              <p:tags r:id="rId24"/>
+            </p:custDataLst>
+          </p:nvPr>
         </p:nvSpPr>
         <p:spPr>
           <a:xfrm>
@@ -20186,7 +20242,11 @@
         <p:nvSpPr>
           <p:cNvPr id="27" name="Text 10"/>
           <p:cNvSpPr/>
-          <p:nvPr/>
+          <p:nvPr>
+            <p:custDataLst>
+              <p:tags r:id="rId25"/>
+            </p:custDataLst>
+          </p:nvPr>
         </p:nvSpPr>
         <p:spPr>
           <a:xfrm>
@@ -20226,10 +20286,14 @@
           <p:cNvPicPr>
             <a:picLocks noChangeAspect="1"/>
           </p:cNvPicPr>
-          <p:nvPr/>
-        </p:nvPicPr>
-        <p:blipFill>
-          <a:blip r:embed="rId7"/>
+          <p:nvPr>
+            <p:custDataLst>
+              <p:tags r:id="rId26"/>
+            </p:custDataLst>
+          </p:nvPr>
+        </p:nvPicPr>
+        <p:blipFill>
+          <a:blip r:embed="rId8"/>
           <a:stretch>
             <a:fillRect/>
           </a:stretch>
@@ -20250,10 +20314,14 @@
           <p:cNvPicPr>
             <a:picLocks noChangeAspect="1"/>
           </p:cNvPicPr>
-          <p:nvPr/>
-        </p:nvPicPr>
-        <p:blipFill>
-          <a:blip r:embed="rId8"/>
+          <p:nvPr>
+            <p:custDataLst>
+              <p:tags r:id="rId27"/>
+            </p:custDataLst>
+          </p:nvPr>
+        </p:nvPicPr>
+        <p:blipFill>
+          <a:blip r:embed="rId10"/>
           <a:stretch>
             <a:fillRect/>
           </a:stretch>
@@ -20274,10 +20342,14 @@
           <p:cNvPicPr>
             <a:picLocks noChangeAspect="1"/>
           </p:cNvPicPr>
-          <p:nvPr/>
-        </p:nvPicPr>
-        <p:blipFill>
-          <a:blip r:embed="rId11"/>
+          <p:nvPr>
+            <p:custDataLst>
+              <p:tags r:id="rId28"/>
+            </p:custDataLst>
+          </p:nvPr>
+        </p:nvPicPr>
+        <p:blipFill>
+          <a:blip r:embed="rId29"/>
           <a:stretch>
             <a:fillRect/>
           </a:stretch>
@@ -20296,7 +20368,11 @@
         <p:nvSpPr>
           <p:cNvPr id="31" name="Text 11"/>
           <p:cNvSpPr/>
-          <p:nvPr/>
+          <p:nvPr>
+            <p:custDataLst>
+              <p:tags r:id="rId30"/>
+            </p:custDataLst>
+          </p:nvPr>
         </p:nvSpPr>
         <p:spPr>
           <a:xfrm>
@@ -20334,7 +20410,11 @@
         <p:nvSpPr>
           <p:cNvPr id="32" name="Text 12"/>
           <p:cNvSpPr/>
-          <p:nvPr/>
+          <p:nvPr>
+            <p:custDataLst>
+              <p:tags r:id="rId31"/>
+            </p:custDataLst>
+          </p:nvPr>
         </p:nvSpPr>
         <p:spPr>
           <a:xfrm>
@@ -20362,7 +20442,7 @@
                 <a:ea typeface="等线" panose="02010600030101010101" pitchFamily="34" charset="-122"/>
                 <a:cs typeface="等线" panose="02010600030101010101" pitchFamily="34" charset="-120"/>
               </a:rPr>
-              <a:t>由心内科医生主导设计，充分贴合临床实际工作流与需求，确保系统好用、爱用。</a:t>
+              <a:t>由医生主导设计，充分贴合临床实际工作流与需求，确保系统好用、爱用。</a:t>
             </a:r>
             <a:endParaRPr lang="en-US" sz="1050" dirty="0"/>
           </a:p>
@@ -20377,7 +20457,7 @@
           <p:nvPr/>
         </p:nvPicPr>
         <p:blipFill>
-          <a:blip r:embed="rId12">
+          <a:blip r:embed="rId32">
             <a:alphaModFix amt="6000"/>
           </a:blip>
           <a:stretch>
@@ -20403,7 +20483,7 @@
           <p:nvPr/>
         </p:nvPicPr>
         <p:blipFill>
-          <a:blip r:embed="rId13">
+          <a:blip r:embed="rId33">
             <a:alphaModFix amt="6000"/>
           </a:blip>
           <a:stretch>
@@ -20426,10 +20506,14 @@
           <p:cNvPicPr>
             <a:picLocks noChangeAspect="1"/>
           </p:cNvPicPr>
-          <p:nvPr/>
-        </p:nvPicPr>
-        <p:blipFill>
-          <a:blip r:embed="rId14"/>
+          <p:nvPr>
+            <p:custDataLst>
+              <p:tags r:id="rId34"/>
+            </p:custDataLst>
+          </p:nvPr>
+        </p:nvPicPr>
+        <p:blipFill>
+          <a:blip r:embed="rId35"/>
           <a:stretch>
             <a:fillRect/>
           </a:stretch>
@@ -26410,6 +26494,132 @@
     <a:masterClrMapping/>
   </p:clrMapOvr>
 </p:sld>
+</file>
+
+<file path=ppt/tags/tag1.xml><?xml version="1.0" encoding="utf-8"?>
+<p:tagLst xmlns:p="http://schemas.openxmlformats.org/presentationml/2006/main">
+  <p:tag name="KSO_WM_DIAGRAM_VIRTUALLY_FRAME" val="{&quot;height&quot;:217.4945669291338,&quot;left&quot;:71.99818897637795,&quot;top&quot;:280.49299212598424,&quot;width&quot;:815.9796062992125}"/>
+</p:tagLst>
+</file>
+
+<file path=ppt/tags/tag10.xml><?xml version="1.0" encoding="utf-8"?>
+<p:tagLst xmlns:p="http://schemas.openxmlformats.org/presentationml/2006/main">
+  <p:tag name="KSO_WM_DIAGRAM_VIRTUALLY_FRAME" val="{&quot;height&quot;:217.4945669291338,&quot;left&quot;:71.99818897637795,&quot;top&quot;:280.49299212598424,&quot;width&quot;:815.9796062992125}"/>
+</p:tagLst>
+</file>
+
+<file path=ppt/tags/tag11.xml><?xml version="1.0" encoding="utf-8"?>
+<p:tagLst xmlns:p="http://schemas.openxmlformats.org/presentationml/2006/main">
+  <p:tag name="KSO_WM_DIAGRAM_VIRTUALLY_FRAME" val="{&quot;height&quot;:217.4945669291338,&quot;left&quot;:71.99818897637795,&quot;top&quot;:280.49299212598424,&quot;width&quot;:815.9796062992125}"/>
+</p:tagLst>
+</file>
+
+<file path=ppt/tags/tag12.xml><?xml version="1.0" encoding="utf-8"?>
+<p:tagLst xmlns:p="http://schemas.openxmlformats.org/presentationml/2006/main">
+  <p:tag name="KSO_WM_DIAGRAM_VIRTUALLY_FRAME" val="{&quot;height&quot;:217.4945669291338,&quot;left&quot;:71.99818897637795,&quot;top&quot;:280.49299212598424,&quot;width&quot;:815.9796062992125}"/>
+</p:tagLst>
+</file>
+
+<file path=ppt/tags/tag13.xml><?xml version="1.0" encoding="utf-8"?>
+<p:tagLst xmlns:p="http://schemas.openxmlformats.org/presentationml/2006/main">
+  <p:tag name="KSO_WM_DIAGRAM_VIRTUALLY_FRAME" val="{&quot;height&quot;:217.4945669291338,&quot;left&quot;:71.99818897637795,&quot;top&quot;:280.49299212598424,&quot;width&quot;:815.9796062992125}"/>
+</p:tagLst>
+</file>
+
+<file path=ppt/tags/tag14.xml><?xml version="1.0" encoding="utf-8"?>
+<p:tagLst xmlns:p="http://schemas.openxmlformats.org/presentationml/2006/main">
+  <p:tag name="KSO_WM_DIAGRAM_VIRTUALLY_FRAME" val="{&quot;height&quot;:217.4945669291338,&quot;left&quot;:71.99818897637795,&quot;top&quot;:280.49299212598424,&quot;width&quot;:815.9796062992125}"/>
+</p:tagLst>
+</file>
+
+<file path=ppt/tags/tag15.xml><?xml version="1.0" encoding="utf-8"?>
+<p:tagLst xmlns:p="http://schemas.openxmlformats.org/presentationml/2006/main">
+  <p:tag name="KSO_WM_DIAGRAM_VIRTUALLY_FRAME" val="{&quot;height&quot;:217.4945669291338,&quot;left&quot;:71.99818897637795,&quot;top&quot;:280.49299212598424,&quot;width&quot;:815.9796062992125}"/>
+</p:tagLst>
+</file>
+
+<file path=ppt/tags/tag16.xml><?xml version="1.0" encoding="utf-8"?>
+<p:tagLst xmlns:p="http://schemas.openxmlformats.org/presentationml/2006/main">
+  <p:tag name="KSO_WM_DIAGRAM_VIRTUALLY_FRAME" val="{&quot;height&quot;:217.4945669291338,&quot;left&quot;:71.99818897637795,&quot;top&quot;:280.49299212598424,&quot;width&quot;:815.9796062992125}"/>
+</p:tagLst>
+</file>
+
+<file path=ppt/tags/tag17.xml><?xml version="1.0" encoding="utf-8"?>
+<p:tagLst xmlns:p="http://schemas.openxmlformats.org/presentationml/2006/main">
+  <p:tag name="KSO_WM_DIAGRAM_VIRTUALLY_FRAME" val="{&quot;height&quot;:217.4945669291338,&quot;left&quot;:71.99818897637795,&quot;top&quot;:280.49299212598424,&quot;width&quot;:815.9796062992125}"/>
+</p:tagLst>
+</file>
+
+<file path=ppt/tags/tag18.xml><?xml version="1.0" encoding="utf-8"?>
+<p:tagLst xmlns:p="http://schemas.openxmlformats.org/presentationml/2006/main">
+  <p:tag name="KSO_WM_DIAGRAM_VIRTUALLY_FRAME" val="{&quot;height&quot;:217.4945669291338,&quot;left&quot;:71.99818897637795,&quot;top&quot;:280.49299212598424,&quot;width&quot;:815.9796062992125}"/>
+</p:tagLst>
+</file>
+
+<file path=ppt/tags/tag19.xml><?xml version="1.0" encoding="utf-8"?>
+<p:tagLst xmlns:p="http://schemas.openxmlformats.org/presentationml/2006/main">
+  <p:tag name="KSO_WM_DIAGRAM_VIRTUALLY_FRAME" val="{&quot;height&quot;:217.4945669291338,&quot;left&quot;:71.99818897637795,&quot;top&quot;:280.49299212598424,&quot;width&quot;:815.9796062992125}"/>
+</p:tagLst>
+</file>
+
+<file path=ppt/tags/tag2.xml><?xml version="1.0" encoding="utf-8"?>
+<p:tagLst xmlns:p="http://schemas.openxmlformats.org/presentationml/2006/main">
+  <p:tag name="KSO_WM_DIAGRAM_VIRTUALLY_FRAME" val="{&quot;height&quot;:217.4945669291338,&quot;left&quot;:71.99818897637795,&quot;top&quot;:280.49299212598424,&quot;width&quot;:815.9796062992125}"/>
+</p:tagLst>
+</file>
+
+<file path=ppt/tags/tag20.xml><?xml version="1.0" encoding="utf-8"?>
+<p:tagLst xmlns:p="http://schemas.openxmlformats.org/presentationml/2006/main">
+  <p:tag name="KSO_WM_DIAGRAM_VIRTUALLY_FRAME" val="{&quot;height&quot;:217.4945669291338,&quot;left&quot;:71.99818897637795,&quot;top&quot;:280.49299212598424,&quot;width&quot;:815.9796062992125}"/>
+</p:tagLst>
+</file>
+
+<file path=ppt/tags/tag21.xml><?xml version="1.0" encoding="utf-8"?>
+<p:tagLst xmlns:p="http://schemas.openxmlformats.org/presentationml/2006/main">
+  <p:tag name="KSO_WM_DIAGRAM_VIRTUALLY_FRAME" val="{&quot;height&quot;:217.4945669291338,&quot;left&quot;:71.99818897637795,&quot;top&quot;:280.49299212598424,&quot;width&quot;:815.9796062992125}"/>
+</p:tagLst>
+</file>
+
+<file path=ppt/tags/tag3.xml><?xml version="1.0" encoding="utf-8"?>
+<p:tagLst xmlns:p="http://schemas.openxmlformats.org/presentationml/2006/main">
+  <p:tag name="KSO_WM_DIAGRAM_VIRTUALLY_FRAME" val="{&quot;height&quot;:217.4945669291338,&quot;left&quot;:71.99818897637795,&quot;top&quot;:280.49299212598424,&quot;width&quot;:815.9796062992125}"/>
+</p:tagLst>
+</file>
+
+<file path=ppt/tags/tag4.xml><?xml version="1.0" encoding="utf-8"?>
+<p:tagLst xmlns:p="http://schemas.openxmlformats.org/presentationml/2006/main">
+  <p:tag name="KSO_WM_DIAGRAM_VIRTUALLY_FRAME" val="{&quot;height&quot;:217.4945669291338,&quot;left&quot;:71.99818897637795,&quot;top&quot;:280.49299212598424,&quot;width&quot;:815.9796062992125}"/>
+</p:tagLst>
+</file>
+
+<file path=ppt/tags/tag5.xml><?xml version="1.0" encoding="utf-8"?>
+<p:tagLst xmlns:p="http://schemas.openxmlformats.org/presentationml/2006/main">
+  <p:tag name="KSO_WM_DIAGRAM_VIRTUALLY_FRAME" val="{&quot;height&quot;:217.4945669291338,&quot;left&quot;:71.99818897637795,&quot;top&quot;:280.49299212598424,&quot;width&quot;:815.9796062992125}"/>
+</p:tagLst>
+</file>
+
+<file path=ppt/tags/tag6.xml><?xml version="1.0" encoding="utf-8"?>
+<p:tagLst xmlns:p="http://schemas.openxmlformats.org/presentationml/2006/main">
+  <p:tag name="KSO_WM_DIAGRAM_VIRTUALLY_FRAME" val="{&quot;height&quot;:217.4945669291338,&quot;left&quot;:71.99818897637795,&quot;top&quot;:280.49299212598424,&quot;width&quot;:815.9796062992125}"/>
+</p:tagLst>
+</file>
+
+<file path=ppt/tags/tag7.xml><?xml version="1.0" encoding="utf-8"?>
+<p:tagLst xmlns:p="http://schemas.openxmlformats.org/presentationml/2006/main">
+  <p:tag name="KSO_WM_DIAGRAM_VIRTUALLY_FRAME" val="{&quot;height&quot;:217.4945669291338,&quot;left&quot;:71.99818897637795,&quot;top&quot;:280.49299212598424,&quot;width&quot;:815.9796062992125}"/>
+</p:tagLst>
+</file>
+
+<file path=ppt/tags/tag8.xml><?xml version="1.0" encoding="utf-8"?>
+<p:tagLst xmlns:p="http://schemas.openxmlformats.org/presentationml/2006/main">
+  <p:tag name="KSO_WM_DIAGRAM_VIRTUALLY_FRAME" val="{&quot;height&quot;:217.4945669291338,&quot;left&quot;:71.99818897637795,&quot;top&quot;:280.49299212598424,&quot;width&quot;:815.9796062992125}"/>
+</p:tagLst>
+</file>
+
+<file path=ppt/tags/tag9.xml><?xml version="1.0" encoding="utf-8"?>
+<p:tagLst xmlns:p="http://schemas.openxmlformats.org/presentationml/2006/main">
+  <p:tag name="KSO_WM_DIAGRAM_VIRTUALLY_FRAME" val="{&quot;height&quot;:217.4945669291338,&quot;left&quot;:71.99818897637795,&quot;top&quot;:280.49299212598424,&quot;width&quot;:815.9796062992125}"/>
+</p:tagLst>
 </file>
 
 <file path=ppt/theme/theme1.xml><?xml version="1.0" encoding="utf-8"?>

--- a/项目相关/宣发/医疗AI助手系统介绍 20260416.pptx
+++ b/项目相关/宣发/医疗AI助手系统介绍 20260416.pptx
@@ -2436,7 +2436,7 @@
                 <a:ea typeface="等线" panose="02010600030101010101" pitchFamily="34" charset="-122"/>
                 <a:cs typeface="等线" panose="02010600030101010101" pitchFamily="34" charset="-120"/>
               </a:rPr>
-              <a:t>Medical AI System</a:t>
+              <a:t>MedAIAssistant 1.0</a:t>
             </a:r>
             <a:endParaRPr lang="en-US" sz="1050" dirty="0"/>
           </a:p>
@@ -2550,7 +2550,29 @@
                 <a:ea typeface="等线" panose="02010600030101010101" pitchFamily="34" charset="-122"/>
                 <a:cs typeface="等线" panose="02010600030101010101" pitchFamily="34" charset="-120"/>
               </a:rPr>
-              <a:t>基于深度学习的智能诊疗辅助平台，</a:t>
+              <a:t>基于</a:t>
+            </a:r>
+            <a:r>
+              <a:rPr lang="zh-CN" altLang="en-US" sz="1800" dirty="0">
+                <a:solidFill>
+                  <a:srgbClr val="475569"/>
+                </a:solidFill>
+                <a:latin typeface="等线" panose="02010600030101010101" pitchFamily="34" charset="-122"/>
+                <a:ea typeface="等线" panose="02010600030101010101" pitchFamily="34" charset="-122"/>
+                <a:cs typeface="等线" panose="02010600030101010101" pitchFamily="34" charset="-120"/>
+              </a:rPr>
+              <a:t>大模型</a:t>
+            </a:r>
+            <a:r>
+              <a:rPr lang="en-US" sz="1800" dirty="0">
+                <a:solidFill>
+                  <a:srgbClr val="475569"/>
+                </a:solidFill>
+                <a:latin typeface="等线" panose="02010600030101010101" pitchFamily="34" charset="-122"/>
+                <a:ea typeface="等线" panose="02010600030101010101" pitchFamily="34" charset="-122"/>
+                <a:cs typeface="等线" panose="02010600030101010101" pitchFamily="34" charset="-120"/>
+              </a:rPr>
+              <a:t>的智能诊疗辅助平台，</a:t>
             </a:r>
             <a:endParaRPr lang="en-US" sz="1800" dirty="0"/>
           </a:p>
@@ -11701,7 +11723,29 @@
                 <a:ea typeface="等线" panose="02010600030101010101" pitchFamily="34" charset="-122"/>
                 <a:cs typeface="等线" panose="02010600030101010101" pitchFamily="34" charset="-120"/>
               </a:rPr>
-              <a:t>免除服务器采购与运维人员配置，按使用量付费</a:t>
+              <a:t>免除服务器采购与运维人员配置，按</a:t>
+            </a:r>
+            <a:r>
+              <a:rPr lang="zh-CN" altLang="en-US" sz="900" b="1" dirty="0">
+                <a:solidFill>
+                  <a:srgbClr val="475569"/>
+                </a:solidFill>
+                <a:latin typeface="等线" panose="02010600030101010101" pitchFamily="34" charset="-122"/>
+                <a:ea typeface="等线" panose="02010600030101010101" pitchFamily="34" charset="-122"/>
+                <a:cs typeface="等线" panose="02010600030101010101" pitchFamily="34" charset="-120"/>
+              </a:rPr>
+              <a:t>服务</a:t>
+            </a:r>
+            <a:r>
+              <a:rPr lang="en-US" sz="900" dirty="0">
+                <a:solidFill>
+                  <a:srgbClr val="475569"/>
+                </a:solidFill>
+                <a:latin typeface="等线" panose="02010600030101010101" pitchFamily="34" charset="-122"/>
+                <a:ea typeface="等线" panose="02010600030101010101" pitchFamily="34" charset="-122"/>
+                <a:cs typeface="等线" panose="02010600030101010101" pitchFamily="34" charset="-120"/>
+              </a:rPr>
+              <a:t>付费</a:t>
             </a:r>
             <a:endParaRPr lang="en-US" sz="900" dirty="0"/>
           </a:p>

--- a/项目相关/宣发/医疗AI助手系统介绍 20260416.pptx
+++ b/项目相关/宣发/医疗AI助手系统介绍 20260416.pptx
@@ -34,8 +34,10 @@
     <p:sldId id="271" r:id="rId27"/>
     <p:sldId id="278" r:id="rId28"/>
     <p:sldId id="279" r:id="rId29"/>
-    <p:sldId id="272" r:id="rId30"/>
-    <p:sldId id="273" r:id="rId31"/>
+    <p:sldId id="297" r:id="rId30"/>
+    <p:sldId id="298" r:id="rId31"/>
+    <p:sldId id="272" r:id="rId32"/>
+    <p:sldId id="273" r:id="rId33"/>
   </p:sldIdLst>
   <p:sldSz cx="12191365" cy="6858000"/>
   <p:notesSz cx="6858000" cy="12191365"/>
@@ -2119,7 +2121,163 @@
 </p:notes>
 </file>
 
+<file path=ppt/notesSlides/notesSlide29.xml><?xml version="1.0" encoding="utf-8"?>
+<p:notes xmlns:a="http://schemas.openxmlformats.org/drawingml/2006/main" xmlns:r="http://schemas.openxmlformats.org/officeDocument/2006/relationships" xmlns:p="http://schemas.openxmlformats.org/presentationml/2006/main">
+  <p:cSld>
+    <p:spTree>
+      <p:nvGrpSpPr>
+        <p:cNvPr id="1" name=""/>
+        <p:cNvGrpSpPr/>
+        <p:nvPr/>
+      </p:nvGrpSpPr>
+      <p:grpSpPr>
+        <a:xfrm>
+          <a:off x="0" y="0"/>
+          <a:ext cx="0" cy="0"/>
+          <a:chOff x="0" y="0"/>
+          <a:chExt cx="0" cy="0"/>
+        </a:xfrm>
+      </p:grpSpPr>
+      <p:sp>
+        <p:nvSpPr>
+          <p:cNvPr id="2" name="Slide Image Placeholder 1"/>
+          <p:cNvSpPr>
+            <a:spLocks noGrp="1" noRot="1" noChangeAspect="1"/>
+          </p:cNvSpPr>
+          <p:nvPr>
+            <p:ph type="sldImg"/>
+          </p:nvPr>
+        </p:nvSpPr>
+        <p:spPr/>
+      </p:sp>
+      <p:sp>
+        <p:nvSpPr>
+          <p:cNvPr id="3" name="Notes Placeholder 2"/>
+          <p:cNvSpPr>
+            <a:spLocks noGrp="1"/>
+          </p:cNvSpPr>
+          <p:nvPr>
+            <p:ph type="body" idx="1"/>
+          </p:nvPr>
+        </p:nvSpPr>
+        <p:spPr/>
+        <p:txBody>
+          <a:bodyPr/>
+          <a:lstStyle/>
+          <a:p>
+            <a:endParaRPr lang="en-US" dirty="0"/>
+          </a:p>
+        </p:txBody>
+      </p:sp>
+      <p:sp>
+        <p:nvSpPr>
+          <p:cNvPr id="4" name="Slide Number Placeholder 3"/>
+          <p:cNvSpPr>
+            <a:spLocks noGrp="1"/>
+          </p:cNvSpPr>
+          <p:nvPr>
+            <p:ph type="sldNum" sz="quarter" idx="10"/>
+          </p:nvPr>
+        </p:nvSpPr>
+        <p:spPr/>
+        <p:txBody>
+          <a:bodyPr/>
+          <a:lstStyle/>
+          <a:p>
+            <a:fld id="{F7021451-1387-4CA6-816F-3879F97B5CBC}" type="slidenum">
+              <a:rPr lang="en-US"/>
+            </a:fld>
+            <a:endParaRPr lang="en-US"/>
+          </a:p>
+        </p:txBody>
+      </p:sp>
+    </p:spTree>
+  </p:cSld>
+  <p:clrMapOvr>
+    <a:masterClrMapping/>
+  </p:clrMapOvr>
+</p:notes>
+</file>
+
 <file path=ppt/notesSlides/notesSlide3.xml><?xml version="1.0" encoding="utf-8"?>
+<p:notes xmlns:a="http://schemas.openxmlformats.org/drawingml/2006/main" xmlns:r="http://schemas.openxmlformats.org/officeDocument/2006/relationships" xmlns:p="http://schemas.openxmlformats.org/presentationml/2006/main">
+  <p:cSld>
+    <p:spTree>
+      <p:nvGrpSpPr>
+        <p:cNvPr id="1" name=""/>
+        <p:cNvGrpSpPr/>
+        <p:nvPr/>
+      </p:nvGrpSpPr>
+      <p:grpSpPr>
+        <a:xfrm>
+          <a:off x="0" y="0"/>
+          <a:ext cx="0" cy="0"/>
+          <a:chOff x="0" y="0"/>
+          <a:chExt cx="0" cy="0"/>
+        </a:xfrm>
+      </p:grpSpPr>
+      <p:sp>
+        <p:nvSpPr>
+          <p:cNvPr id="2" name="Slide Image Placeholder 1"/>
+          <p:cNvSpPr>
+            <a:spLocks noGrp="1" noRot="1" noChangeAspect="1"/>
+          </p:cNvSpPr>
+          <p:nvPr>
+            <p:ph type="sldImg"/>
+          </p:nvPr>
+        </p:nvSpPr>
+        <p:spPr/>
+      </p:sp>
+      <p:sp>
+        <p:nvSpPr>
+          <p:cNvPr id="3" name="Notes Placeholder 2"/>
+          <p:cNvSpPr>
+            <a:spLocks noGrp="1"/>
+          </p:cNvSpPr>
+          <p:nvPr>
+            <p:ph type="body" idx="1"/>
+          </p:nvPr>
+        </p:nvSpPr>
+        <p:spPr/>
+        <p:txBody>
+          <a:bodyPr/>
+          <a:lstStyle/>
+          <a:p>
+            <a:endParaRPr lang="en-US" dirty="0"/>
+          </a:p>
+        </p:txBody>
+      </p:sp>
+      <p:sp>
+        <p:nvSpPr>
+          <p:cNvPr id="4" name="Slide Number Placeholder 3"/>
+          <p:cNvSpPr>
+            <a:spLocks noGrp="1"/>
+          </p:cNvSpPr>
+          <p:nvPr>
+            <p:ph type="sldNum" sz="quarter" idx="10"/>
+          </p:nvPr>
+        </p:nvSpPr>
+        <p:spPr/>
+        <p:txBody>
+          <a:bodyPr/>
+          <a:lstStyle/>
+          <a:p>
+            <a:fld id="{F7021451-1387-4CA6-816F-3879F97B5CBC}" type="slidenum">
+              <a:rPr lang="en-US"/>
+            </a:fld>
+            <a:endParaRPr lang="en-US"/>
+          </a:p>
+        </p:txBody>
+      </p:sp>
+    </p:spTree>
+  </p:cSld>
+  <p:clrMapOvr>
+    <a:masterClrMapping/>
+  </p:clrMapOvr>
+</p:notes>
+</file>
+
+<file path=ppt/notesSlides/notesSlide30.xml><?xml version="1.0" encoding="utf-8"?>
 <p:notes xmlns:a="http://schemas.openxmlformats.org/drawingml/2006/main" xmlns:r="http://schemas.openxmlformats.org/officeDocument/2006/relationships" xmlns:p="http://schemas.openxmlformats.org/presentationml/2006/main">
   <p:cSld>
     <p:spTree>
@@ -36861,15 +37019,17 @@
           <p:nvPr/>
         </p:nvPicPr>
         <p:blipFill>
-          <a:blip r:embed="rId2"/>
-          <a:stretch>
-            <a:fillRect/>
-          </a:stretch>
-        </p:blipFill>
-        <p:spPr>
-          <a:xfrm>
-            <a:off x="0" y="2819330"/>
-            <a:ext cx="57149" cy="1219170"/>
+          <a:blip r:embed="rId2">
+            <a:alphaModFix amt="4000"/>
+          </a:blip>
+          <a:stretch>
+            <a:fillRect/>
+          </a:stretch>
+        </p:blipFill>
+        <p:spPr>
+          <a:xfrm>
+            <a:off x="0" y="0"/>
+            <a:ext cx="12191695" cy="6857829"/>
           </a:xfrm>
           <a:prstGeom prst="rect">
             <a:avLst/>
@@ -36892,24 +37052,96 @@
         </p:blipFill>
         <p:spPr>
           <a:xfrm>
-            <a:off x="914377" y="619110"/>
-            <a:ext cx="457189" cy="19050"/>
-          </a:xfrm>
-          <a:prstGeom prst="rect">
-            <a:avLst/>
-          </a:prstGeom>
-        </p:spPr>
-      </p:pic>
-      <p:sp>
-        <p:nvSpPr>
-          <p:cNvPr id="5" name="Text 0"/>
-          <p:cNvSpPr/>
-          <p:nvPr/>
-        </p:nvSpPr>
-        <p:spPr>
-          <a:xfrm>
-            <a:off x="1523962" y="533387"/>
-            <a:ext cx="2314136" cy="190495"/>
+            <a:off x="609585" y="2514537"/>
+            <a:ext cx="28574" cy="914377"/>
+          </a:xfrm>
+          <a:prstGeom prst="rect">
+            <a:avLst/>
+          </a:prstGeom>
+        </p:spPr>
+      </p:pic>
+      <p:pic>
+        <p:nvPicPr>
+          <p:cNvPr id="5" name="Image 3" descr="preencoded.png"/>
+          <p:cNvPicPr>
+            <a:picLocks noChangeAspect="1"/>
+          </p:cNvPicPr>
+          <p:nvPr/>
+        </p:nvPicPr>
+        <p:blipFill>
+          <a:blip r:embed="rId4"/>
+          <a:stretch>
+            <a:fillRect/>
+          </a:stretch>
+        </p:blipFill>
+        <p:spPr>
+          <a:xfrm>
+            <a:off x="609585" y="3543211"/>
+            <a:ext cx="28574" cy="457189"/>
+          </a:xfrm>
+          <a:prstGeom prst="rect">
+            <a:avLst/>
+          </a:prstGeom>
+        </p:spPr>
+      </p:pic>
+      <p:pic>
+        <p:nvPicPr>
+          <p:cNvPr id="6" name="Image 4" descr="preencoded.png"/>
+          <p:cNvPicPr>
+            <a:picLocks noChangeAspect="1"/>
+          </p:cNvPicPr>
+          <p:nvPr/>
+        </p:nvPicPr>
+        <p:blipFill>
+          <a:blip r:embed="rId5"/>
+          <a:stretch>
+            <a:fillRect/>
+          </a:stretch>
+        </p:blipFill>
+        <p:spPr>
+          <a:xfrm>
+            <a:off x="609585" y="4114697"/>
+            <a:ext cx="28574" cy="228594"/>
+          </a:xfrm>
+          <a:prstGeom prst="rect">
+            <a:avLst/>
+          </a:prstGeom>
+        </p:spPr>
+      </p:pic>
+      <p:pic>
+        <p:nvPicPr>
+          <p:cNvPr id="7" name="Image 5" descr="preencoded.png"/>
+          <p:cNvPicPr>
+            <a:picLocks noChangeAspect="1"/>
+          </p:cNvPicPr>
+          <p:nvPr/>
+        </p:nvPicPr>
+        <p:blipFill>
+          <a:blip r:embed="rId6"/>
+          <a:stretch>
+            <a:fillRect/>
+          </a:stretch>
+        </p:blipFill>
+        <p:spPr>
+          <a:xfrm>
+            <a:off x="1066773" y="695308"/>
+            <a:ext cx="304792" cy="19050"/>
+          </a:xfrm>
+          <a:prstGeom prst="rect">
+            <a:avLst/>
+          </a:prstGeom>
+        </p:spPr>
+      </p:pic>
+      <p:sp>
+        <p:nvSpPr>
+          <p:cNvPr id="8" name="Text 0"/>
+          <p:cNvSpPr/>
+          <p:nvPr/>
+        </p:nvSpPr>
+        <p:spPr>
+          <a:xfrm>
+            <a:off x="1485863" y="609585"/>
+            <a:ext cx="1209264" cy="190495"/>
           </a:xfrm>
           <a:prstGeom prst="rect">
             <a:avLst/>
@@ -36926,1087 +37158,1307 @@
             <a:r>
               <a:rPr lang="en-US" sz="1050" b="1" dirty="0">
                 <a:solidFill>
+                  <a:srgbClr val="0F766E"/>
+                </a:solidFill>
+                <a:latin typeface="等线" panose="02010600030101010101" pitchFamily="34" charset="-122"/>
+                <a:ea typeface="等线" panose="02010600030101010101" pitchFamily="34" charset="-122"/>
+                <a:cs typeface="等线" panose="02010600030101010101" pitchFamily="34" charset="-120"/>
+              </a:rPr>
+              <a:t>Clinical Value</a:t>
+            </a:r>
+            <a:endParaRPr lang="en-US" sz="1050" dirty="0"/>
+          </a:p>
+        </p:txBody>
+      </p:sp>
+      <p:sp>
+        <p:nvSpPr>
+          <p:cNvPr id="9" name="Text 1"/>
+          <p:cNvSpPr/>
+          <p:nvPr/>
+        </p:nvSpPr>
+        <p:spPr>
+          <a:xfrm>
+            <a:off x="1066773" y="914377"/>
+            <a:ext cx="10524481" cy="476238"/>
+          </a:xfrm>
+          <a:prstGeom prst="rect">
+            <a:avLst/>
+          </a:prstGeom>
+          <a:noFill/>
+        </p:spPr>
+        <p:txBody>
+          <a:bodyPr wrap="none" lIns="0" tIns="0" rIns="0" bIns="0" rtlCol="0" anchor="ctr"/>
+          <a:lstStyle/>
+          <a:p>
+            <a:pPr marL="0" indent="0" algn="l">
+              <a:buNone/>
+            </a:pPr>
+            <a:r>
+              <a:rPr lang="en-US" sz="3000" b="1" dirty="0">
+                <a:solidFill>
+                  <a:srgbClr val="0F172A"/>
+                </a:solidFill>
+                <a:latin typeface="等线" panose="02010600030101010101" pitchFamily="34" charset="-122"/>
+                <a:ea typeface="等线" panose="02010600030101010101" pitchFamily="34" charset="-122"/>
+                <a:cs typeface="等线" panose="02010600030101010101" pitchFamily="34" charset="-120"/>
+                <a:sym typeface="+mn-ea"/>
+              </a:rPr>
+              <a:t>AI智能眼镜</a:t>
+            </a:r>
+            <a:r>
+              <a:rPr lang="en-US" sz="3000" b="1" dirty="0">
+                <a:solidFill>
+                  <a:srgbClr val="0F172A"/>
+                </a:solidFill>
+                <a:latin typeface="等线" panose="02010600030101010101" pitchFamily="34" charset="-122"/>
+                <a:ea typeface="等线" panose="02010600030101010101" pitchFamily="34" charset="-122"/>
+                <a:cs typeface="等线" panose="02010600030101010101" pitchFamily="34" charset="-120"/>
+              </a:rPr>
+              <a:t>临床核心价值</a:t>
+            </a:r>
+            <a:endParaRPr lang="en-US" sz="3000" dirty="0"/>
+          </a:p>
+        </p:txBody>
+      </p:sp>
+      <p:sp>
+        <p:nvSpPr>
+          <p:cNvPr id="10" name="Text 2"/>
+          <p:cNvSpPr/>
+          <p:nvPr/>
+        </p:nvSpPr>
+        <p:spPr>
+          <a:xfrm>
+            <a:off x="1066773" y="1466813"/>
+            <a:ext cx="10524481" cy="285743"/>
+          </a:xfrm>
+          <a:prstGeom prst="rect">
+            <a:avLst/>
+          </a:prstGeom>
+          <a:noFill/>
+        </p:spPr>
+        <p:txBody>
+          <a:bodyPr wrap="none" lIns="0" tIns="0" rIns="0" bIns="0" rtlCol="0" anchor="ctr"/>
+          <a:lstStyle/>
+          <a:p>
+            <a:pPr marL="0" indent="0" algn="l">
+              <a:buNone/>
+            </a:pPr>
+            <a:r>
+              <a:rPr lang="en-US" sz="1350" dirty="0">
+                <a:solidFill>
+                  <a:srgbClr val="475569"/>
+                </a:solidFill>
+                <a:latin typeface="等线" panose="02010600030101010101" pitchFamily="34" charset="-122"/>
+                <a:ea typeface="等线" panose="02010600030101010101" pitchFamily="34" charset="-122"/>
+                <a:cs typeface="等线" panose="02010600030101010101" pitchFamily="34" charset="-120"/>
+              </a:rPr>
+              <a:t>AI智能眼镜在医疗场景中的关键效益与价值创造</a:t>
+            </a:r>
+            <a:endParaRPr lang="en-US" sz="1350" dirty="0"/>
+          </a:p>
+        </p:txBody>
+      </p:sp>
+      <p:pic>
+        <p:nvPicPr>
+          <p:cNvPr id="11" name="Image 6" descr="preencoded.png"/>
+          <p:cNvPicPr>
+            <a:picLocks noChangeAspect="1"/>
+          </p:cNvPicPr>
+          <p:nvPr/>
+        </p:nvPicPr>
+        <p:blipFill>
+          <a:blip r:embed="rId7"/>
+          <a:stretch>
+            <a:fillRect/>
+          </a:stretch>
+        </p:blipFill>
+        <p:spPr>
+          <a:xfrm>
+            <a:off x="1066773" y="2057349"/>
+            <a:ext cx="3381290" cy="3819430"/>
+          </a:xfrm>
+          <a:prstGeom prst="rect">
+            <a:avLst/>
+          </a:prstGeom>
+        </p:spPr>
+      </p:pic>
+      <p:pic>
+        <p:nvPicPr>
+          <p:cNvPr id="12" name="Image 7" descr="preencoded.png"/>
+          <p:cNvPicPr>
+            <a:picLocks noChangeAspect="1"/>
+          </p:cNvPicPr>
+          <p:nvPr/>
+        </p:nvPicPr>
+        <p:blipFill>
+          <a:blip r:embed="rId8"/>
+          <a:stretch>
+            <a:fillRect/>
+          </a:stretch>
+        </p:blipFill>
+        <p:spPr>
+          <a:xfrm>
+            <a:off x="1304892" y="2295468"/>
+            <a:ext cx="380990" cy="380990"/>
+          </a:xfrm>
+          <a:prstGeom prst="rect">
+            <a:avLst/>
+          </a:prstGeom>
+        </p:spPr>
+      </p:pic>
+      <p:pic>
+        <p:nvPicPr>
+          <p:cNvPr id="13" name="Image 8" descr="preencoded.png"/>
+          <p:cNvPicPr>
+            <a:picLocks noChangeAspect="1"/>
+          </p:cNvPicPr>
+          <p:nvPr/>
+        </p:nvPicPr>
+        <p:blipFill>
+          <a:blip r:embed="rId9"/>
+          <a:stretch>
+            <a:fillRect/>
+          </a:stretch>
+        </p:blipFill>
+        <p:spPr>
+          <a:xfrm>
+            <a:off x="1428714" y="2400240"/>
+            <a:ext cx="152396" cy="171446"/>
+          </a:xfrm>
+          <a:prstGeom prst="rect">
+            <a:avLst/>
+          </a:prstGeom>
+        </p:spPr>
+      </p:pic>
+      <p:sp>
+        <p:nvSpPr>
+          <p:cNvPr id="14" name="Text 3"/>
+          <p:cNvSpPr/>
+          <p:nvPr/>
+        </p:nvSpPr>
+        <p:spPr>
+          <a:xfrm>
+            <a:off x="1800180" y="2352616"/>
+            <a:ext cx="1152115" cy="266693"/>
+          </a:xfrm>
+          <a:prstGeom prst="rect">
+            <a:avLst/>
+          </a:prstGeom>
+          <a:noFill/>
+        </p:spPr>
+        <p:txBody>
+          <a:bodyPr wrap="none" lIns="0" tIns="0" rIns="0" bIns="0" rtlCol="0" anchor="ctr"/>
+          <a:lstStyle/>
+          <a:p>
+            <a:pPr marL="0" indent="0" algn="l">
+              <a:buNone/>
+            </a:pPr>
+            <a:r>
+              <a:rPr lang="en-US" sz="1500" b="1" dirty="0">
+                <a:solidFill>
+                  <a:srgbClr val="0F766E"/>
+                </a:solidFill>
+                <a:latin typeface="等线" panose="02010600030101010101" pitchFamily="34" charset="-122"/>
+                <a:ea typeface="等线" panose="02010600030101010101" pitchFamily="34" charset="-122"/>
+                <a:cs typeface="等线" panose="02010600030101010101" pitchFamily="34" charset="-120"/>
+              </a:rPr>
+              <a:t>查房场景价值</a:t>
+            </a:r>
+            <a:endParaRPr lang="en-US" sz="1500" dirty="0"/>
+          </a:p>
+        </p:txBody>
+      </p:sp>
+      <p:sp>
+        <p:nvSpPr>
+          <p:cNvPr id="15" name="Text 4"/>
+          <p:cNvSpPr/>
+          <p:nvPr/>
+        </p:nvSpPr>
+        <p:spPr>
+          <a:xfrm>
+            <a:off x="1304892" y="2924102"/>
+            <a:ext cx="85342" cy="380990"/>
+          </a:xfrm>
+          <a:prstGeom prst="rect">
+            <a:avLst/>
+          </a:prstGeom>
+          <a:noFill/>
+        </p:spPr>
+        <p:txBody>
+          <a:bodyPr wrap="square" lIns="0" tIns="0" rIns="0" bIns="0" rtlCol="0" anchor="ctr"/>
+          <a:lstStyle/>
+          <a:p>
+            <a:pPr marL="0" indent="0" algn="l">
+              <a:buNone/>
+            </a:pPr>
+            <a:r>
+              <a:rPr lang="en-US" sz="900" dirty="0">
+                <a:solidFill>
+                  <a:srgbClr val="0D9488"/>
+                </a:solidFill>
+                <a:latin typeface="等线" panose="02010600030101010101" pitchFamily="34" charset="-122"/>
+                <a:ea typeface="等线" panose="02010600030101010101" pitchFamily="34" charset="-122"/>
+                <a:cs typeface="等线" panose="02010600030101010101" pitchFamily="34" charset="-120"/>
+              </a:rPr>
+              <a:t>●</a:t>
+            </a:r>
+            <a:endParaRPr lang="en-US" sz="900" dirty="0"/>
+          </a:p>
+        </p:txBody>
+      </p:sp>
+      <p:sp>
+        <p:nvSpPr>
+          <p:cNvPr id="16" name="Text 5"/>
+          <p:cNvSpPr/>
+          <p:nvPr/>
+        </p:nvSpPr>
+        <p:spPr>
+          <a:xfrm>
+            <a:off x="1495388" y="2866953"/>
+            <a:ext cx="2733226" cy="438139"/>
+          </a:xfrm>
+          <a:prstGeom prst="rect">
+            <a:avLst/>
+          </a:prstGeom>
+          <a:noFill/>
+        </p:spPr>
+        <p:txBody>
+          <a:bodyPr wrap="square" lIns="0" tIns="0" rIns="0" bIns="0" rtlCol="0" anchor="ctr"/>
+          <a:lstStyle/>
+          <a:p>
+            <a:pPr marL="0" indent="0" algn="l">
+              <a:buNone/>
+            </a:pPr>
+            <a:r>
+              <a:rPr lang="en-US" sz="1050" b="1" dirty="0">
+                <a:solidFill>
+                  <a:srgbClr val="0F172A"/>
+                </a:solidFill>
+                <a:latin typeface="等线" panose="02010600030101010101" pitchFamily="34" charset="-122"/>
+                <a:ea typeface="等线" panose="02010600030101010101" pitchFamily="34" charset="-122"/>
+                <a:cs typeface="等线" panose="02010600030101010101" pitchFamily="34" charset="-120"/>
+              </a:rPr>
+              <a:t>全程面向患者沟通</a:t>
+            </a:r>
+            <a:r>
+              <a:rPr lang="en-US" sz="1050" dirty="0">
+                <a:solidFill>
+                  <a:srgbClr val="334155"/>
+                </a:solidFill>
+                <a:latin typeface="等线" panose="02010600030101010101" pitchFamily="34" charset="-122"/>
+                <a:ea typeface="等线" panose="02010600030101010101" pitchFamily="34" charset="-122"/>
+                <a:cs typeface="等线" panose="02010600030101010101" pitchFamily="34" charset="-120"/>
+              </a:rPr>
+              <a:t>：通过语音向AI提问，AR叠加显示患者病情摘要、检验结果、用药方案</a:t>
+            </a:r>
+            <a:endParaRPr lang="en-US" sz="1050" dirty="0"/>
+          </a:p>
+        </p:txBody>
+      </p:sp>
+      <p:sp>
+        <p:nvSpPr>
+          <p:cNvPr id="17" name="Text 6"/>
+          <p:cNvSpPr/>
+          <p:nvPr/>
+        </p:nvSpPr>
+        <p:spPr>
+          <a:xfrm>
+            <a:off x="1304892" y="3505112"/>
+            <a:ext cx="85342" cy="380990"/>
+          </a:xfrm>
+          <a:prstGeom prst="rect">
+            <a:avLst/>
+          </a:prstGeom>
+          <a:noFill/>
+        </p:spPr>
+        <p:txBody>
+          <a:bodyPr wrap="square" lIns="0" tIns="0" rIns="0" bIns="0" rtlCol="0" anchor="ctr"/>
+          <a:lstStyle/>
+          <a:p>
+            <a:pPr marL="0" indent="0" algn="l">
+              <a:buNone/>
+            </a:pPr>
+            <a:r>
+              <a:rPr lang="en-US" sz="900" dirty="0">
+                <a:solidFill>
+                  <a:srgbClr val="0D9488"/>
+                </a:solidFill>
+                <a:latin typeface="等线" panose="02010600030101010101" pitchFamily="34" charset="-122"/>
+                <a:ea typeface="等线" panose="02010600030101010101" pitchFamily="34" charset="-122"/>
+                <a:cs typeface="等线" panose="02010600030101010101" pitchFamily="34" charset="-120"/>
+              </a:rPr>
+              <a:t>●</a:t>
+            </a:r>
+            <a:endParaRPr lang="en-US" sz="900" dirty="0"/>
+          </a:p>
+        </p:txBody>
+      </p:sp>
+      <p:sp>
+        <p:nvSpPr>
+          <p:cNvPr id="18" name="Text 7"/>
+          <p:cNvSpPr/>
+          <p:nvPr/>
+        </p:nvSpPr>
+        <p:spPr>
+          <a:xfrm>
+            <a:off x="1495388" y="3447964"/>
+            <a:ext cx="2733226" cy="438139"/>
+          </a:xfrm>
+          <a:prstGeom prst="rect">
+            <a:avLst/>
+          </a:prstGeom>
+          <a:noFill/>
+        </p:spPr>
+        <p:txBody>
+          <a:bodyPr wrap="square" lIns="0" tIns="0" rIns="0" bIns="0" rtlCol="0" anchor="ctr"/>
+          <a:lstStyle/>
+          <a:p>
+            <a:pPr marL="0" indent="0" algn="l">
+              <a:buNone/>
+            </a:pPr>
+            <a:r>
+              <a:rPr lang="en-US" sz="1050" b="1" dirty="0">
+                <a:solidFill>
+                  <a:srgbClr val="0F172A"/>
+                </a:solidFill>
+                <a:latin typeface="等线" panose="02010600030101010101" pitchFamily="34" charset="-122"/>
+                <a:ea typeface="等线" panose="02010600030101010101" pitchFamily="34" charset="-122"/>
+                <a:cs typeface="等线" panose="02010600030101010101" pitchFamily="34" charset="-120"/>
+              </a:rPr>
+              <a:t>提升医患信任感</a:t>
+            </a:r>
+            <a:r>
+              <a:rPr lang="en-US" sz="1050" dirty="0">
+                <a:solidFill>
+                  <a:srgbClr val="334155"/>
+                </a:solidFill>
+                <a:latin typeface="等线" panose="02010600030101010101" pitchFamily="34" charset="-122"/>
+                <a:ea typeface="等线" panose="02010600030101010101" pitchFamily="34" charset="-122"/>
+                <a:cs typeface="等线" panose="02010600030101010101" pitchFamily="34" charset="-120"/>
+              </a:rPr>
+              <a:t>：无需低头查看设备，自然交流增强患者满意度</a:t>
+            </a:r>
+            <a:endParaRPr lang="en-US" sz="1050" dirty="0"/>
+          </a:p>
+        </p:txBody>
+      </p:sp>
+      <p:sp>
+        <p:nvSpPr>
+          <p:cNvPr id="19" name="Text 8"/>
+          <p:cNvSpPr/>
+          <p:nvPr/>
+        </p:nvSpPr>
+        <p:spPr>
+          <a:xfrm>
+            <a:off x="1304892" y="4095648"/>
+            <a:ext cx="85342" cy="380990"/>
+          </a:xfrm>
+          <a:prstGeom prst="rect">
+            <a:avLst/>
+          </a:prstGeom>
+          <a:noFill/>
+        </p:spPr>
+        <p:txBody>
+          <a:bodyPr wrap="square" lIns="0" tIns="0" rIns="0" bIns="0" rtlCol="0" anchor="ctr"/>
+          <a:lstStyle/>
+          <a:p>
+            <a:pPr marL="0" indent="0" algn="l">
+              <a:buNone/>
+            </a:pPr>
+            <a:r>
+              <a:rPr lang="en-US" sz="900" dirty="0">
+                <a:solidFill>
+                  <a:srgbClr val="0D9488"/>
+                </a:solidFill>
+                <a:latin typeface="等线" panose="02010600030101010101" pitchFamily="34" charset="-122"/>
+                <a:ea typeface="等线" panose="02010600030101010101" pitchFamily="34" charset="-122"/>
+                <a:cs typeface="等线" panose="02010600030101010101" pitchFamily="34" charset="-120"/>
+              </a:rPr>
+              <a:t>●</a:t>
+            </a:r>
+            <a:endParaRPr lang="en-US" sz="900" dirty="0"/>
+          </a:p>
+        </p:txBody>
+      </p:sp>
+      <p:sp>
+        <p:nvSpPr>
+          <p:cNvPr id="20" name="Text 9"/>
+          <p:cNvSpPr/>
+          <p:nvPr/>
+        </p:nvSpPr>
+        <p:spPr>
+          <a:xfrm>
+            <a:off x="1495388" y="4038499"/>
+            <a:ext cx="2733226" cy="438139"/>
+          </a:xfrm>
+          <a:prstGeom prst="rect">
+            <a:avLst/>
+          </a:prstGeom>
+          <a:noFill/>
+        </p:spPr>
+        <p:txBody>
+          <a:bodyPr wrap="square" lIns="0" tIns="0" rIns="0" bIns="0" rtlCol="0" anchor="ctr"/>
+          <a:lstStyle/>
+          <a:p>
+            <a:pPr marL="0" indent="0" algn="l">
+              <a:buNone/>
+            </a:pPr>
+            <a:r>
+              <a:rPr lang="en-US" sz="1050" b="1" dirty="0">
+                <a:solidFill>
+                  <a:srgbClr val="0F172A"/>
+                </a:solidFill>
+                <a:latin typeface="等线" panose="02010600030101010101" pitchFamily="34" charset="-122"/>
+                <a:ea typeface="等线" panose="02010600030101010101" pitchFamily="34" charset="-122"/>
+                <a:cs typeface="等线" panose="02010600030101010101" pitchFamily="34" charset="-120"/>
+              </a:rPr>
+              <a:t>信息获取零中断</a:t>
+            </a:r>
+            <a:r>
+              <a:rPr lang="en-US" sz="1050" dirty="0">
+                <a:solidFill>
+                  <a:srgbClr val="334155"/>
+                </a:solidFill>
+                <a:latin typeface="等线" panose="02010600030101010101" pitchFamily="34" charset="-122"/>
+                <a:ea typeface="等线" panose="02010600030101010101" pitchFamily="34" charset="-122"/>
+                <a:cs typeface="等线" panose="02010600030101010101" pitchFamily="34" charset="-120"/>
+              </a:rPr>
+              <a:t>：实时获取关键信息，保持诊疗连续性</a:t>
+            </a:r>
+            <a:endParaRPr lang="en-US" sz="1050" dirty="0"/>
+          </a:p>
+        </p:txBody>
+      </p:sp>
+      <p:pic>
+        <p:nvPicPr>
+          <p:cNvPr id="21" name="Image 9" descr="preencoded.png"/>
+          <p:cNvPicPr>
+            <a:picLocks noChangeAspect="1"/>
+          </p:cNvPicPr>
+          <p:nvPr/>
+        </p:nvPicPr>
+        <p:blipFill>
+          <a:blip r:embed="rId10"/>
+          <a:stretch>
+            <a:fillRect/>
+          </a:stretch>
+        </p:blipFill>
+        <p:spPr>
+          <a:xfrm>
+            <a:off x="4638559" y="2057349"/>
+            <a:ext cx="3381290" cy="3819430"/>
+          </a:xfrm>
+          <a:prstGeom prst="rect">
+            <a:avLst/>
+          </a:prstGeom>
+        </p:spPr>
+      </p:pic>
+      <p:pic>
+        <p:nvPicPr>
+          <p:cNvPr id="22" name="Image 10" descr="preencoded.png"/>
+          <p:cNvPicPr>
+            <a:picLocks noChangeAspect="1"/>
+          </p:cNvPicPr>
+          <p:nvPr/>
+        </p:nvPicPr>
+        <p:blipFill>
+          <a:blip r:embed="rId8"/>
+          <a:stretch>
+            <a:fillRect/>
+          </a:stretch>
+        </p:blipFill>
+        <p:spPr>
+          <a:xfrm>
+            <a:off x="4876678" y="2295468"/>
+            <a:ext cx="380990" cy="380990"/>
+          </a:xfrm>
+          <a:prstGeom prst="rect">
+            <a:avLst/>
+          </a:prstGeom>
+        </p:spPr>
+      </p:pic>
+      <p:pic>
+        <p:nvPicPr>
+          <p:cNvPr id="23" name="Image 11" descr="preencoded.png"/>
+          <p:cNvPicPr>
+            <a:picLocks noChangeAspect="1"/>
+          </p:cNvPicPr>
+          <p:nvPr/>
+        </p:nvPicPr>
+        <p:blipFill>
+          <a:blip r:embed="rId11"/>
+          <a:stretch>
+            <a:fillRect/>
+          </a:stretch>
+        </p:blipFill>
+        <p:spPr>
+          <a:xfrm>
+            <a:off x="4971926" y="2400240"/>
+            <a:ext cx="200020" cy="171446"/>
+          </a:xfrm>
+          <a:prstGeom prst="rect">
+            <a:avLst/>
+          </a:prstGeom>
+        </p:spPr>
+      </p:pic>
+      <p:sp>
+        <p:nvSpPr>
+          <p:cNvPr id="24" name="Text 10"/>
+          <p:cNvSpPr/>
+          <p:nvPr/>
+        </p:nvSpPr>
+        <p:spPr>
+          <a:xfrm>
+            <a:off x="5371966" y="2352616"/>
+            <a:ext cx="1152115" cy="266693"/>
+          </a:xfrm>
+          <a:prstGeom prst="rect">
+            <a:avLst/>
+          </a:prstGeom>
+          <a:noFill/>
+        </p:spPr>
+        <p:txBody>
+          <a:bodyPr wrap="none" lIns="0" tIns="0" rIns="0" bIns="0" rtlCol="0" anchor="ctr"/>
+          <a:lstStyle/>
+          <a:p>
+            <a:pPr marL="0" indent="0" algn="l">
+              <a:buNone/>
+            </a:pPr>
+            <a:r>
+              <a:rPr lang="en-US" sz="1500" b="1" dirty="0">
+                <a:solidFill>
+                  <a:srgbClr val="0F766E"/>
+                </a:solidFill>
+                <a:latin typeface="等线" panose="02010600030101010101" pitchFamily="34" charset="-122"/>
+                <a:ea typeface="等线" panose="02010600030101010101" pitchFamily="34" charset="-122"/>
+                <a:cs typeface="等线" panose="02010600030101010101" pitchFamily="34" charset="-120"/>
+              </a:rPr>
+              <a:t>手术场景价值</a:t>
+            </a:r>
+            <a:endParaRPr lang="en-US" sz="1500" dirty="0"/>
+          </a:p>
+        </p:txBody>
+      </p:sp>
+      <p:sp>
+        <p:nvSpPr>
+          <p:cNvPr id="25" name="Text 11"/>
+          <p:cNvSpPr/>
+          <p:nvPr/>
+        </p:nvSpPr>
+        <p:spPr>
+          <a:xfrm>
+            <a:off x="4876678" y="2924102"/>
+            <a:ext cx="85342" cy="380990"/>
+          </a:xfrm>
+          <a:prstGeom prst="rect">
+            <a:avLst/>
+          </a:prstGeom>
+          <a:noFill/>
+        </p:spPr>
+        <p:txBody>
+          <a:bodyPr wrap="square" lIns="0" tIns="0" rIns="0" bIns="0" rtlCol="0" anchor="ctr"/>
+          <a:lstStyle/>
+          <a:p>
+            <a:pPr marL="0" indent="0" algn="l">
+              <a:buNone/>
+            </a:pPr>
+            <a:r>
+              <a:rPr lang="en-US" sz="900" dirty="0">
+                <a:solidFill>
+                  <a:srgbClr val="0D9488"/>
+                </a:solidFill>
+                <a:latin typeface="等线" panose="02010600030101010101" pitchFamily="34" charset="-122"/>
+                <a:ea typeface="等线" panose="02010600030101010101" pitchFamily="34" charset="-122"/>
+                <a:cs typeface="等线" panose="02010600030101010101" pitchFamily="34" charset="-120"/>
+              </a:rPr>
+              <a:t>●</a:t>
+            </a:r>
+            <a:endParaRPr lang="en-US" sz="900" dirty="0"/>
+          </a:p>
+        </p:txBody>
+      </p:sp>
+      <p:sp>
+        <p:nvSpPr>
+          <p:cNvPr id="26" name="Text 12"/>
+          <p:cNvSpPr/>
+          <p:nvPr/>
+        </p:nvSpPr>
+        <p:spPr>
+          <a:xfrm>
+            <a:off x="5057649" y="2866953"/>
+            <a:ext cx="2733226" cy="438139"/>
+          </a:xfrm>
+          <a:prstGeom prst="rect">
+            <a:avLst/>
+          </a:prstGeom>
+          <a:noFill/>
+        </p:spPr>
+        <p:txBody>
+          <a:bodyPr wrap="square" lIns="0" tIns="0" rIns="0" bIns="0" rtlCol="0" anchor="ctr"/>
+          <a:lstStyle/>
+          <a:p>
+            <a:pPr marL="0" indent="0" algn="l">
+              <a:buNone/>
+            </a:pPr>
+            <a:r>
+              <a:rPr lang="en-US" sz="1050" b="1" dirty="0">
+                <a:solidFill>
+                  <a:srgbClr val="0F172A"/>
+                </a:solidFill>
+                <a:latin typeface="等线" panose="02010600030101010101" pitchFamily="34" charset="-122"/>
+                <a:ea typeface="等线" panose="02010600030101010101" pitchFamily="34" charset="-122"/>
+                <a:cs typeface="等线" panose="02010600030101010101" pitchFamily="34" charset="-120"/>
+              </a:rPr>
+              <a:t>无菌操作保障</a:t>
+            </a:r>
+            <a:r>
+              <a:rPr lang="en-US" sz="1050" dirty="0">
+                <a:solidFill>
+                  <a:srgbClr val="334155"/>
+                </a:solidFill>
+                <a:latin typeface="等线" panose="02010600030101010101" pitchFamily="34" charset="-122"/>
+                <a:ea typeface="等线" panose="02010600030101010101" pitchFamily="34" charset="-122"/>
+                <a:cs typeface="等线" panose="02010600030101010101" pitchFamily="34" charset="-120"/>
+              </a:rPr>
+              <a:t>：语音交互避免触碰非无菌设备，降低感染风险</a:t>
+            </a:r>
+            <a:endParaRPr lang="en-US" sz="1050" dirty="0"/>
+          </a:p>
+        </p:txBody>
+      </p:sp>
+      <p:sp>
+        <p:nvSpPr>
+          <p:cNvPr id="27" name="Text 13"/>
+          <p:cNvSpPr/>
+          <p:nvPr/>
+        </p:nvSpPr>
+        <p:spPr>
+          <a:xfrm>
+            <a:off x="4876678" y="3505112"/>
+            <a:ext cx="85342" cy="380990"/>
+          </a:xfrm>
+          <a:prstGeom prst="rect">
+            <a:avLst/>
+          </a:prstGeom>
+          <a:noFill/>
+        </p:spPr>
+        <p:txBody>
+          <a:bodyPr wrap="square" lIns="0" tIns="0" rIns="0" bIns="0" rtlCol="0" anchor="ctr"/>
+          <a:lstStyle/>
+          <a:p>
+            <a:pPr marL="0" indent="0" algn="l">
+              <a:buNone/>
+            </a:pPr>
+            <a:r>
+              <a:rPr lang="en-US" sz="900" dirty="0">
+                <a:solidFill>
+                  <a:srgbClr val="0D9488"/>
+                </a:solidFill>
+                <a:latin typeface="等线" panose="02010600030101010101" pitchFamily="34" charset="-122"/>
+                <a:ea typeface="等线" panose="02010600030101010101" pitchFamily="34" charset="-122"/>
+                <a:cs typeface="等线" panose="02010600030101010101" pitchFamily="34" charset="-120"/>
+              </a:rPr>
+              <a:t>●</a:t>
+            </a:r>
+            <a:endParaRPr lang="en-US" sz="900" dirty="0"/>
+          </a:p>
+        </p:txBody>
+      </p:sp>
+      <p:sp>
+        <p:nvSpPr>
+          <p:cNvPr id="28" name="Text 14"/>
+          <p:cNvSpPr/>
+          <p:nvPr/>
+        </p:nvSpPr>
+        <p:spPr>
+          <a:xfrm>
+            <a:off x="5057649" y="3447964"/>
+            <a:ext cx="2733226" cy="438139"/>
+          </a:xfrm>
+          <a:prstGeom prst="rect">
+            <a:avLst/>
+          </a:prstGeom>
+          <a:noFill/>
+        </p:spPr>
+        <p:txBody>
+          <a:bodyPr wrap="square" lIns="0" tIns="0" rIns="0" bIns="0" rtlCol="0" anchor="ctr"/>
+          <a:lstStyle/>
+          <a:p>
+            <a:pPr marL="0" indent="0" algn="l">
+              <a:buNone/>
+            </a:pPr>
+            <a:r>
+              <a:rPr lang="en-US" sz="1050" b="1" dirty="0">
+                <a:solidFill>
+                  <a:srgbClr val="0F172A"/>
+                </a:solidFill>
+                <a:latin typeface="等线" panose="02010600030101010101" pitchFamily="34" charset="-122"/>
+                <a:ea typeface="等线" panose="02010600030101010101" pitchFamily="34" charset="-122"/>
+                <a:cs typeface="等线" panose="02010600030101010101" pitchFamily="34" charset="-120"/>
+              </a:rPr>
+              <a:t>快速决策支持</a:t>
+            </a:r>
+            <a:r>
+              <a:rPr lang="en-US" sz="1050" dirty="0">
+                <a:solidFill>
+                  <a:srgbClr val="334155"/>
+                </a:solidFill>
+                <a:latin typeface="等线" panose="02010600030101010101" pitchFamily="34" charset="-122"/>
+                <a:ea typeface="等线" panose="02010600030101010101" pitchFamily="34" charset="-122"/>
+                <a:cs typeface="等线" panose="02010600030101010101" pitchFamily="34" charset="-120"/>
+              </a:rPr>
+              <a:t>：术中实时获取并发症处置方案、药物剂量、类似病例参考</a:t>
+            </a:r>
+            <a:endParaRPr lang="en-US" sz="1050" dirty="0"/>
+          </a:p>
+        </p:txBody>
+      </p:sp>
+      <p:sp>
+        <p:nvSpPr>
+          <p:cNvPr id="29" name="Text 15"/>
+          <p:cNvSpPr/>
+          <p:nvPr/>
+        </p:nvSpPr>
+        <p:spPr>
+          <a:xfrm>
+            <a:off x="4876678" y="4095648"/>
+            <a:ext cx="85342" cy="380990"/>
+          </a:xfrm>
+          <a:prstGeom prst="rect">
+            <a:avLst/>
+          </a:prstGeom>
+          <a:noFill/>
+        </p:spPr>
+        <p:txBody>
+          <a:bodyPr wrap="square" lIns="0" tIns="0" rIns="0" bIns="0" rtlCol="0" anchor="ctr"/>
+          <a:lstStyle/>
+          <a:p>
+            <a:pPr marL="0" indent="0" algn="l">
+              <a:buNone/>
+            </a:pPr>
+            <a:r>
+              <a:rPr lang="en-US" sz="900" dirty="0">
+                <a:solidFill>
+                  <a:srgbClr val="0D9488"/>
+                </a:solidFill>
+                <a:latin typeface="等线" panose="02010600030101010101" pitchFamily="34" charset="-122"/>
+                <a:ea typeface="等线" panose="02010600030101010101" pitchFamily="34" charset="-122"/>
+                <a:cs typeface="等线" panose="02010600030101010101" pitchFamily="34" charset="-120"/>
+              </a:rPr>
+              <a:t>●</a:t>
+            </a:r>
+            <a:endParaRPr lang="en-US" sz="900" dirty="0"/>
+          </a:p>
+        </p:txBody>
+      </p:sp>
+      <p:sp>
+        <p:nvSpPr>
+          <p:cNvPr id="30" name="Text 16"/>
+          <p:cNvSpPr/>
+          <p:nvPr/>
+        </p:nvSpPr>
+        <p:spPr>
+          <a:xfrm>
+            <a:off x="5057649" y="4038499"/>
+            <a:ext cx="2733226" cy="438139"/>
+          </a:xfrm>
+          <a:prstGeom prst="rect">
+            <a:avLst/>
+          </a:prstGeom>
+          <a:noFill/>
+        </p:spPr>
+        <p:txBody>
+          <a:bodyPr wrap="square" lIns="0" tIns="0" rIns="0" bIns="0" rtlCol="0" anchor="ctr"/>
+          <a:lstStyle/>
+          <a:p>
+            <a:pPr marL="0" indent="0" algn="l">
+              <a:buNone/>
+            </a:pPr>
+            <a:r>
+              <a:rPr lang="en-US" sz="1050" b="1" dirty="0">
+                <a:solidFill>
+                  <a:srgbClr val="0F172A"/>
+                </a:solidFill>
+                <a:latin typeface="等线" panose="02010600030101010101" pitchFamily="34" charset="-122"/>
+                <a:ea typeface="等线" panose="02010600030101010101" pitchFamily="34" charset="-122"/>
+                <a:cs typeface="等线" panose="02010600030101010101" pitchFamily="34" charset="-120"/>
+              </a:rPr>
+              <a:t>减少医疗差错</a:t>
+            </a:r>
+            <a:r>
+              <a:rPr lang="en-US" sz="1050" dirty="0">
+                <a:solidFill>
+                  <a:srgbClr val="334155"/>
+                </a:solidFill>
+                <a:latin typeface="等线" panose="02010600030101010101" pitchFamily="34" charset="-122"/>
+                <a:ea typeface="等线" panose="02010600030101010101" pitchFamily="34" charset="-122"/>
+                <a:cs typeface="等线" panose="02010600030101010101" pitchFamily="34" charset="-120"/>
+              </a:rPr>
+              <a:t>：AI基于实时数据提供个性化建议，降低人为记忆误差</a:t>
+            </a:r>
+            <a:endParaRPr lang="en-US" sz="1050" dirty="0"/>
+          </a:p>
+        </p:txBody>
+      </p:sp>
+      <p:pic>
+        <p:nvPicPr>
+          <p:cNvPr id="31" name="Image 12" descr="preencoded.png"/>
+          <p:cNvPicPr>
+            <a:picLocks noChangeAspect="1"/>
+          </p:cNvPicPr>
+          <p:nvPr/>
+        </p:nvPicPr>
+        <p:blipFill>
+          <a:blip r:embed="rId7"/>
+          <a:stretch>
+            <a:fillRect/>
+          </a:stretch>
+        </p:blipFill>
+        <p:spPr>
+          <a:xfrm>
+            <a:off x="8210345" y="2057349"/>
+            <a:ext cx="3381290" cy="3819430"/>
+          </a:xfrm>
+          <a:prstGeom prst="rect">
+            <a:avLst/>
+          </a:prstGeom>
+        </p:spPr>
+      </p:pic>
+      <p:pic>
+        <p:nvPicPr>
+          <p:cNvPr id="32" name="Image 13" descr="preencoded.png"/>
+          <p:cNvPicPr>
+            <a:picLocks noChangeAspect="1"/>
+          </p:cNvPicPr>
+          <p:nvPr/>
+        </p:nvPicPr>
+        <p:blipFill>
+          <a:blip r:embed="rId8"/>
+          <a:stretch>
+            <a:fillRect/>
+          </a:stretch>
+        </p:blipFill>
+        <p:spPr>
+          <a:xfrm>
+            <a:off x="8448464" y="2295468"/>
+            <a:ext cx="380990" cy="380990"/>
+          </a:xfrm>
+          <a:prstGeom prst="rect">
+            <a:avLst/>
+          </a:prstGeom>
+        </p:spPr>
+      </p:pic>
+      <p:pic>
+        <p:nvPicPr>
+          <p:cNvPr id="33" name="Image 14" descr="preencoded.png"/>
+          <p:cNvPicPr>
+            <a:picLocks noChangeAspect="1"/>
+          </p:cNvPicPr>
+          <p:nvPr/>
+        </p:nvPicPr>
+        <p:blipFill>
+          <a:blip r:embed="rId12"/>
+          <a:stretch>
+            <a:fillRect/>
+          </a:stretch>
+        </p:blipFill>
+        <p:spPr>
+          <a:xfrm>
+            <a:off x="8553236" y="2400240"/>
+            <a:ext cx="171446" cy="171446"/>
+          </a:xfrm>
+          <a:prstGeom prst="rect">
+            <a:avLst/>
+          </a:prstGeom>
+        </p:spPr>
+      </p:pic>
+      <p:sp>
+        <p:nvSpPr>
+          <p:cNvPr id="34" name="Text 17"/>
+          <p:cNvSpPr/>
+          <p:nvPr/>
+        </p:nvSpPr>
+        <p:spPr>
+          <a:xfrm>
+            <a:off x="8943751" y="2352616"/>
+            <a:ext cx="1152115" cy="266693"/>
+          </a:xfrm>
+          <a:prstGeom prst="rect">
+            <a:avLst/>
+          </a:prstGeom>
+          <a:noFill/>
+        </p:spPr>
+        <p:txBody>
+          <a:bodyPr wrap="none" lIns="0" tIns="0" rIns="0" bIns="0" rtlCol="0" anchor="ctr"/>
+          <a:lstStyle/>
+          <a:p>
+            <a:pPr marL="0" indent="0" algn="l">
+              <a:buNone/>
+            </a:pPr>
+            <a:r>
+              <a:rPr lang="en-US" sz="1500" b="1" dirty="0">
+                <a:solidFill>
+                  <a:srgbClr val="0F766E"/>
+                </a:solidFill>
+                <a:latin typeface="等线" panose="02010600030101010101" pitchFamily="34" charset="-122"/>
+                <a:ea typeface="等线" panose="02010600030101010101" pitchFamily="34" charset="-122"/>
+                <a:cs typeface="等线" panose="02010600030101010101" pitchFamily="34" charset="-120"/>
+              </a:rPr>
+              <a:t>整体临床效益</a:t>
+            </a:r>
+            <a:endParaRPr lang="en-US" sz="1500" dirty="0"/>
+          </a:p>
+        </p:txBody>
+      </p:sp>
+      <p:sp>
+        <p:nvSpPr>
+          <p:cNvPr id="35" name="Text 18"/>
+          <p:cNvSpPr/>
+          <p:nvPr/>
+        </p:nvSpPr>
+        <p:spPr>
+          <a:xfrm>
+            <a:off x="8448464" y="2924102"/>
+            <a:ext cx="85342" cy="161921"/>
+          </a:xfrm>
+          <a:prstGeom prst="rect">
+            <a:avLst/>
+          </a:prstGeom>
+          <a:noFill/>
+        </p:spPr>
+        <p:txBody>
+          <a:bodyPr wrap="none" lIns="0" tIns="0" rIns="0" bIns="0" rtlCol="0" anchor="ctr"/>
+          <a:lstStyle/>
+          <a:p>
+            <a:pPr marL="0" indent="0" algn="l">
+              <a:buNone/>
+            </a:pPr>
+            <a:r>
+              <a:rPr lang="en-US" sz="900" dirty="0">
+                <a:solidFill>
+                  <a:srgbClr val="0D9488"/>
+                </a:solidFill>
+                <a:latin typeface="等线" panose="02010600030101010101" pitchFamily="34" charset="-122"/>
+                <a:ea typeface="等线" panose="02010600030101010101" pitchFamily="34" charset="-122"/>
+                <a:cs typeface="等线" panose="02010600030101010101" pitchFamily="34" charset="-120"/>
+              </a:rPr>
+              <a:t>●</a:t>
+            </a:r>
+            <a:endParaRPr lang="en-US" sz="900" dirty="0"/>
+          </a:p>
+        </p:txBody>
+      </p:sp>
+      <p:sp>
+        <p:nvSpPr>
+          <p:cNvPr id="36" name="Text 19"/>
+          <p:cNvSpPr/>
+          <p:nvPr/>
+        </p:nvSpPr>
+        <p:spPr>
+          <a:xfrm>
+            <a:off x="8629434" y="2866953"/>
+            <a:ext cx="2676077" cy="219070"/>
+          </a:xfrm>
+          <a:prstGeom prst="rect">
+            <a:avLst/>
+          </a:prstGeom>
+          <a:noFill/>
+        </p:spPr>
+        <p:txBody>
+          <a:bodyPr wrap="none" lIns="0" tIns="0" rIns="0" bIns="0" rtlCol="0" anchor="ctr"/>
+          <a:lstStyle/>
+          <a:p>
+            <a:pPr marL="0" indent="0" algn="l">
+              <a:buNone/>
+            </a:pPr>
+            <a:r>
+              <a:rPr lang="en-US" sz="1050" b="1" dirty="0">
+                <a:solidFill>
+                  <a:srgbClr val="0F172A"/>
+                </a:solidFill>
+                <a:latin typeface="等线" panose="02010600030101010101" pitchFamily="34" charset="-122"/>
+                <a:ea typeface="等线" panose="02010600030101010101" pitchFamily="34" charset="-122"/>
+                <a:cs typeface="等线" panose="02010600030101010101" pitchFamily="34" charset="-120"/>
+              </a:rPr>
+              <a:t>沟通效率提升</a:t>
+            </a:r>
+            <a:r>
+              <a:rPr lang="en-US" sz="1050" dirty="0">
+                <a:solidFill>
+                  <a:srgbClr val="334155"/>
+                </a:solidFill>
+                <a:latin typeface="等线" panose="02010600030101010101" pitchFamily="34" charset="-122"/>
+                <a:ea typeface="等线" panose="02010600030101010101" pitchFamily="34" charset="-122"/>
+                <a:cs typeface="等线" panose="02010600030101010101" pitchFamily="34" charset="-120"/>
+              </a:rPr>
+              <a:t>：医患面对面交流时间显著增加</a:t>
+            </a:r>
+            <a:endParaRPr lang="en-US" sz="1050" dirty="0"/>
+          </a:p>
+        </p:txBody>
+      </p:sp>
+      <p:sp>
+        <p:nvSpPr>
+          <p:cNvPr id="37" name="Text 20"/>
+          <p:cNvSpPr/>
+          <p:nvPr/>
+        </p:nvSpPr>
+        <p:spPr>
+          <a:xfrm>
+            <a:off x="8448464" y="3286043"/>
+            <a:ext cx="85342" cy="380990"/>
+          </a:xfrm>
+          <a:prstGeom prst="rect">
+            <a:avLst/>
+          </a:prstGeom>
+          <a:noFill/>
+        </p:spPr>
+        <p:txBody>
+          <a:bodyPr wrap="square" lIns="0" tIns="0" rIns="0" bIns="0" rtlCol="0" anchor="ctr"/>
+          <a:lstStyle/>
+          <a:p>
+            <a:pPr marL="0" indent="0" algn="l">
+              <a:buNone/>
+            </a:pPr>
+            <a:r>
+              <a:rPr lang="en-US" sz="900" dirty="0">
+                <a:solidFill>
+                  <a:srgbClr val="0D9488"/>
+                </a:solidFill>
+                <a:latin typeface="等线" panose="02010600030101010101" pitchFamily="34" charset="-122"/>
+                <a:ea typeface="等线" panose="02010600030101010101" pitchFamily="34" charset="-122"/>
+                <a:cs typeface="等线" panose="02010600030101010101" pitchFamily="34" charset="-120"/>
+              </a:rPr>
+              <a:t>●</a:t>
+            </a:r>
+            <a:endParaRPr lang="en-US" sz="900" dirty="0"/>
+          </a:p>
+        </p:txBody>
+      </p:sp>
+      <p:sp>
+        <p:nvSpPr>
+          <p:cNvPr id="38" name="Text 21"/>
+          <p:cNvSpPr/>
+          <p:nvPr/>
+        </p:nvSpPr>
+        <p:spPr>
+          <a:xfrm>
+            <a:off x="8629434" y="3228894"/>
+            <a:ext cx="2733226" cy="438139"/>
+          </a:xfrm>
+          <a:prstGeom prst="rect">
+            <a:avLst/>
+          </a:prstGeom>
+          <a:noFill/>
+        </p:spPr>
+        <p:txBody>
+          <a:bodyPr wrap="square" lIns="0" tIns="0" rIns="0" bIns="0" rtlCol="0" anchor="ctr"/>
+          <a:lstStyle/>
+          <a:p>
+            <a:pPr marL="0" indent="0" algn="l">
+              <a:buNone/>
+            </a:pPr>
+            <a:r>
+              <a:rPr lang="en-US" sz="1050" b="1" dirty="0">
+                <a:solidFill>
+                  <a:srgbClr val="0F172A"/>
+                </a:solidFill>
+                <a:latin typeface="等线" panose="02010600030101010101" pitchFamily="34" charset="-122"/>
+                <a:ea typeface="等线" panose="02010600030101010101" pitchFamily="34" charset="-122"/>
+                <a:cs typeface="等线" panose="02010600030101010101" pitchFamily="34" charset="-120"/>
+              </a:rPr>
+              <a:t>决策风险降低</a:t>
+            </a:r>
+            <a:r>
+              <a:rPr lang="en-US" sz="1050" dirty="0">
+                <a:solidFill>
+                  <a:srgbClr val="334155"/>
+                </a:solidFill>
+                <a:latin typeface="等线" panose="02010600030101010101" pitchFamily="34" charset="-122"/>
+                <a:ea typeface="等线" panose="02010600030101010101" pitchFamily="34" charset="-122"/>
+                <a:cs typeface="等线" panose="02010600030101010101" pitchFamily="34" charset="-120"/>
+              </a:rPr>
+              <a:t>：高压环境下提供快速、准确的循证建议</a:t>
+            </a:r>
+            <a:endParaRPr lang="en-US" sz="1050" dirty="0"/>
+          </a:p>
+        </p:txBody>
+      </p:sp>
+      <p:sp>
+        <p:nvSpPr>
+          <p:cNvPr id="39" name="Text 22"/>
+          <p:cNvSpPr/>
+          <p:nvPr/>
+        </p:nvSpPr>
+        <p:spPr>
+          <a:xfrm>
+            <a:off x="8448464" y="3876578"/>
+            <a:ext cx="85342" cy="380990"/>
+          </a:xfrm>
+          <a:prstGeom prst="rect">
+            <a:avLst/>
+          </a:prstGeom>
+          <a:noFill/>
+        </p:spPr>
+        <p:txBody>
+          <a:bodyPr wrap="square" lIns="0" tIns="0" rIns="0" bIns="0" rtlCol="0" anchor="ctr"/>
+          <a:lstStyle/>
+          <a:p>
+            <a:pPr marL="0" indent="0" algn="l">
+              <a:buNone/>
+            </a:pPr>
+            <a:r>
+              <a:rPr lang="en-US" sz="900" dirty="0">
+                <a:solidFill>
+                  <a:srgbClr val="0D9488"/>
+                </a:solidFill>
+                <a:latin typeface="等线" panose="02010600030101010101" pitchFamily="34" charset="-122"/>
+                <a:ea typeface="等线" panose="02010600030101010101" pitchFamily="34" charset="-122"/>
+                <a:cs typeface="等线" panose="02010600030101010101" pitchFamily="34" charset="-120"/>
+              </a:rPr>
+              <a:t>●</a:t>
+            </a:r>
+            <a:endParaRPr lang="en-US" sz="900" dirty="0"/>
+          </a:p>
+        </p:txBody>
+      </p:sp>
+      <p:sp>
+        <p:nvSpPr>
+          <p:cNvPr id="40" name="Text 23"/>
+          <p:cNvSpPr/>
+          <p:nvPr/>
+        </p:nvSpPr>
+        <p:spPr>
+          <a:xfrm>
+            <a:off x="8629434" y="3819430"/>
+            <a:ext cx="2733226" cy="438139"/>
+          </a:xfrm>
+          <a:prstGeom prst="rect">
+            <a:avLst/>
+          </a:prstGeom>
+          <a:noFill/>
+        </p:spPr>
+        <p:txBody>
+          <a:bodyPr wrap="square" lIns="0" tIns="0" rIns="0" bIns="0" rtlCol="0" anchor="ctr"/>
+          <a:lstStyle/>
+          <a:p>
+            <a:pPr marL="0" indent="0" algn="l">
+              <a:buNone/>
+            </a:pPr>
+            <a:r>
+              <a:rPr lang="en-US" sz="1050" b="1" dirty="0">
+                <a:solidFill>
+                  <a:srgbClr val="0F172A"/>
+                </a:solidFill>
+                <a:latin typeface="等线" panose="02010600030101010101" pitchFamily="34" charset="-122"/>
+                <a:ea typeface="等线" panose="02010600030101010101" pitchFamily="34" charset="-122"/>
+                <a:cs typeface="等线" panose="02010600030101010101" pitchFamily="34" charset="-120"/>
+              </a:rPr>
+              <a:t>工作流程优化</a:t>
+            </a:r>
+            <a:r>
+              <a:rPr lang="en-US" sz="1050" dirty="0">
+                <a:solidFill>
+                  <a:srgbClr val="334155"/>
+                </a:solidFill>
+                <a:latin typeface="等线" panose="02010600030101010101" pitchFamily="34" charset="-122"/>
+                <a:ea typeface="等线" panose="02010600030101010101" pitchFamily="34" charset="-122"/>
+                <a:cs typeface="等线" panose="02010600030101010101" pitchFamily="34" charset="-120"/>
+              </a:rPr>
+              <a:t>：语音+手势控制让医生专注于患者本身</a:t>
+            </a:r>
+            <a:endParaRPr lang="en-US" sz="1050" dirty="0"/>
+          </a:p>
+        </p:txBody>
+      </p:sp>
+      <p:pic>
+        <p:nvPicPr>
+          <p:cNvPr id="41" name="Image 15" descr="preencoded.png"/>
+          <p:cNvPicPr>
+            <a:picLocks noChangeAspect="1"/>
+          </p:cNvPicPr>
+          <p:nvPr/>
+        </p:nvPicPr>
+        <p:blipFill>
+          <a:blip r:embed="rId13">
+            <a:alphaModFix amt="40000"/>
+          </a:blip>
+          <a:stretch>
+            <a:fillRect/>
+          </a:stretch>
+        </p:blipFill>
+        <p:spPr>
+          <a:xfrm>
+            <a:off x="10458189" y="6172046"/>
+            <a:ext cx="304792" cy="9525"/>
+          </a:xfrm>
+          <a:prstGeom prst="rect">
+            <a:avLst/>
+          </a:prstGeom>
+        </p:spPr>
+      </p:pic>
+      <p:pic>
+        <p:nvPicPr>
+          <p:cNvPr id="42" name="Image 16" descr="preencoded.png"/>
+          <p:cNvPicPr>
+            <a:picLocks noChangeAspect="1"/>
+          </p:cNvPicPr>
+          <p:nvPr/>
+        </p:nvPicPr>
+        <p:blipFill>
+          <a:blip r:embed="rId14"/>
+          <a:stretch>
+            <a:fillRect/>
+          </a:stretch>
+        </p:blipFill>
+        <p:spPr>
+          <a:xfrm>
+            <a:off x="10839179" y="6095848"/>
+            <a:ext cx="752456" cy="152396"/>
+          </a:xfrm>
+          <a:prstGeom prst="rect">
+            <a:avLst/>
+          </a:prstGeom>
+        </p:spPr>
+      </p:pic>
+      <p:sp>
+        <p:nvSpPr>
+          <p:cNvPr id="43" name="Text 24"/>
+          <p:cNvSpPr/>
+          <p:nvPr/>
+        </p:nvSpPr>
+        <p:spPr>
+          <a:xfrm>
+            <a:off x="10839179" y="6095848"/>
+            <a:ext cx="761600" cy="152396"/>
+          </a:xfrm>
+          <a:prstGeom prst="rect">
+            <a:avLst/>
+          </a:prstGeom>
+          <a:noFill/>
+        </p:spPr>
+        <p:txBody>
+          <a:bodyPr wrap="none" lIns="0" tIns="0" rIns="0" bIns="0" rtlCol="0" anchor="ctr"/>
+          <a:lstStyle/>
+          <a:p>
+            <a:pPr marL="0" indent="0" algn="l">
+              <a:buNone/>
+            </a:pPr>
+            <a:r>
+              <a:rPr lang="en-US" sz="900" dirty="0">
+                <a:solidFill>
                   <a:srgbClr val="64748B"/>
                 </a:solidFill>
                 <a:latin typeface="等线" panose="02010600030101010101" pitchFamily="34" charset="-122"/>
                 <a:ea typeface="等线" panose="02010600030101010101" pitchFamily="34" charset="-122"/>
                 <a:cs typeface="等线" panose="02010600030101010101" pitchFamily="34" charset="-120"/>
               </a:rPr>
-              <a:t>Partnership Invitation</a:t>
-            </a:r>
-            <a:endParaRPr lang="en-US" sz="1050" dirty="0"/>
-          </a:p>
-        </p:txBody>
-      </p:sp>
-      <p:sp>
-        <p:nvSpPr>
-          <p:cNvPr id="6" name="Text 1"/>
-          <p:cNvSpPr/>
-          <p:nvPr/>
-        </p:nvSpPr>
-        <p:spPr>
-          <a:xfrm>
-            <a:off x="914377" y="838179"/>
-            <a:ext cx="10372085" cy="571486"/>
-          </a:xfrm>
-          <a:prstGeom prst="rect">
-            <a:avLst/>
-          </a:prstGeom>
-          <a:noFill/>
-        </p:spPr>
-        <p:txBody>
-          <a:bodyPr wrap="none" lIns="0" tIns="0" rIns="0" bIns="0" rtlCol="0" anchor="ctr"/>
-          <a:lstStyle/>
-          <a:p>
-            <a:pPr marL="0" indent="0" algn="l">
-              <a:buNone/>
-            </a:pPr>
-            <a:r>
-              <a:rPr lang="en-US" sz="3000" b="1" dirty="0">
-                <a:solidFill>
-                  <a:srgbClr val="0F172A"/>
-                </a:solidFill>
-                <a:latin typeface="等线" panose="02010600030101010101" pitchFamily="34" charset="-122"/>
-                <a:ea typeface="等线" panose="02010600030101010101" pitchFamily="34" charset="-122"/>
-                <a:cs typeface="等线" panose="02010600030101010101" pitchFamily="34" charset="-120"/>
-              </a:rPr>
-              <a:t>合作邀请</a:t>
-            </a:r>
-            <a:endParaRPr lang="en-US" sz="3000" dirty="0"/>
-          </a:p>
-        </p:txBody>
-      </p:sp>
-      <p:sp>
-        <p:nvSpPr>
-          <p:cNvPr id="7" name="Text 2"/>
-          <p:cNvSpPr/>
-          <p:nvPr/>
-        </p:nvSpPr>
-        <p:spPr>
-          <a:xfrm>
-            <a:off x="914377" y="1523962"/>
-            <a:ext cx="10372085" cy="266693"/>
-          </a:xfrm>
-          <a:prstGeom prst="rect">
-            <a:avLst/>
-          </a:prstGeom>
-          <a:noFill/>
-        </p:spPr>
-        <p:txBody>
-          <a:bodyPr wrap="none" lIns="0" tIns="0" rIns="0" bIns="0" rtlCol="0" anchor="ctr"/>
-          <a:lstStyle/>
-          <a:p>
-            <a:pPr marL="0" indent="0" algn="l">
-              <a:buNone/>
-            </a:pPr>
-            <a:r>
-              <a:rPr lang="en-US" sz="1500" dirty="0">
-                <a:solidFill>
-                  <a:srgbClr val="475569"/>
-                </a:solidFill>
-                <a:latin typeface="等线" panose="02010600030101010101" pitchFamily="34" charset="-122"/>
-                <a:ea typeface="等线" panose="02010600030101010101" pitchFamily="34" charset="-122"/>
-                <a:cs typeface="等线" panose="02010600030101010101" pitchFamily="34" charset="-120"/>
-              </a:rPr>
-              <a:t>诚邀各医院参与试点计划</a:t>
-            </a:r>
-            <a:endParaRPr lang="en-US" sz="1500" dirty="0"/>
-          </a:p>
-        </p:txBody>
-      </p:sp>
-      <p:pic>
-        <p:nvPicPr>
-          <p:cNvPr id="8" name="Image 3" descr="preencoded.png"/>
-          <p:cNvPicPr>
-            <a:picLocks noChangeAspect="1"/>
-          </p:cNvPicPr>
-          <p:nvPr/>
-        </p:nvPicPr>
-        <p:blipFill>
-          <a:blip r:embed="rId4"/>
-          <a:stretch>
-            <a:fillRect/>
-          </a:stretch>
-        </p:blipFill>
-        <p:spPr>
-          <a:xfrm>
-            <a:off x="914377" y="2095448"/>
-            <a:ext cx="5067173" cy="2771706"/>
-          </a:xfrm>
-          <a:prstGeom prst="rect">
-            <a:avLst/>
-          </a:prstGeom>
-        </p:spPr>
-      </p:pic>
-      <p:pic>
-        <p:nvPicPr>
-          <p:cNvPr id="9" name="Image 4" descr="preencoded.png"/>
-          <p:cNvPicPr>
-            <a:picLocks noChangeAspect="1"/>
-          </p:cNvPicPr>
-          <p:nvPr/>
-        </p:nvPicPr>
-        <p:blipFill>
-          <a:blip r:embed="rId5"/>
-          <a:stretch>
-            <a:fillRect/>
-          </a:stretch>
-        </p:blipFill>
-        <p:spPr>
-          <a:xfrm>
-            <a:off x="1228694" y="2409765"/>
-            <a:ext cx="457189" cy="457189"/>
-          </a:xfrm>
-          <a:prstGeom prst="rect">
-            <a:avLst/>
-          </a:prstGeom>
-        </p:spPr>
-      </p:pic>
-      <p:pic>
-        <p:nvPicPr>
-          <p:cNvPr id="10" name="Image 5" descr="preencoded.png"/>
-          <p:cNvPicPr>
-            <a:picLocks noChangeAspect="1"/>
-          </p:cNvPicPr>
-          <p:nvPr/>
-        </p:nvPicPr>
-        <p:blipFill>
-          <a:blip r:embed="rId6"/>
-          <a:stretch>
-            <a:fillRect/>
-          </a:stretch>
-        </p:blipFill>
-        <p:spPr>
-          <a:xfrm>
-            <a:off x="1352516" y="2543111"/>
-            <a:ext cx="219070" cy="190495"/>
-          </a:xfrm>
-          <a:prstGeom prst="rect">
-            <a:avLst/>
-          </a:prstGeom>
-        </p:spPr>
-      </p:pic>
-      <p:sp>
-        <p:nvSpPr>
-          <p:cNvPr id="11" name="Text 3"/>
-          <p:cNvSpPr/>
-          <p:nvPr/>
-        </p:nvSpPr>
-        <p:spPr>
-          <a:xfrm>
-            <a:off x="1838279" y="2505012"/>
-            <a:ext cx="752075" cy="266693"/>
-          </a:xfrm>
-          <a:prstGeom prst="rect">
-            <a:avLst/>
-          </a:prstGeom>
-          <a:noFill/>
-        </p:spPr>
-        <p:txBody>
-          <a:bodyPr wrap="none" lIns="0" tIns="0" rIns="0" bIns="0" rtlCol="0" anchor="ctr"/>
-          <a:lstStyle/>
-          <a:p>
-            <a:pPr marL="0" indent="0" algn="l">
-              <a:buNone/>
-            </a:pPr>
-            <a:r>
-              <a:rPr lang="en-US" sz="1500" b="1" dirty="0">
-                <a:solidFill>
-                  <a:srgbClr val="0F172A"/>
-                </a:solidFill>
-                <a:latin typeface="等线" panose="02010600030101010101" pitchFamily="34" charset="-122"/>
-                <a:ea typeface="等线" panose="02010600030101010101" pitchFamily="34" charset="-122"/>
-                <a:cs typeface="等线" panose="02010600030101010101" pitchFamily="34" charset="-120"/>
-              </a:rPr>
-              <a:t>试点支持</a:t>
-            </a:r>
-            <a:endParaRPr lang="en-US" sz="1500" dirty="0"/>
-          </a:p>
-        </p:txBody>
-      </p:sp>
-      <p:pic>
-        <p:nvPicPr>
-          <p:cNvPr id="12" name="Image 6" descr="preencoded.png"/>
-          <p:cNvPicPr>
-            <a:picLocks noChangeAspect="1"/>
-          </p:cNvPicPr>
-          <p:nvPr/>
-        </p:nvPicPr>
-        <p:blipFill>
-          <a:blip r:embed="rId7"/>
-          <a:stretch>
-            <a:fillRect/>
-          </a:stretch>
-        </p:blipFill>
-        <p:spPr>
-          <a:xfrm>
-            <a:off x="1228694" y="3133647"/>
-            <a:ext cx="133347" cy="152396"/>
-          </a:xfrm>
-          <a:prstGeom prst="rect">
-            <a:avLst/>
-          </a:prstGeom>
-        </p:spPr>
-      </p:pic>
-      <p:sp>
-        <p:nvSpPr>
-          <p:cNvPr id="13" name="Text 4"/>
-          <p:cNvSpPr/>
-          <p:nvPr/>
-        </p:nvSpPr>
-        <p:spPr>
-          <a:xfrm>
-            <a:off x="1476338" y="3095548"/>
-            <a:ext cx="1380710" cy="247644"/>
-          </a:xfrm>
-          <a:prstGeom prst="rect">
-            <a:avLst/>
-          </a:prstGeom>
-          <a:noFill/>
-        </p:spPr>
-        <p:txBody>
-          <a:bodyPr wrap="none" lIns="0" tIns="0" rIns="0" bIns="0" rtlCol="0" anchor="ctr"/>
-          <a:lstStyle/>
-          <a:p>
-            <a:pPr marL="0" indent="0" algn="l">
-              <a:buNone/>
-            </a:pPr>
-            <a:r>
-              <a:rPr lang="en-US" sz="1200" dirty="0">
-                <a:solidFill>
-                  <a:srgbClr val="475569"/>
-                </a:solidFill>
-                <a:latin typeface="等线" panose="02010600030101010101" pitchFamily="34" charset="-122"/>
-                <a:ea typeface="等线" panose="02010600030101010101" pitchFamily="34" charset="-122"/>
-                <a:cs typeface="等线" panose="02010600030101010101" pitchFamily="34" charset="-120"/>
-              </a:rPr>
-              <a:t>免费系统部署与培训</a:t>
-            </a:r>
-            <a:endParaRPr lang="en-US" sz="1200" dirty="0"/>
-          </a:p>
-        </p:txBody>
-      </p:sp>
-      <p:pic>
-        <p:nvPicPr>
-          <p:cNvPr id="14" name="Image 7" descr="preencoded.png"/>
-          <p:cNvPicPr>
-            <a:picLocks noChangeAspect="1"/>
-          </p:cNvPicPr>
-          <p:nvPr/>
-        </p:nvPicPr>
-        <p:blipFill>
-          <a:blip r:embed="rId7"/>
-          <a:stretch>
-            <a:fillRect/>
-          </a:stretch>
-        </p:blipFill>
-        <p:spPr>
-          <a:xfrm>
-            <a:off x="1228694" y="3533687"/>
-            <a:ext cx="133347" cy="152396"/>
-          </a:xfrm>
-          <a:prstGeom prst="rect">
-            <a:avLst/>
-          </a:prstGeom>
-        </p:spPr>
-      </p:pic>
-      <p:sp>
-        <p:nvSpPr>
-          <p:cNvPr id="15" name="Text 5"/>
-          <p:cNvSpPr/>
-          <p:nvPr/>
-        </p:nvSpPr>
-        <p:spPr>
-          <a:xfrm>
-            <a:off x="1476338" y="3495588"/>
-            <a:ext cx="1533106" cy="247644"/>
-          </a:xfrm>
-          <a:prstGeom prst="rect">
-            <a:avLst/>
-          </a:prstGeom>
-          <a:noFill/>
-        </p:spPr>
-        <p:txBody>
-          <a:bodyPr wrap="none" lIns="0" tIns="0" rIns="0" bIns="0" rtlCol="0" anchor="ctr"/>
-          <a:lstStyle/>
-          <a:p>
-            <a:pPr marL="0" indent="0" algn="l">
-              <a:buNone/>
-            </a:pPr>
-            <a:r>
-              <a:rPr lang="en-US" sz="1200" dirty="0">
-                <a:solidFill>
-                  <a:srgbClr val="475569"/>
-                </a:solidFill>
-                <a:latin typeface="等线" panose="02010600030101010101" pitchFamily="34" charset="-122"/>
-                <a:ea typeface="等线" panose="02010600030101010101" pitchFamily="34" charset="-122"/>
-                <a:cs typeface="等线" panose="02010600030101010101" pitchFamily="34" charset="-120"/>
-              </a:rPr>
-              <a:t>专业技术团队全程支持</a:t>
-            </a:r>
-            <a:endParaRPr lang="en-US" sz="1200" dirty="0"/>
-          </a:p>
-        </p:txBody>
-      </p:sp>
-      <p:pic>
-        <p:nvPicPr>
-          <p:cNvPr id="16" name="Image 8" descr="preencoded.png"/>
-          <p:cNvPicPr>
-            <a:picLocks noChangeAspect="1"/>
-          </p:cNvPicPr>
-          <p:nvPr/>
-        </p:nvPicPr>
-        <p:blipFill>
-          <a:blip r:embed="rId7"/>
-          <a:stretch>
-            <a:fillRect/>
-          </a:stretch>
-        </p:blipFill>
-        <p:spPr>
-          <a:xfrm>
-            <a:off x="1228694" y="3933727"/>
-            <a:ext cx="133347" cy="152396"/>
-          </a:xfrm>
-          <a:prstGeom prst="rect">
-            <a:avLst/>
-          </a:prstGeom>
-        </p:spPr>
-      </p:pic>
-      <p:sp>
-        <p:nvSpPr>
-          <p:cNvPr id="17" name="Text 6"/>
-          <p:cNvSpPr/>
-          <p:nvPr/>
-        </p:nvSpPr>
-        <p:spPr>
-          <a:xfrm>
-            <a:off x="1476338" y="3895628"/>
-            <a:ext cx="1380710" cy="247644"/>
-          </a:xfrm>
-          <a:prstGeom prst="rect">
-            <a:avLst/>
-          </a:prstGeom>
-          <a:noFill/>
-        </p:spPr>
-        <p:txBody>
-          <a:bodyPr wrap="none" lIns="0" tIns="0" rIns="0" bIns="0" rtlCol="0" anchor="ctr"/>
-          <a:lstStyle/>
-          <a:p>
-            <a:pPr marL="0" indent="0" algn="l">
-              <a:buNone/>
-            </a:pPr>
-            <a:r>
-              <a:rPr lang="en-US" sz="1200" dirty="0">
-                <a:solidFill>
-                  <a:srgbClr val="475569"/>
-                </a:solidFill>
-                <a:latin typeface="等线" panose="02010600030101010101" pitchFamily="34" charset="-122"/>
-                <a:ea typeface="等线" panose="02010600030101010101" pitchFamily="34" charset="-122"/>
-                <a:cs typeface="等线" panose="02010600030101010101" pitchFamily="34" charset="-120"/>
-              </a:rPr>
-              <a:t>定制化功能开发配合</a:t>
-            </a:r>
-            <a:endParaRPr lang="en-US" sz="1200" dirty="0"/>
-          </a:p>
-        </p:txBody>
-      </p:sp>
-      <p:pic>
-        <p:nvPicPr>
-          <p:cNvPr id="18" name="Image 9" descr="preencoded.png"/>
-          <p:cNvPicPr>
-            <a:picLocks noChangeAspect="1"/>
-          </p:cNvPicPr>
-          <p:nvPr/>
-        </p:nvPicPr>
-        <p:blipFill>
-          <a:blip r:embed="rId4"/>
-          <a:stretch>
-            <a:fillRect/>
-          </a:stretch>
-        </p:blipFill>
-        <p:spPr>
-          <a:xfrm>
-            <a:off x="6210145" y="2095448"/>
-            <a:ext cx="5067173" cy="2771706"/>
-          </a:xfrm>
-          <a:prstGeom prst="rect">
-            <a:avLst/>
-          </a:prstGeom>
-        </p:spPr>
-      </p:pic>
-      <p:pic>
-        <p:nvPicPr>
-          <p:cNvPr id="19" name="Image 10" descr="preencoded.png"/>
-          <p:cNvPicPr>
-            <a:picLocks noChangeAspect="1"/>
-          </p:cNvPicPr>
-          <p:nvPr/>
-        </p:nvPicPr>
-        <p:blipFill>
-          <a:blip r:embed="rId5"/>
-          <a:stretch>
-            <a:fillRect/>
-          </a:stretch>
-        </p:blipFill>
-        <p:spPr>
-          <a:xfrm>
-            <a:off x="6524462" y="2409765"/>
-            <a:ext cx="457189" cy="457189"/>
-          </a:xfrm>
-          <a:prstGeom prst="rect">
-            <a:avLst/>
-          </a:prstGeom>
-        </p:spPr>
-      </p:pic>
-      <p:pic>
-        <p:nvPicPr>
-          <p:cNvPr id="20" name="Image 11" descr="preencoded.png"/>
-          <p:cNvPicPr>
-            <a:picLocks noChangeAspect="1"/>
-          </p:cNvPicPr>
-          <p:nvPr/>
-        </p:nvPicPr>
-        <p:blipFill>
-          <a:blip r:embed="rId8"/>
-          <a:stretch>
-            <a:fillRect/>
-          </a:stretch>
-        </p:blipFill>
-        <p:spPr>
-          <a:xfrm>
-            <a:off x="6686383" y="2543111"/>
-            <a:ext cx="142871" cy="190495"/>
-          </a:xfrm>
-          <a:prstGeom prst="rect">
-            <a:avLst/>
-          </a:prstGeom>
-        </p:spPr>
-      </p:pic>
-      <p:sp>
-        <p:nvSpPr>
-          <p:cNvPr id="21" name="Text 7"/>
-          <p:cNvSpPr/>
-          <p:nvPr/>
-        </p:nvSpPr>
-        <p:spPr>
-          <a:xfrm>
-            <a:off x="7134047" y="2505012"/>
-            <a:ext cx="752075" cy="266693"/>
-          </a:xfrm>
-          <a:prstGeom prst="rect">
-            <a:avLst/>
-          </a:prstGeom>
-          <a:noFill/>
-        </p:spPr>
-        <p:txBody>
-          <a:bodyPr wrap="none" lIns="0" tIns="0" rIns="0" bIns="0" rtlCol="0" anchor="ctr"/>
-          <a:lstStyle/>
-          <a:p>
-            <a:pPr marL="0" indent="0" algn="l">
-              <a:buNone/>
-            </a:pPr>
-            <a:r>
-              <a:rPr lang="en-US" sz="1500" b="1" dirty="0">
-                <a:solidFill>
-                  <a:srgbClr val="0F172A"/>
-                </a:solidFill>
-                <a:latin typeface="等线" panose="02010600030101010101" pitchFamily="34" charset="-122"/>
-                <a:ea typeface="等线" panose="02010600030101010101" pitchFamily="34" charset="-122"/>
-                <a:cs typeface="等线" panose="02010600030101010101" pitchFamily="34" charset="-120"/>
-              </a:rPr>
-              <a:t>参与条件</a:t>
-            </a:r>
-            <a:endParaRPr lang="en-US" sz="1500" dirty="0"/>
-          </a:p>
-        </p:txBody>
-      </p:sp>
-      <p:pic>
-        <p:nvPicPr>
-          <p:cNvPr id="22" name="Image 12" descr="preencoded.png"/>
-          <p:cNvPicPr>
-            <a:picLocks noChangeAspect="1"/>
-          </p:cNvPicPr>
-          <p:nvPr/>
-        </p:nvPicPr>
-        <p:blipFill>
-          <a:blip r:embed="rId9"/>
-          <a:stretch>
-            <a:fillRect/>
-          </a:stretch>
-        </p:blipFill>
-        <p:spPr>
-          <a:xfrm>
-            <a:off x="6524462" y="3190795"/>
-            <a:ext cx="57149" cy="57149"/>
-          </a:xfrm>
-          <a:prstGeom prst="rect">
-            <a:avLst/>
-          </a:prstGeom>
-        </p:spPr>
-      </p:pic>
-      <p:sp>
-        <p:nvSpPr>
-          <p:cNvPr id="23" name="Text 8"/>
-          <p:cNvSpPr/>
-          <p:nvPr/>
-        </p:nvSpPr>
-        <p:spPr>
-          <a:xfrm>
-            <a:off x="6695908" y="3095548"/>
-            <a:ext cx="1066393" cy="247644"/>
-          </a:xfrm>
-          <a:prstGeom prst="rect">
-            <a:avLst/>
-          </a:prstGeom>
-          <a:noFill/>
-        </p:spPr>
-        <p:txBody>
-          <a:bodyPr wrap="none" lIns="0" tIns="0" rIns="0" bIns="0" rtlCol="0" anchor="ctr"/>
-          <a:lstStyle/>
-          <a:p>
-            <a:pPr marL="0" indent="0" algn="l">
-              <a:buNone/>
-            </a:pPr>
-            <a:r>
-              <a:rPr lang="en-US" sz="1200" dirty="0">
-                <a:solidFill>
-                  <a:srgbClr val="475569"/>
-                </a:solidFill>
-                <a:latin typeface="等线" panose="02010600030101010101" pitchFamily="34" charset="-122"/>
-                <a:ea typeface="等线" panose="02010600030101010101" pitchFamily="34" charset="-122"/>
-                <a:cs typeface="等线" panose="02010600030101010101" pitchFamily="34" charset="-120"/>
-              </a:rPr>
-              <a:t>具备基础IT环境</a:t>
-            </a:r>
-            <a:endParaRPr lang="en-US" sz="1200" dirty="0"/>
-          </a:p>
-        </p:txBody>
-      </p:sp>
-      <p:pic>
-        <p:nvPicPr>
-          <p:cNvPr id="24" name="Image 13" descr="preencoded.png"/>
-          <p:cNvPicPr>
-            <a:picLocks noChangeAspect="1"/>
-          </p:cNvPicPr>
-          <p:nvPr/>
-        </p:nvPicPr>
-        <p:blipFill>
-          <a:blip r:embed="rId9"/>
-          <a:stretch>
-            <a:fillRect/>
-          </a:stretch>
-        </p:blipFill>
-        <p:spPr>
-          <a:xfrm>
-            <a:off x="6524462" y="3590835"/>
-            <a:ext cx="57149" cy="57149"/>
-          </a:xfrm>
-          <a:prstGeom prst="rect">
-            <a:avLst/>
-          </a:prstGeom>
-        </p:spPr>
-      </p:pic>
-      <p:sp>
-        <p:nvSpPr>
-          <p:cNvPr id="25" name="Text 9"/>
-          <p:cNvSpPr/>
-          <p:nvPr/>
-        </p:nvSpPr>
-        <p:spPr>
-          <a:xfrm>
-            <a:off x="6695908" y="3495588"/>
-            <a:ext cx="1380710" cy="247644"/>
-          </a:xfrm>
-          <a:prstGeom prst="rect">
-            <a:avLst/>
-          </a:prstGeom>
-          <a:noFill/>
-        </p:spPr>
-        <p:txBody>
-          <a:bodyPr wrap="none" lIns="0" tIns="0" rIns="0" bIns="0" rtlCol="0" anchor="ctr"/>
-          <a:lstStyle/>
-          <a:p>
-            <a:pPr marL="0" indent="0" algn="l">
-              <a:buNone/>
-            </a:pPr>
-            <a:r>
-              <a:rPr lang="en-US" sz="1200" dirty="0">
-                <a:solidFill>
-                  <a:srgbClr val="475569"/>
-                </a:solidFill>
-                <a:latin typeface="等线" panose="02010600030101010101" pitchFamily="34" charset="-122"/>
-                <a:ea typeface="等线" panose="02010600030101010101" pitchFamily="34" charset="-122"/>
-                <a:cs typeface="等线" panose="02010600030101010101" pitchFamily="34" charset="-120"/>
-              </a:rPr>
-              <a:t>配合数据对接与测试</a:t>
-            </a:r>
-            <a:endParaRPr lang="en-US" sz="1200" dirty="0"/>
-          </a:p>
-        </p:txBody>
-      </p:sp>
-      <p:pic>
-        <p:nvPicPr>
-          <p:cNvPr id="26" name="Image 14" descr="preencoded.png"/>
-          <p:cNvPicPr>
-            <a:picLocks noChangeAspect="1"/>
-          </p:cNvPicPr>
-          <p:nvPr/>
-        </p:nvPicPr>
-        <p:blipFill>
-          <a:blip r:embed="rId9"/>
-          <a:stretch>
-            <a:fillRect/>
-          </a:stretch>
-        </p:blipFill>
-        <p:spPr>
-          <a:xfrm>
-            <a:off x="6524462" y="3990875"/>
-            <a:ext cx="57149" cy="57149"/>
-          </a:xfrm>
-          <a:prstGeom prst="rect">
-            <a:avLst/>
-          </a:prstGeom>
-        </p:spPr>
-      </p:pic>
-      <p:sp>
-        <p:nvSpPr>
-          <p:cNvPr id="27" name="Text 10"/>
-          <p:cNvSpPr/>
-          <p:nvPr/>
-        </p:nvSpPr>
-        <p:spPr>
-          <a:xfrm>
-            <a:off x="6695908" y="3895628"/>
-            <a:ext cx="1380710" cy="247644"/>
-          </a:xfrm>
-          <a:prstGeom prst="rect">
-            <a:avLst/>
-          </a:prstGeom>
-          <a:noFill/>
-        </p:spPr>
-        <p:txBody>
-          <a:bodyPr wrap="none" lIns="0" tIns="0" rIns="0" bIns="0" rtlCol="0" anchor="ctr"/>
-          <a:lstStyle/>
-          <a:p>
-            <a:pPr marL="0" indent="0" algn="l">
-              <a:buNone/>
-            </a:pPr>
-            <a:r>
-              <a:rPr lang="en-US" sz="1200" dirty="0">
-                <a:solidFill>
-                  <a:srgbClr val="475569"/>
-                </a:solidFill>
-                <a:latin typeface="等线" panose="02010600030101010101" pitchFamily="34" charset="-122"/>
-                <a:ea typeface="等线" panose="02010600030101010101" pitchFamily="34" charset="-122"/>
-                <a:cs typeface="等线" panose="02010600030101010101" pitchFamily="34" charset="-120"/>
-              </a:rPr>
-              <a:t>提供使用反馈与建议</a:t>
-            </a:r>
-            <a:endParaRPr lang="en-US" sz="1200" dirty="0"/>
-          </a:p>
-        </p:txBody>
-      </p:sp>
-      <p:pic>
-        <p:nvPicPr>
-          <p:cNvPr id="28" name="Image 15" descr="preencoded.png"/>
-          <p:cNvPicPr>
-            <a:picLocks noChangeAspect="1"/>
-          </p:cNvPicPr>
-          <p:nvPr/>
-        </p:nvPicPr>
-        <p:blipFill>
-          <a:blip r:embed="rId10"/>
-          <a:stretch>
-            <a:fillRect/>
-          </a:stretch>
-        </p:blipFill>
-        <p:spPr>
-          <a:xfrm>
-            <a:off x="914377" y="5095748"/>
-            <a:ext cx="10362941" cy="1238219"/>
-          </a:xfrm>
-          <a:prstGeom prst="rect">
-            <a:avLst/>
-          </a:prstGeom>
-        </p:spPr>
-      </p:pic>
-      <p:pic>
-        <p:nvPicPr>
-          <p:cNvPr id="29" name="Image 16" descr="preencoded.png"/>
-          <p:cNvPicPr>
-            <a:picLocks noChangeAspect="1"/>
-          </p:cNvPicPr>
-          <p:nvPr/>
-        </p:nvPicPr>
-        <p:blipFill>
-          <a:blip r:embed="rId11"/>
-          <a:stretch>
-            <a:fillRect/>
-          </a:stretch>
-        </p:blipFill>
-        <p:spPr>
-          <a:xfrm>
-            <a:off x="1219170" y="5400540"/>
-            <a:ext cx="457189" cy="457189"/>
-          </a:xfrm>
-          <a:prstGeom prst="rect">
-            <a:avLst/>
-          </a:prstGeom>
-        </p:spPr>
-      </p:pic>
-      <p:pic>
-        <p:nvPicPr>
-          <p:cNvPr id="30" name="Image 17" descr="preencoded.png"/>
-          <p:cNvPicPr>
-            <a:picLocks noChangeAspect="1"/>
-          </p:cNvPicPr>
-          <p:nvPr/>
-        </p:nvPicPr>
-        <p:blipFill>
-          <a:blip r:embed="rId12"/>
-          <a:stretch>
-            <a:fillRect/>
-          </a:stretch>
-        </p:blipFill>
-        <p:spPr>
-          <a:xfrm>
-            <a:off x="1352516" y="5533887"/>
-            <a:ext cx="190495" cy="190495"/>
-          </a:xfrm>
-          <a:prstGeom prst="rect">
-            <a:avLst/>
-          </a:prstGeom>
-        </p:spPr>
-      </p:pic>
-      <p:sp>
-        <p:nvSpPr>
-          <p:cNvPr id="31" name="Text 11"/>
-          <p:cNvSpPr/>
-          <p:nvPr/>
-        </p:nvSpPr>
-        <p:spPr>
-          <a:xfrm>
-            <a:off x="1866853" y="5400540"/>
-            <a:ext cx="3780950" cy="266693"/>
-          </a:xfrm>
-          <a:prstGeom prst="rect">
-            <a:avLst/>
-          </a:prstGeom>
-          <a:noFill/>
-        </p:spPr>
-        <p:txBody>
-          <a:bodyPr wrap="none" lIns="0" tIns="0" rIns="0" bIns="0" rtlCol="0" anchor="ctr"/>
-          <a:lstStyle/>
-          <a:p>
-            <a:pPr marL="0" indent="0" algn="l">
-              <a:buNone/>
-            </a:pPr>
-            <a:r>
-              <a:rPr lang="en-US" sz="1350" b="1" dirty="0">
-                <a:solidFill>
-                  <a:srgbClr val="FFFFFF"/>
-                </a:solidFill>
-                <a:latin typeface="等线" panose="02010600030101010101" pitchFamily="34" charset="-122"/>
-                <a:ea typeface="等线" panose="02010600030101010101" pitchFamily="34" charset="-122"/>
-                <a:cs typeface="等线" panose="02010600030101010101" pitchFamily="34" charset="-120"/>
-              </a:rPr>
-              <a:t>共同目标</a:t>
-            </a:r>
-            <a:endParaRPr lang="en-US" sz="1350" dirty="0"/>
-          </a:p>
-        </p:txBody>
-      </p:sp>
-      <p:sp>
-        <p:nvSpPr>
-          <p:cNvPr id="32" name="Text 12"/>
-          <p:cNvSpPr/>
-          <p:nvPr/>
-        </p:nvSpPr>
-        <p:spPr>
-          <a:xfrm>
-            <a:off x="1866853" y="5743431"/>
-            <a:ext cx="3780950" cy="285743"/>
-          </a:xfrm>
-          <a:prstGeom prst="rect">
-            <a:avLst/>
-          </a:prstGeom>
-          <a:noFill/>
-        </p:spPr>
-        <p:txBody>
-          <a:bodyPr wrap="none" lIns="0" tIns="0" rIns="0" bIns="0" rtlCol="0" anchor="ctr"/>
-          <a:lstStyle/>
-          <a:p>
-            <a:pPr marL="0" indent="0" algn="l">
-              <a:buNone/>
-            </a:pPr>
-            <a:r>
-              <a:rPr lang="en-US" sz="1350" dirty="0">
-                <a:solidFill>
-                  <a:srgbClr val="F0FDFA"/>
-                </a:solidFill>
-                <a:latin typeface="等线" panose="02010600030101010101" pitchFamily="34" charset="-122"/>
-                <a:ea typeface="等线" panose="02010600030101010101" pitchFamily="34" charset="-122"/>
-                <a:cs typeface="等线" panose="02010600030101010101" pitchFamily="34" charset="-120"/>
-              </a:rPr>
-              <a:t>推进基层医疗AI化进程，提升医疗服务质量与效率</a:t>
-            </a:r>
-            <a:endParaRPr lang="en-US" sz="1350" dirty="0"/>
-          </a:p>
-        </p:txBody>
-      </p:sp>
-      <p:pic>
-        <p:nvPicPr>
-          <p:cNvPr id="33" name="Image 18" descr="preencoded.png"/>
-          <p:cNvPicPr>
-            <a:picLocks noChangeAspect="1"/>
-          </p:cNvPicPr>
-          <p:nvPr/>
-        </p:nvPicPr>
-        <p:blipFill>
-          <a:blip r:embed="rId13"/>
-          <a:stretch>
-            <a:fillRect/>
-          </a:stretch>
-        </p:blipFill>
-        <p:spPr>
-          <a:xfrm>
-            <a:off x="8858029" y="5467213"/>
-            <a:ext cx="2124022" cy="495288"/>
-          </a:xfrm>
-          <a:prstGeom prst="rect">
-            <a:avLst/>
-          </a:prstGeom>
-        </p:spPr>
-      </p:pic>
-      <p:pic>
-        <p:nvPicPr>
-          <p:cNvPr id="34" name="Image 19" descr="preencoded.png"/>
-          <p:cNvPicPr>
-            <a:picLocks noChangeAspect="1"/>
-          </p:cNvPicPr>
-          <p:nvPr/>
-        </p:nvPicPr>
-        <p:blipFill>
-          <a:blip r:embed="rId14"/>
-          <a:stretch>
-            <a:fillRect/>
-          </a:stretch>
-        </p:blipFill>
-        <p:spPr>
-          <a:xfrm>
-            <a:off x="9172346" y="5619610"/>
-            <a:ext cx="190495" cy="190495"/>
-          </a:xfrm>
-          <a:prstGeom prst="rect">
-            <a:avLst/>
-          </a:prstGeom>
-        </p:spPr>
-      </p:pic>
-      <p:sp>
-        <p:nvSpPr>
-          <p:cNvPr id="35" name="Text 13"/>
-          <p:cNvSpPr/>
-          <p:nvPr/>
-        </p:nvSpPr>
-        <p:spPr>
-          <a:xfrm>
-            <a:off x="9477138" y="5467213"/>
-            <a:ext cx="1514056" cy="190495"/>
-          </a:xfrm>
-          <a:prstGeom prst="rect">
-            <a:avLst/>
-          </a:prstGeom>
-          <a:noFill/>
-        </p:spPr>
-        <p:txBody>
-          <a:bodyPr wrap="none" lIns="0" tIns="0" rIns="0" bIns="0" rtlCol="0" anchor="ctr"/>
-          <a:lstStyle/>
-          <a:p>
-            <a:pPr marL="0" indent="0" algn="l">
-              <a:buNone/>
-            </a:pPr>
-            <a:r>
-              <a:rPr lang="en-US" sz="1050" dirty="0">
-                <a:solidFill>
-                  <a:srgbClr val="CCFBF1"/>
-                </a:solidFill>
-                <a:latin typeface="等线" panose="02010600030101010101" pitchFamily="34" charset="-122"/>
-                <a:ea typeface="等线" panose="02010600030101010101" pitchFamily="34" charset="-122"/>
-                <a:cs typeface="等线" panose="02010600030101010101" pitchFamily="34" charset="-120"/>
-              </a:rPr>
-              <a:t>联系我们</a:t>
-            </a:r>
-            <a:r>
-              <a:rPr lang="zh-CN" altLang="en-US" sz="1050" dirty="0">
-                <a:solidFill>
-                  <a:srgbClr val="CCFBF1"/>
-                </a:solidFill>
-                <a:latin typeface="等线" panose="02010600030101010101" pitchFamily="34" charset="-122"/>
-                <a:ea typeface="等线" panose="02010600030101010101" pitchFamily="34" charset="-122"/>
-                <a:cs typeface="等线" panose="02010600030101010101" pitchFamily="34" charset="-120"/>
-              </a:rPr>
-              <a:t>：</a:t>
-            </a:r>
-            <a:endParaRPr lang="zh-CN" altLang="en-US" sz="1050" dirty="0">
-              <a:solidFill>
-                <a:srgbClr val="CCFBF1"/>
-              </a:solidFill>
-              <a:latin typeface="等线" panose="02010600030101010101" pitchFamily="34" charset="-122"/>
-              <a:ea typeface="等线" panose="02010600030101010101" pitchFamily="34" charset="-122"/>
-              <a:cs typeface="等线" panose="02010600030101010101" pitchFamily="34" charset="-120"/>
-            </a:endParaRPr>
-          </a:p>
-          <a:p>
-            <a:pPr marL="0" indent="0" algn="l">
-              <a:buNone/>
-            </a:pPr>
-            <a:r>
-              <a:rPr lang="zh-CN" altLang="en-US" sz="1050" dirty="0">
-                <a:solidFill>
-                  <a:srgbClr val="CCFBF1"/>
-                </a:solidFill>
-                <a:latin typeface="等线" panose="02010600030101010101" pitchFamily="34" charset="-122"/>
-                <a:ea typeface="等线" panose="02010600030101010101" pitchFamily="34" charset="-122"/>
-                <a:cs typeface="等线" panose="02010600030101010101" pitchFamily="34" charset="-120"/>
-              </a:rPr>
-              <a:t>刘朝晖</a:t>
-            </a:r>
-            <a:r>
-              <a:rPr lang="en-US" altLang="zh-CN" sz="1050" dirty="0">
-                <a:solidFill>
-                  <a:srgbClr val="CCFBF1"/>
-                </a:solidFill>
-                <a:latin typeface="等线" panose="02010600030101010101" pitchFamily="34" charset="-122"/>
-                <a:ea typeface="等线" panose="02010600030101010101" pitchFamily="34" charset="-122"/>
-                <a:cs typeface="等线" panose="02010600030101010101" pitchFamily="34" charset="-120"/>
-              </a:rPr>
-              <a:t> 13458003688</a:t>
-            </a:r>
-            <a:endParaRPr lang="en-US" altLang="zh-CN" sz="1050" dirty="0">
-              <a:solidFill>
-                <a:srgbClr val="CCFBF1"/>
-              </a:solidFill>
-              <a:latin typeface="等线" panose="02010600030101010101" pitchFamily="34" charset="-122"/>
-              <a:ea typeface="等线" panose="02010600030101010101" pitchFamily="34" charset="-122"/>
-              <a:cs typeface="等线" panose="02010600030101010101" pitchFamily="34" charset="-120"/>
-            </a:endParaRPr>
-          </a:p>
-        </p:txBody>
-      </p:sp>
-      <p:sp>
-        <p:nvSpPr>
-          <p:cNvPr id="36" name="Text 14"/>
-          <p:cNvSpPr/>
-          <p:nvPr/>
-        </p:nvSpPr>
-        <p:spPr>
-          <a:xfrm>
-            <a:off x="9477138" y="5695808"/>
-            <a:ext cx="1514056" cy="266693"/>
-          </a:xfrm>
-          <a:prstGeom prst="rect">
-            <a:avLst/>
-          </a:prstGeom>
-          <a:noFill/>
-        </p:spPr>
-        <p:txBody>
-          <a:bodyPr wrap="none" lIns="0" tIns="0" rIns="0" bIns="0" rtlCol="0" anchor="ctr"/>
-          <a:lstStyle/>
-          <a:p>
-            <a:pPr marL="0" indent="0" algn="l">
-              <a:buNone/>
-            </a:pPr>
-            <a:r>
-              <a:rPr lang="en-US" sz="1350" b="1" dirty="0">
-                <a:solidFill>
-                  <a:srgbClr val="FFFFFF"/>
-                </a:solidFill>
-                <a:latin typeface="等线" panose="02010600030101010101" pitchFamily="34" charset="-122"/>
-                <a:ea typeface="等线" panose="02010600030101010101" pitchFamily="34" charset="-122"/>
-                <a:cs typeface="等线" panose="02010600030101010101" pitchFamily="34" charset="-120"/>
-              </a:rPr>
-              <a:t>开启智慧医疗新篇章</a:t>
-            </a:r>
-            <a:endParaRPr lang="en-US" sz="1350" dirty="0"/>
-          </a:p>
-        </p:txBody>
-      </p:sp>
-      <p:pic>
-        <p:nvPicPr>
-          <p:cNvPr id="37" name="Image 20" descr="preencoded.png"/>
-          <p:cNvPicPr>
-            <a:picLocks noChangeAspect="1"/>
-          </p:cNvPicPr>
-          <p:nvPr/>
-        </p:nvPicPr>
-        <p:blipFill>
-          <a:blip r:embed="rId15">
-            <a:alphaModFix amt="6000"/>
-          </a:blip>
-          <a:stretch>
-            <a:fillRect/>
-          </a:stretch>
-        </p:blipFill>
-        <p:spPr>
-          <a:xfrm>
-            <a:off x="10267693" y="438139"/>
-            <a:ext cx="1266793" cy="1266793"/>
-          </a:xfrm>
-          <a:prstGeom prst="rect">
-            <a:avLst/>
-          </a:prstGeom>
-        </p:spPr>
-      </p:pic>
-      <p:pic>
-        <p:nvPicPr>
-          <p:cNvPr id="38" name="Image 21" descr="preencoded.png"/>
-          <p:cNvPicPr>
-            <a:picLocks noChangeAspect="1"/>
-          </p:cNvPicPr>
-          <p:nvPr/>
-        </p:nvPicPr>
-        <p:blipFill>
-          <a:blip r:embed="rId16">
-            <a:alphaModFix amt="6000"/>
-          </a:blip>
-          <a:stretch>
-            <a:fillRect/>
-          </a:stretch>
-        </p:blipFill>
-        <p:spPr>
-          <a:xfrm>
-            <a:off x="10505812" y="676258"/>
-            <a:ext cx="1181070" cy="1181070"/>
-          </a:xfrm>
-          <a:prstGeom prst="rect">
-            <a:avLst/>
-          </a:prstGeom>
-        </p:spPr>
-      </p:pic>
-      <p:pic>
-        <p:nvPicPr>
-          <p:cNvPr id="39" name="Image 22" descr="preencoded.png"/>
-          <p:cNvPicPr>
-            <a:picLocks noChangeAspect="1"/>
-          </p:cNvPicPr>
-          <p:nvPr/>
-        </p:nvPicPr>
-        <p:blipFill>
-          <a:blip r:embed="rId17"/>
-          <a:stretch>
-            <a:fillRect/>
-          </a:stretch>
-        </p:blipFill>
-        <p:spPr>
-          <a:xfrm>
-            <a:off x="914377" y="6314917"/>
-            <a:ext cx="10362941" cy="9525"/>
-          </a:xfrm>
-          <a:prstGeom prst="rect">
-            <a:avLst/>
-          </a:prstGeom>
-        </p:spPr>
-      </p:pic>
+              <a:t>MEDICAL AI</a:t>
+            </a:r>
+            <a:endParaRPr lang="en-US" sz="900" dirty="0"/>
+          </a:p>
+        </p:txBody>
+      </p:sp>
     </p:spTree>
   </p:cSld>
   <p:clrMapOvr>
@@ -38065,6 +38517,1654 @@
           <p:nvPr/>
         </p:nvPicPr>
         <p:blipFill>
+          <a:blip r:embed="rId2">
+            <a:alphaModFix amt="4000"/>
+          </a:blip>
+          <a:stretch>
+            <a:fillRect/>
+          </a:stretch>
+        </p:blipFill>
+        <p:spPr>
+          <a:xfrm>
+            <a:off x="0" y="0"/>
+            <a:ext cx="12191695" cy="6857829"/>
+          </a:xfrm>
+          <a:prstGeom prst="rect">
+            <a:avLst/>
+          </a:prstGeom>
+        </p:spPr>
+      </p:pic>
+      <p:pic>
+        <p:nvPicPr>
+          <p:cNvPr id="4" name="Image 2" descr="preencoded.png"/>
+          <p:cNvPicPr>
+            <a:picLocks noChangeAspect="1"/>
+          </p:cNvPicPr>
+          <p:nvPr/>
+        </p:nvPicPr>
+        <p:blipFill>
+          <a:blip r:embed="rId3"/>
+          <a:stretch>
+            <a:fillRect/>
+          </a:stretch>
+        </p:blipFill>
+        <p:spPr>
+          <a:xfrm>
+            <a:off x="609585" y="2514537"/>
+            <a:ext cx="28574" cy="914377"/>
+          </a:xfrm>
+          <a:prstGeom prst="rect">
+            <a:avLst/>
+          </a:prstGeom>
+        </p:spPr>
+      </p:pic>
+      <p:pic>
+        <p:nvPicPr>
+          <p:cNvPr id="5" name="Image 3" descr="preencoded.png"/>
+          <p:cNvPicPr>
+            <a:picLocks noChangeAspect="1"/>
+          </p:cNvPicPr>
+          <p:nvPr/>
+        </p:nvPicPr>
+        <p:blipFill>
+          <a:blip r:embed="rId4"/>
+          <a:stretch>
+            <a:fillRect/>
+          </a:stretch>
+        </p:blipFill>
+        <p:spPr>
+          <a:xfrm>
+            <a:off x="609585" y="3543211"/>
+            <a:ext cx="28574" cy="457189"/>
+          </a:xfrm>
+          <a:prstGeom prst="rect">
+            <a:avLst/>
+          </a:prstGeom>
+        </p:spPr>
+      </p:pic>
+      <p:pic>
+        <p:nvPicPr>
+          <p:cNvPr id="6" name="Image 4" descr="preencoded.png"/>
+          <p:cNvPicPr>
+            <a:picLocks noChangeAspect="1"/>
+          </p:cNvPicPr>
+          <p:nvPr/>
+        </p:nvPicPr>
+        <p:blipFill>
+          <a:blip r:embed="rId5"/>
+          <a:stretch>
+            <a:fillRect/>
+          </a:stretch>
+        </p:blipFill>
+        <p:spPr>
+          <a:xfrm>
+            <a:off x="609585" y="4114697"/>
+            <a:ext cx="28574" cy="228594"/>
+          </a:xfrm>
+          <a:prstGeom prst="rect">
+            <a:avLst/>
+          </a:prstGeom>
+        </p:spPr>
+      </p:pic>
+      <p:pic>
+        <p:nvPicPr>
+          <p:cNvPr id="7" name="Image 5" descr="preencoded.png"/>
+          <p:cNvPicPr>
+            <a:picLocks noChangeAspect="1"/>
+          </p:cNvPicPr>
+          <p:nvPr/>
+        </p:nvPicPr>
+        <p:blipFill>
+          <a:blip r:embed="rId6"/>
+          <a:stretch>
+            <a:fillRect/>
+          </a:stretch>
+        </p:blipFill>
+        <p:spPr>
+          <a:xfrm>
+            <a:off x="1066773" y="695308"/>
+            <a:ext cx="304792" cy="19050"/>
+          </a:xfrm>
+          <a:prstGeom prst="rect">
+            <a:avLst/>
+          </a:prstGeom>
+        </p:spPr>
+      </p:pic>
+      <p:sp>
+        <p:nvSpPr>
+          <p:cNvPr id="8" name="Text 0"/>
+          <p:cNvSpPr/>
+          <p:nvPr/>
+        </p:nvSpPr>
+        <p:spPr>
+          <a:xfrm>
+            <a:off x="1485863" y="609585"/>
+            <a:ext cx="1771225" cy="190495"/>
+          </a:xfrm>
+          <a:prstGeom prst="rect">
+            <a:avLst/>
+          </a:prstGeom>
+          <a:noFill/>
+        </p:spPr>
+        <p:txBody>
+          <a:bodyPr wrap="none" lIns="0" tIns="0" rIns="0" bIns="0" rtlCol="0" anchor="ctr"/>
+          <a:lstStyle/>
+          <a:p>
+            <a:pPr marL="0" indent="0" algn="l">
+              <a:buNone/>
+            </a:pPr>
+            <a:r>
+              <a:rPr lang="en-US" sz="1050" b="1" dirty="0">
+                <a:solidFill>
+                  <a:srgbClr val="0F766E"/>
+                </a:solidFill>
+                <a:latin typeface="等线" panose="02010600030101010101" pitchFamily="34" charset="-122"/>
+                <a:ea typeface="等线" panose="02010600030101010101" pitchFamily="34" charset="-122"/>
+                <a:cs typeface="等线" panose="02010600030101010101" pitchFamily="34" charset="-120"/>
+              </a:rPr>
+              <a:t>System Architecture</a:t>
+            </a:r>
+            <a:endParaRPr lang="en-US" sz="1050" dirty="0"/>
+          </a:p>
+        </p:txBody>
+      </p:sp>
+      <p:sp>
+        <p:nvSpPr>
+          <p:cNvPr id="9" name="Text 1"/>
+          <p:cNvSpPr/>
+          <p:nvPr/>
+        </p:nvSpPr>
+        <p:spPr>
+          <a:xfrm>
+            <a:off x="1066773" y="914377"/>
+            <a:ext cx="10524481" cy="476238"/>
+          </a:xfrm>
+          <a:prstGeom prst="rect">
+            <a:avLst/>
+          </a:prstGeom>
+          <a:noFill/>
+        </p:spPr>
+        <p:txBody>
+          <a:bodyPr wrap="none" lIns="0" tIns="0" rIns="0" bIns="0" rtlCol="0" anchor="ctr"/>
+          <a:lstStyle/>
+          <a:p>
+            <a:pPr marL="0" indent="0" algn="l">
+              <a:buNone/>
+            </a:pPr>
+            <a:r>
+              <a:rPr lang="en-US" sz="3000" b="1" dirty="0">
+                <a:solidFill>
+                  <a:srgbClr val="0F172A"/>
+                </a:solidFill>
+                <a:latin typeface="等线" panose="02010600030101010101" pitchFamily="34" charset="-122"/>
+                <a:ea typeface="等线" panose="02010600030101010101" pitchFamily="34" charset="-122"/>
+                <a:cs typeface="等线" panose="02010600030101010101" pitchFamily="34" charset="-120"/>
+              </a:rPr>
+              <a:t>微服务架构设计</a:t>
+            </a:r>
+            <a:endParaRPr lang="en-US" sz="3000" dirty="0"/>
+          </a:p>
+        </p:txBody>
+      </p:sp>
+      <p:sp>
+        <p:nvSpPr>
+          <p:cNvPr id="10" name="Text 2"/>
+          <p:cNvSpPr/>
+          <p:nvPr/>
+        </p:nvSpPr>
+        <p:spPr>
+          <a:xfrm>
+            <a:off x="1066773" y="1466813"/>
+            <a:ext cx="8543331" cy="285743"/>
+          </a:xfrm>
+          <a:prstGeom prst="rect">
+            <a:avLst/>
+          </a:prstGeom>
+          <a:noFill/>
+        </p:spPr>
+        <p:txBody>
+          <a:bodyPr wrap="none" lIns="0" tIns="0" rIns="0" bIns="0" rtlCol="0" anchor="ctr"/>
+          <a:lstStyle/>
+          <a:p>
+            <a:pPr marL="0" indent="0" algn="l">
+              <a:buNone/>
+            </a:pPr>
+            <a:r>
+              <a:rPr lang="en-US" sz="1350" dirty="0">
+                <a:solidFill>
+                  <a:srgbClr val="475569"/>
+                </a:solidFill>
+                <a:latin typeface="等线" panose="02010600030101010101" pitchFamily="34" charset="-122"/>
+                <a:ea typeface="等线" panose="02010600030101010101" pitchFamily="34" charset="-122"/>
+                <a:cs typeface="等线" panose="02010600030101010101" pitchFamily="34" charset="-120"/>
+              </a:rPr>
+              <a:t>为集成智能眼镜，我们在现有系统基础上扩展轻量化微服务，实现无缝对接与高效协同。</a:t>
+            </a:r>
+            <a:endParaRPr lang="en-US" sz="1350" dirty="0"/>
+          </a:p>
+        </p:txBody>
+      </p:sp>
+      <p:pic>
+        <p:nvPicPr>
+          <p:cNvPr id="11" name="Image 6" descr="preencoded.png"/>
+          <p:cNvPicPr>
+            <a:picLocks noChangeAspect="1"/>
+          </p:cNvPicPr>
+          <p:nvPr/>
+        </p:nvPicPr>
+        <p:blipFill>
+          <a:blip r:embed="rId7"/>
+          <a:stretch>
+            <a:fillRect/>
+          </a:stretch>
+        </p:blipFill>
+        <p:spPr>
+          <a:xfrm>
+            <a:off x="1066773" y="1981150"/>
+            <a:ext cx="3381290" cy="3895628"/>
+          </a:xfrm>
+          <a:prstGeom prst="rect">
+            <a:avLst/>
+          </a:prstGeom>
+        </p:spPr>
+      </p:pic>
+      <p:pic>
+        <p:nvPicPr>
+          <p:cNvPr id="12" name="Image 7" descr="preencoded.png"/>
+          <p:cNvPicPr>
+            <a:picLocks noChangeAspect="1"/>
+          </p:cNvPicPr>
+          <p:nvPr/>
+        </p:nvPicPr>
+        <p:blipFill>
+          <a:blip r:embed="rId8"/>
+          <a:stretch>
+            <a:fillRect/>
+          </a:stretch>
+        </p:blipFill>
+        <p:spPr>
+          <a:xfrm>
+            <a:off x="1304892" y="2219270"/>
+            <a:ext cx="2905052" cy="542911"/>
+          </a:xfrm>
+          <a:prstGeom prst="rect">
+            <a:avLst/>
+          </a:prstGeom>
+        </p:spPr>
+      </p:pic>
+      <p:pic>
+        <p:nvPicPr>
+          <p:cNvPr id="13" name="Image 8" descr="preencoded.png"/>
+          <p:cNvPicPr>
+            <a:picLocks noChangeAspect="1"/>
+          </p:cNvPicPr>
+          <p:nvPr/>
+        </p:nvPicPr>
+        <p:blipFill>
+          <a:blip r:embed="rId9"/>
+          <a:stretch>
+            <a:fillRect/>
+          </a:stretch>
+        </p:blipFill>
+        <p:spPr>
+          <a:xfrm>
+            <a:off x="1304892" y="2219270"/>
+            <a:ext cx="380990" cy="380990"/>
+          </a:xfrm>
+          <a:prstGeom prst="rect">
+            <a:avLst/>
+          </a:prstGeom>
+        </p:spPr>
+      </p:pic>
+      <p:sp>
+        <p:nvSpPr>
+          <p:cNvPr id="14" name="Text 3"/>
+          <p:cNvSpPr/>
+          <p:nvPr/>
+        </p:nvSpPr>
+        <p:spPr>
+          <a:xfrm>
+            <a:off x="1400140" y="2276418"/>
+            <a:ext cx="209164" cy="266693"/>
+          </a:xfrm>
+          <a:prstGeom prst="rect">
+            <a:avLst/>
+          </a:prstGeom>
+          <a:noFill/>
+        </p:spPr>
+        <p:txBody>
+          <a:bodyPr wrap="none" lIns="0" tIns="0" rIns="0" bIns="0" rtlCol="0" anchor="ctr"/>
+          <a:lstStyle/>
+          <a:p>
+            <a:pPr marL="0" indent="0" algn="l">
+              <a:buNone/>
+            </a:pPr>
+            <a:r>
+              <a:rPr lang="en-US" sz="1350" b="1" dirty="0">
+                <a:solidFill>
+                  <a:srgbClr val="0F766E"/>
+                </a:solidFill>
+                <a:latin typeface="等线" panose="02010600030101010101" pitchFamily="34" charset="-122"/>
+                <a:ea typeface="等线" panose="02010600030101010101" pitchFamily="34" charset="-122"/>
+                <a:cs typeface="等线" panose="02010600030101010101" pitchFamily="34" charset="-120"/>
+              </a:rPr>
+              <a:t>01</a:t>
+            </a:r>
+            <a:endParaRPr lang="en-US" sz="1350" dirty="0"/>
+          </a:p>
+        </p:txBody>
+      </p:sp>
+      <p:sp>
+        <p:nvSpPr>
+          <p:cNvPr id="15" name="Text 4"/>
+          <p:cNvSpPr/>
+          <p:nvPr/>
+        </p:nvSpPr>
+        <p:spPr>
+          <a:xfrm>
+            <a:off x="1800180" y="2276418"/>
+            <a:ext cx="961620" cy="266693"/>
+          </a:xfrm>
+          <a:prstGeom prst="rect">
+            <a:avLst/>
+          </a:prstGeom>
+          <a:noFill/>
+        </p:spPr>
+        <p:txBody>
+          <a:bodyPr wrap="none" lIns="0" tIns="0" rIns="0" bIns="0" rtlCol="0" anchor="ctr"/>
+          <a:lstStyle/>
+          <a:p>
+            <a:pPr marL="0" indent="0" algn="l">
+              <a:buNone/>
+            </a:pPr>
+            <a:r>
+              <a:rPr lang="en-US" sz="1500" b="1" dirty="0">
+                <a:solidFill>
+                  <a:srgbClr val="0F766E"/>
+                </a:solidFill>
+                <a:latin typeface="等线" panose="02010600030101010101" pitchFamily="34" charset="-122"/>
+                <a:ea typeface="等线" panose="02010600030101010101" pitchFamily="34" charset="-122"/>
+                <a:cs typeface="等线" panose="02010600030101010101" pitchFamily="34" charset="-120"/>
+              </a:rPr>
+              <a:t>终端接入层</a:t>
+            </a:r>
+            <a:endParaRPr lang="en-US" sz="1500" dirty="0"/>
+          </a:p>
+        </p:txBody>
+      </p:sp>
+      <p:sp>
+        <p:nvSpPr>
+          <p:cNvPr id="16" name="Text 5"/>
+          <p:cNvSpPr/>
+          <p:nvPr/>
+        </p:nvSpPr>
+        <p:spPr>
+          <a:xfrm>
+            <a:off x="1304892" y="3009825"/>
+            <a:ext cx="85342" cy="380990"/>
+          </a:xfrm>
+          <a:prstGeom prst="rect">
+            <a:avLst/>
+          </a:prstGeom>
+          <a:noFill/>
+        </p:spPr>
+        <p:txBody>
+          <a:bodyPr wrap="square" lIns="0" tIns="0" rIns="0" bIns="0" rtlCol="0" anchor="ctr"/>
+          <a:lstStyle/>
+          <a:p>
+            <a:pPr marL="0" indent="0" algn="l">
+              <a:buNone/>
+            </a:pPr>
+            <a:r>
+              <a:rPr lang="en-US" sz="900" dirty="0">
+                <a:solidFill>
+                  <a:srgbClr val="0D9488"/>
+                </a:solidFill>
+                <a:latin typeface="等线" panose="02010600030101010101" pitchFamily="34" charset="-122"/>
+                <a:ea typeface="等线" panose="02010600030101010101" pitchFamily="34" charset="-122"/>
+                <a:cs typeface="等线" panose="02010600030101010101" pitchFamily="34" charset="-120"/>
+              </a:rPr>
+              <a:t>●</a:t>
+            </a:r>
+            <a:endParaRPr lang="en-US" sz="900" dirty="0"/>
+          </a:p>
+        </p:txBody>
+      </p:sp>
+      <p:sp>
+        <p:nvSpPr>
+          <p:cNvPr id="17" name="Text 6"/>
+          <p:cNvSpPr/>
+          <p:nvPr/>
+        </p:nvSpPr>
+        <p:spPr>
+          <a:xfrm>
+            <a:off x="1495388" y="2952676"/>
+            <a:ext cx="2733226" cy="438139"/>
+          </a:xfrm>
+          <a:prstGeom prst="rect">
+            <a:avLst/>
+          </a:prstGeom>
+          <a:noFill/>
+        </p:spPr>
+        <p:txBody>
+          <a:bodyPr wrap="square" lIns="0" tIns="0" rIns="0" bIns="0" rtlCol="0" anchor="ctr"/>
+          <a:lstStyle/>
+          <a:p>
+            <a:pPr marL="0" indent="0" algn="l">
+              <a:buNone/>
+            </a:pPr>
+            <a:r>
+              <a:rPr lang="en-US" sz="1050" b="1" dirty="0">
+                <a:solidFill>
+                  <a:srgbClr val="0F172A"/>
+                </a:solidFill>
+                <a:latin typeface="等线" panose="02010600030101010101" pitchFamily="34" charset="-122"/>
+                <a:ea typeface="等线" panose="02010600030101010101" pitchFamily="34" charset="-122"/>
+                <a:cs typeface="等线" panose="02010600030101010101" pitchFamily="34" charset="-120"/>
+              </a:rPr>
+              <a:t>智能眼镜</a:t>
+            </a:r>
+            <a:r>
+              <a:rPr lang="en-US" sz="1050" dirty="0">
+                <a:solidFill>
+                  <a:srgbClr val="334155"/>
+                </a:solidFill>
+                <a:latin typeface="等线" panose="02010600030101010101" pitchFamily="34" charset="-122"/>
+                <a:ea typeface="等线" panose="02010600030101010101" pitchFamily="34" charset="-122"/>
+                <a:cs typeface="等线" panose="02010600030101010101" pitchFamily="34" charset="-120"/>
+              </a:rPr>
+              <a:t>：作为新型移动终端，通过专用SDK接入系统</a:t>
+            </a:r>
+            <a:endParaRPr lang="en-US" sz="1050" dirty="0"/>
+          </a:p>
+        </p:txBody>
+      </p:sp>
+      <p:sp>
+        <p:nvSpPr>
+          <p:cNvPr id="18" name="Text 7"/>
+          <p:cNvSpPr/>
+          <p:nvPr/>
+        </p:nvSpPr>
+        <p:spPr>
+          <a:xfrm>
+            <a:off x="1304892" y="3590835"/>
+            <a:ext cx="85342" cy="380990"/>
+          </a:xfrm>
+          <a:prstGeom prst="rect">
+            <a:avLst/>
+          </a:prstGeom>
+          <a:noFill/>
+        </p:spPr>
+        <p:txBody>
+          <a:bodyPr wrap="square" lIns="0" tIns="0" rIns="0" bIns="0" rtlCol="0" anchor="ctr"/>
+          <a:lstStyle/>
+          <a:p>
+            <a:pPr marL="0" indent="0" algn="l">
+              <a:buNone/>
+            </a:pPr>
+            <a:r>
+              <a:rPr lang="en-US" sz="900" dirty="0">
+                <a:solidFill>
+                  <a:srgbClr val="0D9488"/>
+                </a:solidFill>
+                <a:latin typeface="等线" panose="02010600030101010101" pitchFamily="34" charset="-122"/>
+                <a:ea typeface="等线" panose="02010600030101010101" pitchFamily="34" charset="-122"/>
+                <a:cs typeface="等线" panose="02010600030101010101" pitchFamily="34" charset="-120"/>
+              </a:rPr>
+              <a:t>●</a:t>
+            </a:r>
+            <a:endParaRPr lang="en-US" sz="900" dirty="0"/>
+          </a:p>
+        </p:txBody>
+      </p:sp>
+      <p:sp>
+        <p:nvSpPr>
+          <p:cNvPr id="19" name="Text 8"/>
+          <p:cNvSpPr/>
+          <p:nvPr/>
+        </p:nvSpPr>
+        <p:spPr>
+          <a:xfrm>
+            <a:off x="1495388" y="3533687"/>
+            <a:ext cx="2733226" cy="438139"/>
+          </a:xfrm>
+          <a:prstGeom prst="rect">
+            <a:avLst/>
+          </a:prstGeom>
+          <a:noFill/>
+        </p:spPr>
+        <p:txBody>
+          <a:bodyPr wrap="square" lIns="0" tIns="0" rIns="0" bIns="0" rtlCol="0" anchor="ctr"/>
+          <a:lstStyle/>
+          <a:p>
+            <a:pPr marL="0" indent="0" algn="l">
+              <a:buNone/>
+            </a:pPr>
+            <a:r>
+              <a:rPr lang="en-US" sz="1050" b="1" dirty="0">
+                <a:solidFill>
+                  <a:srgbClr val="0F172A"/>
+                </a:solidFill>
+                <a:latin typeface="等线" panose="02010600030101010101" pitchFamily="34" charset="-122"/>
+                <a:ea typeface="等线" panose="02010600030101010101" pitchFamily="34" charset="-122"/>
+                <a:cs typeface="等线" panose="02010600030101010101" pitchFamily="34" charset="-120"/>
+              </a:rPr>
+              <a:t>语音交互</a:t>
+            </a:r>
+            <a:r>
+              <a:rPr lang="en-US" sz="1050" dirty="0">
+                <a:solidFill>
+                  <a:srgbClr val="334155"/>
+                </a:solidFill>
+                <a:latin typeface="等线" panose="02010600030101010101" pitchFamily="34" charset="-122"/>
+                <a:ea typeface="等线" panose="02010600030101010101" pitchFamily="34" charset="-122"/>
+                <a:cs typeface="等线" panose="02010600030101010101" pitchFamily="34" charset="-120"/>
+              </a:rPr>
+              <a:t>：复用现有语音识别能力，实现免提操作</a:t>
+            </a:r>
+            <a:endParaRPr lang="en-US" sz="1050" dirty="0"/>
+          </a:p>
+        </p:txBody>
+      </p:sp>
+      <p:sp>
+        <p:nvSpPr>
+          <p:cNvPr id="20" name="Text 9"/>
+          <p:cNvSpPr/>
+          <p:nvPr/>
+        </p:nvSpPr>
+        <p:spPr>
+          <a:xfrm>
+            <a:off x="1304892" y="4181370"/>
+            <a:ext cx="85342" cy="380990"/>
+          </a:xfrm>
+          <a:prstGeom prst="rect">
+            <a:avLst/>
+          </a:prstGeom>
+          <a:noFill/>
+        </p:spPr>
+        <p:txBody>
+          <a:bodyPr wrap="square" lIns="0" tIns="0" rIns="0" bIns="0" rtlCol="0" anchor="ctr"/>
+          <a:lstStyle/>
+          <a:p>
+            <a:pPr marL="0" indent="0" algn="l">
+              <a:buNone/>
+            </a:pPr>
+            <a:r>
+              <a:rPr lang="en-US" sz="900" dirty="0">
+                <a:solidFill>
+                  <a:srgbClr val="0D9488"/>
+                </a:solidFill>
+                <a:latin typeface="等线" panose="02010600030101010101" pitchFamily="34" charset="-122"/>
+                <a:ea typeface="等线" panose="02010600030101010101" pitchFamily="34" charset="-122"/>
+                <a:cs typeface="等线" panose="02010600030101010101" pitchFamily="34" charset="-120"/>
+              </a:rPr>
+              <a:t>●</a:t>
+            </a:r>
+            <a:endParaRPr lang="en-US" sz="900" dirty="0"/>
+          </a:p>
+        </p:txBody>
+      </p:sp>
+      <p:sp>
+        <p:nvSpPr>
+          <p:cNvPr id="21" name="Text 10"/>
+          <p:cNvSpPr/>
+          <p:nvPr/>
+        </p:nvSpPr>
+        <p:spPr>
+          <a:xfrm>
+            <a:off x="1495388" y="4124222"/>
+            <a:ext cx="2733226" cy="438139"/>
+          </a:xfrm>
+          <a:prstGeom prst="rect">
+            <a:avLst/>
+          </a:prstGeom>
+          <a:noFill/>
+        </p:spPr>
+        <p:txBody>
+          <a:bodyPr wrap="square" lIns="0" tIns="0" rIns="0" bIns="0" rtlCol="0" anchor="ctr"/>
+          <a:lstStyle/>
+          <a:p>
+            <a:pPr marL="0" indent="0" algn="l">
+              <a:buNone/>
+            </a:pPr>
+            <a:r>
+              <a:rPr lang="en-US" sz="1050" b="1" dirty="0">
+                <a:solidFill>
+                  <a:srgbClr val="0F172A"/>
+                </a:solidFill>
+                <a:latin typeface="等线" panose="02010600030101010101" pitchFamily="34" charset="-122"/>
+                <a:ea typeface="等线" panose="02010600030101010101" pitchFamily="34" charset="-122"/>
+                <a:cs typeface="等线" panose="02010600030101010101" pitchFamily="34" charset="-120"/>
+              </a:rPr>
+              <a:t>AR显示引擎</a:t>
+            </a:r>
+            <a:r>
+              <a:rPr lang="en-US" sz="1050" dirty="0">
+                <a:solidFill>
+                  <a:srgbClr val="334155"/>
+                </a:solidFill>
+                <a:latin typeface="等线" panose="02010600030101010101" pitchFamily="34" charset="-122"/>
+                <a:ea typeface="等线" panose="02010600030101010101" pitchFamily="34" charset="-122"/>
+                <a:cs typeface="等线" panose="02010600030101010101" pitchFamily="34" charset="-120"/>
+              </a:rPr>
+              <a:t>：负责将AI返回信息渲染为AR叠加层</a:t>
+            </a:r>
+            <a:endParaRPr lang="en-US" sz="1050" dirty="0"/>
+          </a:p>
+        </p:txBody>
+      </p:sp>
+      <p:pic>
+        <p:nvPicPr>
+          <p:cNvPr id="22" name="Image 9" descr="preencoded.png"/>
+          <p:cNvPicPr>
+            <a:picLocks noChangeAspect="1"/>
+          </p:cNvPicPr>
+          <p:nvPr/>
+        </p:nvPicPr>
+        <p:blipFill>
+          <a:blip r:embed="rId10"/>
+          <a:stretch>
+            <a:fillRect/>
+          </a:stretch>
+        </p:blipFill>
+        <p:spPr>
+          <a:xfrm>
+            <a:off x="4429014" y="3819430"/>
+            <a:ext cx="114297" cy="171446"/>
+          </a:xfrm>
+          <a:prstGeom prst="rect">
+            <a:avLst/>
+          </a:prstGeom>
+        </p:spPr>
+      </p:pic>
+      <p:pic>
+        <p:nvPicPr>
+          <p:cNvPr id="23" name="Image 10" descr="preencoded.png"/>
+          <p:cNvPicPr>
+            <a:picLocks noChangeAspect="1"/>
+          </p:cNvPicPr>
+          <p:nvPr/>
+        </p:nvPicPr>
+        <p:blipFill>
+          <a:blip r:embed="rId11"/>
+          <a:stretch>
+            <a:fillRect/>
+          </a:stretch>
+        </p:blipFill>
+        <p:spPr>
+          <a:xfrm>
+            <a:off x="4638559" y="1981150"/>
+            <a:ext cx="3381290" cy="3895628"/>
+          </a:xfrm>
+          <a:prstGeom prst="rect">
+            <a:avLst/>
+          </a:prstGeom>
+        </p:spPr>
+      </p:pic>
+      <p:pic>
+        <p:nvPicPr>
+          <p:cNvPr id="24" name="Image 11" descr="preencoded.png"/>
+          <p:cNvPicPr>
+            <a:picLocks noChangeAspect="1"/>
+          </p:cNvPicPr>
+          <p:nvPr/>
+        </p:nvPicPr>
+        <p:blipFill>
+          <a:blip r:embed="rId12"/>
+          <a:stretch>
+            <a:fillRect/>
+          </a:stretch>
+        </p:blipFill>
+        <p:spPr>
+          <a:xfrm>
+            <a:off x="4876678" y="2219270"/>
+            <a:ext cx="2905052" cy="542911"/>
+          </a:xfrm>
+          <a:prstGeom prst="rect">
+            <a:avLst/>
+          </a:prstGeom>
+        </p:spPr>
+      </p:pic>
+      <p:pic>
+        <p:nvPicPr>
+          <p:cNvPr id="25" name="Image 12" descr="preencoded.png"/>
+          <p:cNvPicPr>
+            <a:picLocks noChangeAspect="1"/>
+          </p:cNvPicPr>
+          <p:nvPr/>
+        </p:nvPicPr>
+        <p:blipFill>
+          <a:blip r:embed="rId9"/>
+          <a:stretch>
+            <a:fillRect/>
+          </a:stretch>
+        </p:blipFill>
+        <p:spPr>
+          <a:xfrm>
+            <a:off x="4876678" y="2219270"/>
+            <a:ext cx="380990" cy="380990"/>
+          </a:xfrm>
+          <a:prstGeom prst="rect">
+            <a:avLst/>
+          </a:prstGeom>
+        </p:spPr>
+      </p:pic>
+      <p:sp>
+        <p:nvSpPr>
+          <p:cNvPr id="26" name="Text 11"/>
+          <p:cNvSpPr/>
+          <p:nvPr/>
+        </p:nvSpPr>
+        <p:spPr>
+          <a:xfrm>
+            <a:off x="4971926" y="2276418"/>
+            <a:ext cx="209164" cy="266693"/>
+          </a:xfrm>
+          <a:prstGeom prst="rect">
+            <a:avLst/>
+          </a:prstGeom>
+          <a:noFill/>
+        </p:spPr>
+        <p:txBody>
+          <a:bodyPr wrap="none" lIns="0" tIns="0" rIns="0" bIns="0" rtlCol="0" anchor="ctr"/>
+          <a:lstStyle/>
+          <a:p>
+            <a:pPr marL="0" indent="0" algn="l">
+              <a:buNone/>
+            </a:pPr>
+            <a:r>
+              <a:rPr lang="en-US" sz="1350" b="1" dirty="0">
+                <a:solidFill>
+                  <a:srgbClr val="0F766E"/>
+                </a:solidFill>
+                <a:latin typeface="等线" panose="02010600030101010101" pitchFamily="34" charset="-122"/>
+                <a:ea typeface="等线" panose="02010600030101010101" pitchFamily="34" charset="-122"/>
+                <a:cs typeface="等线" panose="02010600030101010101" pitchFamily="34" charset="-120"/>
+              </a:rPr>
+              <a:t>02</a:t>
+            </a:r>
+            <a:endParaRPr lang="en-US" sz="1350" dirty="0"/>
+          </a:p>
+        </p:txBody>
+      </p:sp>
+      <p:sp>
+        <p:nvSpPr>
+          <p:cNvPr id="27" name="Text 12"/>
+          <p:cNvSpPr/>
+          <p:nvPr/>
+        </p:nvSpPr>
+        <p:spPr>
+          <a:xfrm>
+            <a:off x="5371966" y="2276418"/>
+            <a:ext cx="1152115" cy="266693"/>
+          </a:xfrm>
+          <a:prstGeom prst="rect">
+            <a:avLst/>
+          </a:prstGeom>
+          <a:noFill/>
+        </p:spPr>
+        <p:txBody>
+          <a:bodyPr wrap="none" lIns="0" tIns="0" rIns="0" bIns="0" rtlCol="0" anchor="ctr"/>
+          <a:lstStyle/>
+          <a:p>
+            <a:pPr marL="0" indent="0" algn="l">
+              <a:buNone/>
+            </a:pPr>
+            <a:r>
+              <a:rPr lang="en-US" sz="1500" b="1" dirty="0">
+                <a:solidFill>
+                  <a:srgbClr val="0F766E"/>
+                </a:solidFill>
+                <a:latin typeface="等线" panose="02010600030101010101" pitchFamily="34" charset="-122"/>
+                <a:ea typeface="等线" panose="02010600030101010101" pitchFamily="34" charset="-122"/>
+                <a:cs typeface="等线" panose="02010600030101010101" pitchFamily="34" charset="-120"/>
+              </a:rPr>
+              <a:t>微服务集成层</a:t>
+            </a:r>
+            <a:endParaRPr lang="en-US" sz="1500" dirty="0"/>
+          </a:p>
+        </p:txBody>
+      </p:sp>
+      <p:sp>
+        <p:nvSpPr>
+          <p:cNvPr id="28" name="Text 13"/>
+          <p:cNvSpPr/>
+          <p:nvPr/>
+        </p:nvSpPr>
+        <p:spPr>
+          <a:xfrm>
+            <a:off x="4876678" y="3009825"/>
+            <a:ext cx="85342" cy="380990"/>
+          </a:xfrm>
+          <a:prstGeom prst="rect">
+            <a:avLst/>
+          </a:prstGeom>
+          <a:noFill/>
+        </p:spPr>
+        <p:txBody>
+          <a:bodyPr wrap="square" lIns="0" tIns="0" rIns="0" bIns="0" rtlCol="0" anchor="ctr"/>
+          <a:lstStyle/>
+          <a:p>
+            <a:pPr marL="0" indent="0" algn="l">
+              <a:buNone/>
+            </a:pPr>
+            <a:r>
+              <a:rPr lang="en-US" sz="900" dirty="0">
+                <a:solidFill>
+                  <a:srgbClr val="0D9488"/>
+                </a:solidFill>
+                <a:latin typeface="等线" panose="02010600030101010101" pitchFamily="34" charset="-122"/>
+                <a:ea typeface="等线" panose="02010600030101010101" pitchFamily="34" charset="-122"/>
+                <a:cs typeface="等线" panose="02010600030101010101" pitchFamily="34" charset="-120"/>
+              </a:rPr>
+              <a:t>●</a:t>
+            </a:r>
+            <a:endParaRPr lang="en-US" sz="900" dirty="0"/>
+          </a:p>
+        </p:txBody>
+      </p:sp>
+      <p:sp>
+        <p:nvSpPr>
+          <p:cNvPr id="29" name="Text 14"/>
+          <p:cNvSpPr/>
+          <p:nvPr/>
+        </p:nvSpPr>
+        <p:spPr>
+          <a:xfrm>
+            <a:off x="5057649" y="2952676"/>
+            <a:ext cx="2733226" cy="438139"/>
+          </a:xfrm>
+          <a:prstGeom prst="rect">
+            <a:avLst/>
+          </a:prstGeom>
+          <a:noFill/>
+        </p:spPr>
+        <p:txBody>
+          <a:bodyPr wrap="square" lIns="0" tIns="0" rIns="0" bIns="0" rtlCol="0" anchor="ctr"/>
+          <a:lstStyle/>
+          <a:p>
+            <a:pPr marL="0" indent="0" algn="l">
+              <a:buNone/>
+            </a:pPr>
+            <a:r>
+              <a:rPr lang="en-US" sz="1050" b="1" dirty="0">
+                <a:solidFill>
+                  <a:srgbClr val="0F172A"/>
+                </a:solidFill>
+                <a:latin typeface="等线" panose="02010600030101010101" pitchFamily="34" charset="-122"/>
+                <a:ea typeface="等线" panose="02010600030101010101" pitchFamily="34" charset="-122"/>
+                <a:cs typeface="等线" panose="02010600030101010101" pitchFamily="34" charset="-120"/>
+              </a:rPr>
+              <a:t>智能眼镜网关服务</a:t>
+            </a:r>
+            <a:r>
+              <a:rPr lang="en-US" sz="1050" dirty="0">
+                <a:solidFill>
+                  <a:srgbClr val="334155"/>
+                </a:solidFill>
+                <a:latin typeface="等线" panose="02010600030101010101" pitchFamily="34" charset="-122"/>
+                <a:ea typeface="等线" panose="02010600030101010101" pitchFamily="34" charset="-122"/>
+                <a:cs typeface="等线" panose="02010600030101010101" pitchFamily="34" charset="-120"/>
+              </a:rPr>
+              <a:t>：统一处理眼镜端的认证、请求路由与协议转换</a:t>
+            </a:r>
+            <a:endParaRPr lang="en-US" sz="1050" dirty="0"/>
+          </a:p>
+        </p:txBody>
+      </p:sp>
+      <p:sp>
+        <p:nvSpPr>
+          <p:cNvPr id="30" name="Text 15"/>
+          <p:cNvSpPr/>
+          <p:nvPr/>
+        </p:nvSpPr>
+        <p:spPr>
+          <a:xfrm>
+            <a:off x="4876678" y="3590835"/>
+            <a:ext cx="85342" cy="380990"/>
+          </a:xfrm>
+          <a:prstGeom prst="rect">
+            <a:avLst/>
+          </a:prstGeom>
+          <a:noFill/>
+        </p:spPr>
+        <p:txBody>
+          <a:bodyPr wrap="square" lIns="0" tIns="0" rIns="0" bIns="0" rtlCol="0" anchor="ctr"/>
+          <a:lstStyle/>
+          <a:p>
+            <a:pPr marL="0" indent="0" algn="l">
+              <a:buNone/>
+            </a:pPr>
+            <a:r>
+              <a:rPr lang="en-US" sz="900" dirty="0">
+                <a:solidFill>
+                  <a:srgbClr val="0D9488"/>
+                </a:solidFill>
+                <a:latin typeface="等线" panose="02010600030101010101" pitchFamily="34" charset="-122"/>
+                <a:ea typeface="等线" panose="02010600030101010101" pitchFamily="34" charset="-122"/>
+                <a:cs typeface="等线" panose="02010600030101010101" pitchFamily="34" charset="-120"/>
+              </a:rPr>
+              <a:t>●</a:t>
+            </a:r>
+            <a:endParaRPr lang="en-US" sz="900" dirty="0"/>
+          </a:p>
+        </p:txBody>
+      </p:sp>
+      <p:sp>
+        <p:nvSpPr>
+          <p:cNvPr id="31" name="Text 16"/>
+          <p:cNvSpPr/>
+          <p:nvPr/>
+        </p:nvSpPr>
+        <p:spPr>
+          <a:xfrm>
+            <a:off x="5057649" y="3533687"/>
+            <a:ext cx="2733226" cy="438139"/>
+          </a:xfrm>
+          <a:prstGeom prst="rect">
+            <a:avLst/>
+          </a:prstGeom>
+          <a:noFill/>
+        </p:spPr>
+        <p:txBody>
+          <a:bodyPr wrap="square" lIns="0" tIns="0" rIns="0" bIns="0" rtlCol="0" anchor="ctr"/>
+          <a:lstStyle/>
+          <a:p>
+            <a:pPr marL="0" indent="0" algn="l">
+              <a:buNone/>
+            </a:pPr>
+            <a:r>
+              <a:rPr lang="en-US" sz="1050" b="1" dirty="0">
+                <a:solidFill>
+                  <a:srgbClr val="0F172A"/>
+                </a:solidFill>
+                <a:latin typeface="等线" panose="02010600030101010101" pitchFamily="34" charset="-122"/>
+                <a:ea typeface="等线" panose="02010600030101010101" pitchFamily="34" charset="-122"/>
+                <a:cs typeface="等线" panose="02010600030101010101" pitchFamily="34" charset="-120"/>
+              </a:rPr>
+              <a:t>实时消息队列</a:t>
+            </a:r>
+            <a:r>
+              <a:rPr lang="en-US" sz="1050" dirty="0">
+                <a:solidFill>
+                  <a:srgbClr val="334155"/>
+                </a:solidFill>
+                <a:latin typeface="等线" panose="02010600030101010101" pitchFamily="34" charset="-122"/>
+                <a:ea typeface="等线" panose="02010600030101010101" pitchFamily="34" charset="-122"/>
+                <a:cs typeface="等线" panose="02010600030101010101" pitchFamily="34" charset="-120"/>
+              </a:rPr>
+              <a:t>：确保查房、手术等高并发场景下的低延迟通信</a:t>
+            </a:r>
+            <a:endParaRPr lang="en-US" sz="1050" dirty="0"/>
+          </a:p>
+        </p:txBody>
+      </p:sp>
+      <p:sp>
+        <p:nvSpPr>
+          <p:cNvPr id="32" name="Text 17"/>
+          <p:cNvSpPr/>
+          <p:nvPr/>
+        </p:nvSpPr>
+        <p:spPr>
+          <a:xfrm>
+            <a:off x="4876678" y="4181370"/>
+            <a:ext cx="85342" cy="380990"/>
+          </a:xfrm>
+          <a:prstGeom prst="rect">
+            <a:avLst/>
+          </a:prstGeom>
+          <a:noFill/>
+        </p:spPr>
+        <p:txBody>
+          <a:bodyPr wrap="square" lIns="0" tIns="0" rIns="0" bIns="0" rtlCol="0" anchor="ctr"/>
+          <a:lstStyle/>
+          <a:p>
+            <a:pPr marL="0" indent="0" algn="l">
+              <a:buNone/>
+            </a:pPr>
+            <a:r>
+              <a:rPr lang="en-US" sz="900" dirty="0">
+                <a:solidFill>
+                  <a:srgbClr val="0D9488"/>
+                </a:solidFill>
+                <a:latin typeface="等线" panose="02010600030101010101" pitchFamily="34" charset="-122"/>
+                <a:ea typeface="等线" panose="02010600030101010101" pitchFamily="34" charset="-122"/>
+                <a:cs typeface="等线" panose="02010600030101010101" pitchFamily="34" charset="-120"/>
+              </a:rPr>
+              <a:t>●</a:t>
+            </a:r>
+            <a:endParaRPr lang="en-US" sz="900" dirty="0"/>
+          </a:p>
+        </p:txBody>
+      </p:sp>
+      <p:sp>
+        <p:nvSpPr>
+          <p:cNvPr id="33" name="Text 18"/>
+          <p:cNvSpPr/>
+          <p:nvPr/>
+        </p:nvSpPr>
+        <p:spPr>
+          <a:xfrm>
+            <a:off x="5057649" y="4124222"/>
+            <a:ext cx="2733226" cy="438139"/>
+          </a:xfrm>
+          <a:prstGeom prst="rect">
+            <a:avLst/>
+          </a:prstGeom>
+          <a:noFill/>
+        </p:spPr>
+        <p:txBody>
+          <a:bodyPr wrap="square" lIns="0" tIns="0" rIns="0" bIns="0" rtlCol="0" anchor="ctr"/>
+          <a:lstStyle/>
+          <a:p>
+            <a:pPr marL="0" indent="0" algn="l">
+              <a:buNone/>
+            </a:pPr>
+            <a:r>
+              <a:rPr lang="en-US" sz="1050" b="1" dirty="0">
+                <a:solidFill>
+                  <a:srgbClr val="0F172A"/>
+                </a:solidFill>
+                <a:latin typeface="等线" panose="02010600030101010101" pitchFamily="34" charset="-122"/>
+                <a:ea typeface="等线" panose="02010600030101010101" pitchFamily="34" charset="-122"/>
+                <a:cs typeface="等线" panose="02010600030101010101" pitchFamily="34" charset="-120"/>
+              </a:rPr>
+              <a:t>安全代理</a:t>
+            </a:r>
+            <a:r>
+              <a:rPr lang="en-US" sz="1050" dirty="0">
+                <a:solidFill>
+                  <a:srgbClr val="334155"/>
+                </a:solidFill>
+                <a:latin typeface="等线" panose="02010600030101010101" pitchFamily="34" charset="-122"/>
+                <a:ea typeface="等线" panose="02010600030101010101" pitchFamily="34" charset="-122"/>
+                <a:cs typeface="等线" panose="02010600030101010101" pitchFamily="34" charset="-120"/>
+              </a:rPr>
+              <a:t>：继承现有多层安全体系，确保数据传输与隐私合规</a:t>
+            </a:r>
+            <a:endParaRPr lang="en-US" sz="1050" dirty="0"/>
+          </a:p>
+        </p:txBody>
+      </p:sp>
+      <p:pic>
+        <p:nvPicPr>
+          <p:cNvPr id="34" name="Image 13" descr="preencoded.png"/>
+          <p:cNvPicPr>
+            <a:picLocks noChangeAspect="1"/>
+          </p:cNvPicPr>
+          <p:nvPr/>
+        </p:nvPicPr>
+        <p:blipFill>
+          <a:blip r:embed="rId10"/>
+          <a:stretch>
+            <a:fillRect/>
+          </a:stretch>
+        </p:blipFill>
+        <p:spPr>
+          <a:xfrm>
+            <a:off x="8000800" y="3819430"/>
+            <a:ext cx="114297" cy="171446"/>
+          </a:xfrm>
+          <a:prstGeom prst="rect">
+            <a:avLst/>
+          </a:prstGeom>
+        </p:spPr>
+      </p:pic>
+      <p:pic>
+        <p:nvPicPr>
+          <p:cNvPr id="35" name="Image 14" descr="preencoded.png"/>
+          <p:cNvPicPr>
+            <a:picLocks noChangeAspect="1"/>
+          </p:cNvPicPr>
+          <p:nvPr/>
+        </p:nvPicPr>
+        <p:blipFill>
+          <a:blip r:embed="rId7"/>
+          <a:stretch>
+            <a:fillRect/>
+          </a:stretch>
+        </p:blipFill>
+        <p:spPr>
+          <a:xfrm>
+            <a:off x="8210345" y="1981150"/>
+            <a:ext cx="3381290" cy="3895628"/>
+          </a:xfrm>
+          <a:prstGeom prst="rect">
+            <a:avLst/>
+          </a:prstGeom>
+        </p:spPr>
+      </p:pic>
+      <p:pic>
+        <p:nvPicPr>
+          <p:cNvPr id="36" name="Image 15" descr="preencoded.png"/>
+          <p:cNvPicPr>
+            <a:picLocks noChangeAspect="1"/>
+          </p:cNvPicPr>
+          <p:nvPr/>
+        </p:nvPicPr>
+        <p:blipFill>
+          <a:blip r:embed="rId8"/>
+          <a:stretch>
+            <a:fillRect/>
+          </a:stretch>
+        </p:blipFill>
+        <p:spPr>
+          <a:xfrm>
+            <a:off x="8448464" y="2219270"/>
+            <a:ext cx="2905052" cy="542911"/>
+          </a:xfrm>
+          <a:prstGeom prst="rect">
+            <a:avLst/>
+          </a:prstGeom>
+        </p:spPr>
+      </p:pic>
+      <p:pic>
+        <p:nvPicPr>
+          <p:cNvPr id="37" name="Image 16" descr="preencoded.png"/>
+          <p:cNvPicPr>
+            <a:picLocks noChangeAspect="1"/>
+          </p:cNvPicPr>
+          <p:nvPr/>
+        </p:nvPicPr>
+        <p:blipFill>
+          <a:blip r:embed="rId9"/>
+          <a:stretch>
+            <a:fillRect/>
+          </a:stretch>
+        </p:blipFill>
+        <p:spPr>
+          <a:xfrm>
+            <a:off x="8448464" y="2219270"/>
+            <a:ext cx="380990" cy="380990"/>
+          </a:xfrm>
+          <a:prstGeom prst="rect">
+            <a:avLst/>
+          </a:prstGeom>
+        </p:spPr>
+      </p:pic>
+      <p:sp>
+        <p:nvSpPr>
+          <p:cNvPr id="38" name="Text 19"/>
+          <p:cNvSpPr/>
+          <p:nvPr/>
+        </p:nvSpPr>
+        <p:spPr>
+          <a:xfrm>
+            <a:off x="8543711" y="2276418"/>
+            <a:ext cx="209164" cy="266693"/>
+          </a:xfrm>
+          <a:prstGeom prst="rect">
+            <a:avLst/>
+          </a:prstGeom>
+          <a:noFill/>
+        </p:spPr>
+        <p:txBody>
+          <a:bodyPr wrap="none" lIns="0" tIns="0" rIns="0" bIns="0" rtlCol="0" anchor="ctr"/>
+          <a:lstStyle/>
+          <a:p>
+            <a:pPr marL="0" indent="0" algn="l">
+              <a:buNone/>
+            </a:pPr>
+            <a:r>
+              <a:rPr lang="en-US" sz="1350" b="1" dirty="0">
+                <a:solidFill>
+                  <a:srgbClr val="0F766E"/>
+                </a:solidFill>
+                <a:latin typeface="等线" panose="02010600030101010101" pitchFamily="34" charset="-122"/>
+                <a:ea typeface="等线" panose="02010600030101010101" pitchFamily="34" charset="-122"/>
+                <a:cs typeface="等线" panose="02010600030101010101" pitchFamily="34" charset="-120"/>
+              </a:rPr>
+              <a:t>03</a:t>
+            </a:r>
+            <a:endParaRPr lang="en-US" sz="1350" dirty="0"/>
+          </a:p>
+        </p:txBody>
+      </p:sp>
+      <p:sp>
+        <p:nvSpPr>
+          <p:cNvPr id="39" name="Text 20"/>
+          <p:cNvSpPr/>
+          <p:nvPr/>
+        </p:nvSpPr>
+        <p:spPr>
+          <a:xfrm>
+            <a:off x="8943751" y="2276418"/>
+            <a:ext cx="1152115" cy="266693"/>
+          </a:xfrm>
+          <a:prstGeom prst="rect">
+            <a:avLst/>
+          </a:prstGeom>
+          <a:noFill/>
+        </p:spPr>
+        <p:txBody>
+          <a:bodyPr wrap="none" lIns="0" tIns="0" rIns="0" bIns="0" rtlCol="0" anchor="ctr"/>
+          <a:lstStyle/>
+          <a:p>
+            <a:pPr marL="0" indent="0" algn="l">
+              <a:buNone/>
+            </a:pPr>
+            <a:r>
+              <a:rPr lang="en-US" sz="1500" b="1" dirty="0">
+                <a:solidFill>
+                  <a:srgbClr val="0F766E"/>
+                </a:solidFill>
+                <a:latin typeface="等线" panose="02010600030101010101" pitchFamily="34" charset="-122"/>
+                <a:ea typeface="等线" panose="02010600030101010101" pitchFamily="34" charset="-122"/>
+                <a:cs typeface="等线" panose="02010600030101010101" pitchFamily="34" charset="-120"/>
+              </a:rPr>
+              <a:t>核心AI服务层</a:t>
+            </a:r>
+            <a:endParaRPr lang="en-US" sz="1500" dirty="0"/>
+          </a:p>
+        </p:txBody>
+      </p:sp>
+      <p:sp>
+        <p:nvSpPr>
+          <p:cNvPr id="40" name="Text 21"/>
+          <p:cNvSpPr/>
+          <p:nvPr/>
+        </p:nvSpPr>
+        <p:spPr>
+          <a:xfrm>
+            <a:off x="8448464" y="3009825"/>
+            <a:ext cx="85342" cy="380990"/>
+          </a:xfrm>
+          <a:prstGeom prst="rect">
+            <a:avLst/>
+          </a:prstGeom>
+          <a:noFill/>
+        </p:spPr>
+        <p:txBody>
+          <a:bodyPr wrap="square" lIns="0" tIns="0" rIns="0" bIns="0" rtlCol="0" anchor="ctr"/>
+          <a:lstStyle/>
+          <a:p>
+            <a:pPr marL="0" indent="0" algn="l">
+              <a:buNone/>
+            </a:pPr>
+            <a:r>
+              <a:rPr lang="en-US" sz="900" dirty="0">
+                <a:solidFill>
+                  <a:srgbClr val="0D9488"/>
+                </a:solidFill>
+                <a:latin typeface="等线" panose="02010600030101010101" pitchFamily="34" charset="-122"/>
+                <a:ea typeface="等线" panose="02010600030101010101" pitchFamily="34" charset="-122"/>
+                <a:cs typeface="等线" panose="02010600030101010101" pitchFamily="34" charset="-120"/>
+              </a:rPr>
+              <a:t>●</a:t>
+            </a:r>
+            <a:endParaRPr lang="en-US" sz="900" dirty="0"/>
+          </a:p>
+        </p:txBody>
+      </p:sp>
+      <p:sp>
+        <p:nvSpPr>
+          <p:cNvPr id="41" name="Text 22"/>
+          <p:cNvSpPr/>
+          <p:nvPr/>
+        </p:nvSpPr>
+        <p:spPr>
+          <a:xfrm>
+            <a:off x="8629434" y="2952676"/>
+            <a:ext cx="2733226" cy="438139"/>
+          </a:xfrm>
+          <a:prstGeom prst="rect">
+            <a:avLst/>
+          </a:prstGeom>
+          <a:noFill/>
+        </p:spPr>
+        <p:txBody>
+          <a:bodyPr wrap="square" lIns="0" tIns="0" rIns="0" bIns="0" rtlCol="0" anchor="ctr"/>
+          <a:lstStyle/>
+          <a:p>
+            <a:pPr marL="0" indent="0" algn="l">
+              <a:buNone/>
+            </a:pPr>
+            <a:r>
+              <a:rPr lang="en-US" sz="1050" b="1" dirty="0">
+                <a:solidFill>
+                  <a:srgbClr val="0F172A"/>
+                </a:solidFill>
+                <a:latin typeface="等线" panose="02010600030101010101" pitchFamily="34" charset="-122"/>
+                <a:ea typeface="等线" panose="02010600030101010101" pitchFamily="34" charset="-122"/>
+                <a:cs typeface="等线" panose="02010600030101010101" pitchFamily="34" charset="-120"/>
+              </a:rPr>
+              <a:t>复用现有双服务器架构</a:t>
+            </a:r>
+            <a:r>
+              <a:rPr lang="en-US" sz="1050" dirty="0">
+                <a:solidFill>
+                  <a:srgbClr val="334155"/>
+                </a:solidFill>
+                <a:latin typeface="等线" panose="02010600030101010101" pitchFamily="34" charset="-122"/>
+                <a:ea typeface="等线" panose="02010600030101010101" pitchFamily="34" charset="-122"/>
+                <a:cs typeface="等线" panose="02010600030101010101" pitchFamily="34" charset="-120"/>
+              </a:rPr>
+              <a:t>：主服务器处理业务逻辑，执行服务器专注AI计算</a:t>
+            </a:r>
+            <a:endParaRPr lang="en-US" sz="1050" dirty="0"/>
+          </a:p>
+        </p:txBody>
+      </p:sp>
+      <p:sp>
+        <p:nvSpPr>
+          <p:cNvPr id="42" name="Text 23"/>
+          <p:cNvSpPr/>
+          <p:nvPr/>
+        </p:nvSpPr>
+        <p:spPr>
+          <a:xfrm>
+            <a:off x="8448464" y="3590835"/>
+            <a:ext cx="85342" cy="380990"/>
+          </a:xfrm>
+          <a:prstGeom prst="rect">
+            <a:avLst/>
+          </a:prstGeom>
+          <a:noFill/>
+        </p:spPr>
+        <p:txBody>
+          <a:bodyPr wrap="square" lIns="0" tIns="0" rIns="0" bIns="0" rtlCol="0" anchor="ctr"/>
+          <a:lstStyle/>
+          <a:p>
+            <a:pPr marL="0" indent="0" algn="l">
+              <a:buNone/>
+            </a:pPr>
+            <a:r>
+              <a:rPr lang="en-US" sz="900" dirty="0">
+                <a:solidFill>
+                  <a:srgbClr val="0D9488"/>
+                </a:solidFill>
+                <a:latin typeface="等线" panose="02010600030101010101" pitchFamily="34" charset="-122"/>
+                <a:ea typeface="等线" panose="02010600030101010101" pitchFamily="34" charset="-122"/>
+                <a:cs typeface="等线" panose="02010600030101010101" pitchFamily="34" charset="-120"/>
+              </a:rPr>
+              <a:t>●</a:t>
+            </a:r>
+            <a:endParaRPr lang="en-US" sz="900" dirty="0"/>
+          </a:p>
+        </p:txBody>
+      </p:sp>
+      <p:sp>
+        <p:nvSpPr>
+          <p:cNvPr id="43" name="Text 24"/>
+          <p:cNvSpPr/>
+          <p:nvPr/>
+        </p:nvSpPr>
+        <p:spPr>
+          <a:xfrm>
+            <a:off x="8629434" y="3533687"/>
+            <a:ext cx="2733226" cy="438139"/>
+          </a:xfrm>
+          <a:prstGeom prst="rect">
+            <a:avLst/>
+          </a:prstGeom>
+          <a:noFill/>
+        </p:spPr>
+        <p:txBody>
+          <a:bodyPr wrap="square" lIns="0" tIns="0" rIns="0" bIns="0" rtlCol="0" anchor="ctr"/>
+          <a:lstStyle/>
+          <a:p>
+            <a:pPr marL="0" indent="0" algn="l">
+              <a:buNone/>
+            </a:pPr>
+            <a:r>
+              <a:rPr lang="en-US" sz="1050" b="1" dirty="0">
+                <a:solidFill>
+                  <a:srgbClr val="0F172A"/>
+                </a:solidFill>
+                <a:latin typeface="等线" panose="02010600030101010101" pitchFamily="34" charset="-122"/>
+                <a:ea typeface="等线" panose="02010600030101010101" pitchFamily="34" charset="-122"/>
+                <a:cs typeface="等线" panose="02010600030101010101" pitchFamily="34" charset="-120"/>
+              </a:rPr>
+              <a:t>API接口适配</a:t>
+            </a:r>
+            <a:r>
+              <a:rPr lang="en-US" sz="1050" dirty="0">
+                <a:solidFill>
+                  <a:srgbClr val="334155"/>
+                </a:solidFill>
+                <a:latin typeface="等线" panose="02010600030101010101" pitchFamily="34" charset="-122"/>
+                <a:ea typeface="等线" panose="02010600030101010101" pitchFamily="34" charset="-122"/>
+                <a:cs typeface="等线" panose="02010600030101010101" pitchFamily="34" charset="-120"/>
+              </a:rPr>
+              <a:t>：通过RESTful API与微服务层交互，调用AI诊断、DRG分析等核心能力</a:t>
+            </a:r>
+            <a:endParaRPr lang="en-US" sz="1050" dirty="0"/>
+          </a:p>
+        </p:txBody>
+      </p:sp>
+      <p:sp>
+        <p:nvSpPr>
+          <p:cNvPr id="44" name="Text 25"/>
+          <p:cNvSpPr/>
+          <p:nvPr/>
+        </p:nvSpPr>
+        <p:spPr>
+          <a:xfrm>
+            <a:off x="8448464" y="4181370"/>
+            <a:ext cx="85342" cy="380990"/>
+          </a:xfrm>
+          <a:prstGeom prst="rect">
+            <a:avLst/>
+          </a:prstGeom>
+          <a:noFill/>
+        </p:spPr>
+        <p:txBody>
+          <a:bodyPr wrap="square" lIns="0" tIns="0" rIns="0" bIns="0" rtlCol="0" anchor="ctr"/>
+          <a:lstStyle/>
+          <a:p>
+            <a:pPr marL="0" indent="0" algn="l">
+              <a:buNone/>
+            </a:pPr>
+            <a:r>
+              <a:rPr lang="en-US" sz="900" dirty="0">
+                <a:solidFill>
+                  <a:srgbClr val="0D9488"/>
+                </a:solidFill>
+                <a:latin typeface="等线" panose="02010600030101010101" pitchFamily="34" charset="-122"/>
+                <a:ea typeface="等线" panose="02010600030101010101" pitchFamily="34" charset="-122"/>
+                <a:cs typeface="等线" panose="02010600030101010101" pitchFamily="34" charset="-120"/>
+              </a:rPr>
+              <a:t>●</a:t>
+            </a:r>
+            <a:endParaRPr lang="en-US" sz="900" dirty="0"/>
+          </a:p>
+        </p:txBody>
+      </p:sp>
+      <p:sp>
+        <p:nvSpPr>
+          <p:cNvPr id="45" name="Text 26"/>
+          <p:cNvSpPr/>
+          <p:nvPr/>
+        </p:nvSpPr>
+        <p:spPr>
+          <a:xfrm>
+            <a:off x="8629434" y="4124222"/>
+            <a:ext cx="2733226" cy="438139"/>
+          </a:xfrm>
+          <a:prstGeom prst="rect">
+            <a:avLst/>
+          </a:prstGeom>
+          <a:noFill/>
+        </p:spPr>
+        <p:txBody>
+          <a:bodyPr wrap="square" lIns="0" tIns="0" rIns="0" bIns="0" rtlCol="0" anchor="ctr"/>
+          <a:lstStyle/>
+          <a:p>
+            <a:pPr marL="0" indent="0" algn="l">
+              <a:buNone/>
+            </a:pPr>
+            <a:r>
+              <a:rPr lang="en-US" sz="1050" b="1" dirty="0">
+                <a:solidFill>
+                  <a:srgbClr val="0F172A"/>
+                </a:solidFill>
+                <a:latin typeface="等线" panose="02010600030101010101" pitchFamily="34" charset="-122"/>
+                <a:ea typeface="等线" panose="02010600030101010101" pitchFamily="34" charset="-122"/>
+                <a:cs typeface="等线" panose="02010600030101010101" pitchFamily="34" charset="-120"/>
+              </a:rPr>
+              <a:t>Prompt智能组装</a:t>
+            </a:r>
+            <a:r>
+              <a:rPr lang="en-US" sz="1050" dirty="0">
+                <a:solidFill>
+                  <a:srgbClr val="334155"/>
+                </a:solidFill>
+                <a:latin typeface="等线" panose="02010600030101010101" pitchFamily="34" charset="-122"/>
+                <a:ea typeface="等线" panose="02010600030101010101" pitchFamily="34" charset="-122"/>
+                <a:cs typeface="等线" panose="02010600030101010101" pitchFamily="34" charset="-120"/>
+              </a:rPr>
+              <a:t>：根据眼镜场景（如查房、手术）动态优化Prompt模板</a:t>
+            </a:r>
+            <a:endParaRPr lang="en-US" sz="1050" dirty="0"/>
+          </a:p>
+        </p:txBody>
+      </p:sp>
+      <p:pic>
+        <p:nvPicPr>
+          <p:cNvPr id="46" name="Image 17" descr="preencoded.png"/>
+          <p:cNvPicPr>
+            <a:picLocks noChangeAspect="1"/>
+          </p:cNvPicPr>
+          <p:nvPr/>
+        </p:nvPicPr>
+        <p:blipFill>
+          <a:blip r:embed="rId13">
+            <a:alphaModFix amt="40000"/>
+          </a:blip>
+          <a:stretch>
+            <a:fillRect/>
+          </a:stretch>
+        </p:blipFill>
+        <p:spPr>
+          <a:xfrm>
+            <a:off x="10096248" y="6172046"/>
+            <a:ext cx="304792" cy="9525"/>
+          </a:xfrm>
+          <a:prstGeom prst="rect">
+            <a:avLst/>
+          </a:prstGeom>
+        </p:spPr>
+      </p:pic>
+      <p:pic>
+        <p:nvPicPr>
+          <p:cNvPr id="47" name="Image 18" descr="preencoded.png"/>
+          <p:cNvPicPr>
+            <a:picLocks noChangeAspect="1"/>
+          </p:cNvPicPr>
+          <p:nvPr/>
+        </p:nvPicPr>
+        <p:blipFill>
+          <a:blip r:embed="rId14"/>
+          <a:stretch>
+            <a:fillRect/>
+          </a:stretch>
+        </p:blipFill>
+        <p:spPr>
+          <a:xfrm>
+            <a:off x="10477238" y="6095848"/>
+            <a:ext cx="1114397" cy="152396"/>
+          </a:xfrm>
+          <a:prstGeom prst="rect">
+            <a:avLst/>
+          </a:prstGeom>
+        </p:spPr>
+      </p:pic>
+      <p:sp>
+        <p:nvSpPr>
+          <p:cNvPr id="48" name="Text 27"/>
+          <p:cNvSpPr/>
+          <p:nvPr/>
+        </p:nvSpPr>
+        <p:spPr>
+          <a:xfrm>
+            <a:off x="10477238" y="6095848"/>
+            <a:ext cx="1123541" cy="152396"/>
+          </a:xfrm>
+          <a:prstGeom prst="rect">
+            <a:avLst/>
+          </a:prstGeom>
+          <a:noFill/>
+        </p:spPr>
+        <p:txBody>
+          <a:bodyPr wrap="none" lIns="0" tIns="0" rIns="0" bIns="0" rtlCol="0" anchor="ctr"/>
+          <a:lstStyle/>
+          <a:p>
+            <a:pPr marL="0" indent="0" algn="l">
+              <a:buNone/>
+            </a:pPr>
+            <a:r>
+              <a:rPr lang="en-US" sz="900" dirty="0">
+                <a:solidFill>
+                  <a:srgbClr val="64748B"/>
+                </a:solidFill>
+                <a:latin typeface="等线" panose="02010600030101010101" pitchFamily="34" charset="-122"/>
+                <a:ea typeface="等线" panose="02010600030101010101" pitchFamily="34" charset="-122"/>
+                <a:cs typeface="等线" panose="02010600030101010101" pitchFamily="34" charset="-120"/>
+              </a:rPr>
+              <a:t>MICROSERVICES</a:t>
+            </a:r>
+            <a:endParaRPr lang="en-US" sz="900" dirty="0"/>
+          </a:p>
+        </p:txBody>
+      </p:sp>
+    </p:spTree>
+  </p:cSld>
+  <p:clrMapOvr>
+    <a:masterClrMapping/>
+  </p:clrMapOvr>
+</p:sld>
+</file>
+
+<file path=ppt/slides/slide29.xml><?xml version="1.0" encoding="utf-8"?>
+<p:sld xmlns:a="http://schemas.openxmlformats.org/drawingml/2006/main" xmlns:r="http://schemas.openxmlformats.org/officeDocument/2006/relationships" xmlns:p="http://schemas.openxmlformats.org/presentationml/2006/main">
+  <p:cSld>
+    <p:spTree>
+      <p:nvGrpSpPr>
+        <p:cNvPr id="1" name=""/>
+        <p:cNvGrpSpPr/>
+        <p:nvPr/>
+      </p:nvGrpSpPr>
+      <p:grpSpPr>
+        <a:xfrm>
+          <a:off x="0" y="0"/>
+          <a:ext cx="0" cy="0"/>
+          <a:chOff x="0" y="0"/>
+          <a:chExt cx="0" cy="0"/>
+        </a:xfrm>
+      </p:grpSpPr>
+      <p:pic>
+        <p:nvPicPr>
+          <p:cNvPr id="2" name="Image 0" descr="preencoded.png"/>
+          <p:cNvPicPr>
+            <a:picLocks noChangeAspect="1"/>
+          </p:cNvPicPr>
+          <p:nvPr/>
+        </p:nvPicPr>
+        <p:blipFill>
+          <a:blip r:embed="rId1"/>
+          <a:stretch>
+            <a:fillRect/>
+          </a:stretch>
+        </p:blipFill>
+        <p:spPr>
+          <a:xfrm>
+            <a:off x="0" y="0"/>
+            <a:ext cx="12191695" cy="6857829"/>
+          </a:xfrm>
+          <a:prstGeom prst="rect">
+            <a:avLst/>
+          </a:prstGeom>
+        </p:spPr>
+      </p:pic>
+      <p:pic>
+        <p:nvPicPr>
+          <p:cNvPr id="3" name="Image 1" descr="preencoded.png"/>
+          <p:cNvPicPr>
+            <a:picLocks noChangeAspect="1"/>
+          </p:cNvPicPr>
+          <p:nvPr/>
+        </p:nvPicPr>
+        <p:blipFill>
           <a:blip r:embed="rId2"/>
           <a:stretch>
             <a:fillRect/>
@@ -38072,8 +40172,8 @@
         </p:blipFill>
         <p:spPr>
           <a:xfrm>
-            <a:off x="0" y="2666933"/>
-            <a:ext cx="76198" cy="1523962"/>
+            <a:off x="0" y="2819330"/>
+            <a:ext cx="57149" cy="1219170"/>
           </a:xfrm>
           <a:prstGeom prst="rect">
             <a:avLst/>
@@ -38089,8 +40189,1063 @@
           <p:nvPr/>
         </p:nvPicPr>
         <p:blipFill>
-          <a:blip r:embed="rId3">
-            <a:alphaModFix amt="7000"/>
+          <a:blip r:embed="rId3"/>
+          <a:stretch>
+            <a:fillRect/>
+          </a:stretch>
+        </p:blipFill>
+        <p:spPr>
+          <a:xfrm>
+            <a:off x="914377" y="619110"/>
+            <a:ext cx="457189" cy="19050"/>
+          </a:xfrm>
+          <a:prstGeom prst="rect">
+            <a:avLst/>
+          </a:prstGeom>
+        </p:spPr>
+      </p:pic>
+      <p:sp>
+        <p:nvSpPr>
+          <p:cNvPr id="5" name="Text 0"/>
+          <p:cNvSpPr/>
+          <p:nvPr/>
+        </p:nvSpPr>
+        <p:spPr>
+          <a:xfrm>
+            <a:off x="1523962" y="533387"/>
+            <a:ext cx="2314136" cy="190495"/>
+          </a:xfrm>
+          <a:prstGeom prst="rect">
+            <a:avLst/>
+          </a:prstGeom>
+          <a:noFill/>
+        </p:spPr>
+        <p:txBody>
+          <a:bodyPr wrap="none" lIns="0" tIns="0" rIns="0" bIns="0" rtlCol="0" anchor="ctr"/>
+          <a:lstStyle/>
+          <a:p>
+            <a:pPr marL="0" indent="0" algn="l">
+              <a:buNone/>
+            </a:pPr>
+            <a:r>
+              <a:rPr lang="en-US" sz="1050" b="1" dirty="0">
+                <a:solidFill>
+                  <a:srgbClr val="64748B"/>
+                </a:solidFill>
+                <a:latin typeface="等线" panose="02010600030101010101" pitchFamily="34" charset="-122"/>
+                <a:ea typeface="等线" panose="02010600030101010101" pitchFamily="34" charset="-122"/>
+                <a:cs typeface="等线" panose="02010600030101010101" pitchFamily="34" charset="-120"/>
+              </a:rPr>
+              <a:t>Partnership Invitation</a:t>
+            </a:r>
+            <a:endParaRPr lang="en-US" sz="1050" dirty="0"/>
+          </a:p>
+        </p:txBody>
+      </p:sp>
+      <p:sp>
+        <p:nvSpPr>
+          <p:cNvPr id="6" name="Text 1"/>
+          <p:cNvSpPr/>
+          <p:nvPr/>
+        </p:nvSpPr>
+        <p:spPr>
+          <a:xfrm>
+            <a:off x="914377" y="838179"/>
+            <a:ext cx="10372085" cy="571486"/>
+          </a:xfrm>
+          <a:prstGeom prst="rect">
+            <a:avLst/>
+          </a:prstGeom>
+          <a:noFill/>
+        </p:spPr>
+        <p:txBody>
+          <a:bodyPr wrap="none" lIns="0" tIns="0" rIns="0" bIns="0" rtlCol="0" anchor="ctr"/>
+          <a:lstStyle/>
+          <a:p>
+            <a:pPr marL="0" indent="0" algn="l">
+              <a:buNone/>
+            </a:pPr>
+            <a:r>
+              <a:rPr lang="en-US" sz="3000" b="1" dirty="0">
+                <a:solidFill>
+                  <a:srgbClr val="0F172A"/>
+                </a:solidFill>
+                <a:latin typeface="等线" panose="02010600030101010101" pitchFamily="34" charset="-122"/>
+                <a:ea typeface="等线" panose="02010600030101010101" pitchFamily="34" charset="-122"/>
+                <a:cs typeface="等线" panose="02010600030101010101" pitchFamily="34" charset="-120"/>
+              </a:rPr>
+              <a:t>合作邀请</a:t>
+            </a:r>
+            <a:endParaRPr lang="en-US" sz="3000" dirty="0"/>
+          </a:p>
+        </p:txBody>
+      </p:sp>
+      <p:sp>
+        <p:nvSpPr>
+          <p:cNvPr id="7" name="Text 2"/>
+          <p:cNvSpPr/>
+          <p:nvPr/>
+        </p:nvSpPr>
+        <p:spPr>
+          <a:xfrm>
+            <a:off x="914377" y="1523962"/>
+            <a:ext cx="10372085" cy="266693"/>
+          </a:xfrm>
+          <a:prstGeom prst="rect">
+            <a:avLst/>
+          </a:prstGeom>
+          <a:noFill/>
+        </p:spPr>
+        <p:txBody>
+          <a:bodyPr wrap="none" lIns="0" tIns="0" rIns="0" bIns="0" rtlCol="0" anchor="ctr"/>
+          <a:lstStyle/>
+          <a:p>
+            <a:pPr marL="0" indent="0" algn="l">
+              <a:buNone/>
+            </a:pPr>
+            <a:r>
+              <a:rPr lang="en-US" sz="1500" dirty="0">
+                <a:solidFill>
+                  <a:srgbClr val="475569"/>
+                </a:solidFill>
+                <a:latin typeface="等线" panose="02010600030101010101" pitchFamily="34" charset="-122"/>
+                <a:ea typeface="等线" panose="02010600030101010101" pitchFamily="34" charset="-122"/>
+                <a:cs typeface="等线" panose="02010600030101010101" pitchFamily="34" charset="-120"/>
+              </a:rPr>
+              <a:t>诚邀各医院参与试点计划</a:t>
+            </a:r>
+            <a:endParaRPr lang="en-US" sz="1500" dirty="0"/>
+          </a:p>
+        </p:txBody>
+      </p:sp>
+      <p:pic>
+        <p:nvPicPr>
+          <p:cNvPr id="8" name="Image 3" descr="preencoded.png"/>
+          <p:cNvPicPr>
+            <a:picLocks noChangeAspect="1"/>
+          </p:cNvPicPr>
+          <p:nvPr/>
+        </p:nvPicPr>
+        <p:blipFill>
+          <a:blip r:embed="rId4"/>
+          <a:stretch>
+            <a:fillRect/>
+          </a:stretch>
+        </p:blipFill>
+        <p:spPr>
+          <a:xfrm>
+            <a:off x="914377" y="2095448"/>
+            <a:ext cx="5067173" cy="2771706"/>
+          </a:xfrm>
+          <a:prstGeom prst="rect">
+            <a:avLst/>
+          </a:prstGeom>
+        </p:spPr>
+      </p:pic>
+      <p:pic>
+        <p:nvPicPr>
+          <p:cNvPr id="9" name="Image 4" descr="preencoded.png"/>
+          <p:cNvPicPr>
+            <a:picLocks noChangeAspect="1"/>
+          </p:cNvPicPr>
+          <p:nvPr/>
+        </p:nvPicPr>
+        <p:blipFill>
+          <a:blip r:embed="rId5"/>
+          <a:stretch>
+            <a:fillRect/>
+          </a:stretch>
+        </p:blipFill>
+        <p:spPr>
+          <a:xfrm>
+            <a:off x="1228694" y="2409765"/>
+            <a:ext cx="457189" cy="457189"/>
+          </a:xfrm>
+          <a:prstGeom prst="rect">
+            <a:avLst/>
+          </a:prstGeom>
+        </p:spPr>
+      </p:pic>
+      <p:pic>
+        <p:nvPicPr>
+          <p:cNvPr id="10" name="Image 5" descr="preencoded.png"/>
+          <p:cNvPicPr>
+            <a:picLocks noChangeAspect="1"/>
+          </p:cNvPicPr>
+          <p:nvPr/>
+        </p:nvPicPr>
+        <p:blipFill>
+          <a:blip r:embed="rId6"/>
+          <a:stretch>
+            <a:fillRect/>
+          </a:stretch>
+        </p:blipFill>
+        <p:spPr>
+          <a:xfrm>
+            <a:off x="1352516" y="2543111"/>
+            <a:ext cx="219070" cy="190495"/>
+          </a:xfrm>
+          <a:prstGeom prst="rect">
+            <a:avLst/>
+          </a:prstGeom>
+        </p:spPr>
+      </p:pic>
+      <p:sp>
+        <p:nvSpPr>
+          <p:cNvPr id="11" name="Text 3"/>
+          <p:cNvSpPr/>
+          <p:nvPr/>
+        </p:nvSpPr>
+        <p:spPr>
+          <a:xfrm>
+            <a:off x="1838279" y="2505012"/>
+            <a:ext cx="752075" cy="266693"/>
+          </a:xfrm>
+          <a:prstGeom prst="rect">
+            <a:avLst/>
+          </a:prstGeom>
+          <a:noFill/>
+        </p:spPr>
+        <p:txBody>
+          <a:bodyPr wrap="none" lIns="0" tIns="0" rIns="0" bIns="0" rtlCol="0" anchor="ctr"/>
+          <a:lstStyle/>
+          <a:p>
+            <a:pPr marL="0" indent="0" algn="l">
+              <a:buNone/>
+            </a:pPr>
+            <a:r>
+              <a:rPr lang="en-US" sz="1500" b="1" dirty="0">
+                <a:solidFill>
+                  <a:srgbClr val="0F172A"/>
+                </a:solidFill>
+                <a:latin typeface="等线" panose="02010600030101010101" pitchFamily="34" charset="-122"/>
+                <a:ea typeface="等线" panose="02010600030101010101" pitchFamily="34" charset="-122"/>
+                <a:cs typeface="等线" panose="02010600030101010101" pitchFamily="34" charset="-120"/>
+              </a:rPr>
+              <a:t>试点支持</a:t>
+            </a:r>
+            <a:endParaRPr lang="en-US" sz="1500" dirty="0"/>
+          </a:p>
+        </p:txBody>
+      </p:sp>
+      <p:pic>
+        <p:nvPicPr>
+          <p:cNvPr id="12" name="Image 6" descr="preencoded.png"/>
+          <p:cNvPicPr>
+            <a:picLocks noChangeAspect="1"/>
+          </p:cNvPicPr>
+          <p:nvPr/>
+        </p:nvPicPr>
+        <p:blipFill>
+          <a:blip r:embed="rId7"/>
+          <a:stretch>
+            <a:fillRect/>
+          </a:stretch>
+        </p:blipFill>
+        <p:spPr>
+          <a:xfrm>
+            <a:off x="1228694" y="3133647"/>
+            <a:ext cx="133347" cy="152396"/>
+          </a:xfrm>
+          <a:prstGeom prst="rect">
+            <a:avLst/>
+          </a:prstGeom>
+        </p:spPr>
+      </p:pic>
+      <p:sp>
+        <p:nvSpPr>
+          <p:cNvPr id="13" name="Text 4"/>
+          <p:cNvSpPr/>
+          <p:nvPr/>
+        </p:nvSpPr>
+        <p:spPr>
+          <a:xfrm>
+            <a:off x="1476338" y="3095548"/>
+            <a:ext cx="1380710" cy="247644"/>
+          </a:xfrm>
+          <a:prstGeom prst="rect">
+            <a:avLst/>
+          </a:prstGeom>
+          <a:noFill/>
+        </p:spPr>
+        <p:txBody>
+          <a:bodyPr wrap="none" lIns="0" tIns="0" rIns="0" bIns="0" rtlCol="0" anchor="ctr"/>
+          <a:lstStyle/>
+          <a:p>
+            <a:pPr marL="0" indent="0" algn="l">
+              <a:buNone/>
+            </a:pPr>
+            <a:r>
+              <a:rPr lang="en-US" sz="1200" dirty="0">
+                <a:solidFill>
+                  <a:srgbClr val="475569"/>
+                </a:solidFill>
+                <a:latin typeface="等线" panose="02010600030101010101" pitchFamily="34" charset="-122"/>
+                <a:ea typeface="等线" panose="02010600030101010101" pitchFamily="34" charset="-122"/>
+                <a:cs typeface="等线" panose="02010600030101010101" pitchFamily="34" charset="-120"/>
+              </a:rPr>
+              <a:t>免费系统部署与培训</a:t>
+            </a:r>
+            <a:endParaRPr lang="en-US" sz="1200" dirty="0"/>
+          </a:p>
+        </p:txBody>
+      </p:sp>
+      <p:pic>
+        <p:nvPicPr>
+          <p:cNvPr id="14" name="Image 7" descr="preencoded.png"/>
+          <p:cNvPicPr>
+            <a:picLocks noChangeAspect="1"/>
+          </p:cNvPicPr>
+          <p:nvPr/>
+        </p:nvPicPr>
+        <p:blipFill>
+          <a:blip r:embed="rId7"/>
+          <a:stretch>
+            <a:fillRect/>
+          </a:stretch>
+        </p:blipFill>
+        <p:spPr>
+          <a:xfrm>
+            <a:off x="1228694" y="3533687"/>
+            <a:ext cx="133347" cy="152396"/>
+          </a:xfrm>
+          <a:prstGeom prst="rect">
+            <a:avLst/>
+          </a:prstGeom>
+        </p:spPr>
+      </p:pic>
+      <p:sp>
+        <p:nvSpPr>
+          <p:cNvPr id="15" name="Text 5"/>
+          <p:cNvSpPr/>
+          <p:nvPr/>
+        </p:nvSpPr>
+        <p:spPr>
+          <a:xfrm>
+            <a:off x="1476338" y="3495588"/>
+            <a:ext cx="1533106" cy="247644"/>
+          </a:xfrm>
+          <a:prstGeom prst="rect">
+            <a:avLst/>
+          </a:prstGeom>
+          <a:noFill/>
+        </p:spPr>
+        <p:txBody>
+          <a:bodyPr wrap="none" lIns="0" tIns="0" rIns="0" bIns="0" rtlCol="0" anchor="ctr"/>
+          <a:lstStyle/>
+          <a:p>
+            <a:pPr marL="0" indent="0" algn="l">
+              <a:buNone/>
+            </a:pPr>
+            <a:r>
+              <a:rPr lang="en-US" sz="1200" dirty="0">
+                <a:solidFill>
+                  <a:srgbClr val="475569"/>
+                </a:solidFill>
+                <a:latin typeface="等线" panose="02010600030101010101" pitchFamily="34" charset="-122"/>
+                <a:ea typeface="等线" panose="02010600030101010101" pitchFamily="34" charset="-122"/>
+                <a:cs typeface="等线" panose="02010600030101010101" pitchFamily="34" charset="-120"/>
+              </a:rPr>
+              <a:t>专业技术团队全程支持</a:t>
+            </a:r>
+            <a:endParaRPr lang="en-US" sz="1200" dirty="0"/>
+          </a:p>
+        </p:txBody>
+      </p:sp>
+      <p:pic>
+        <p:nvPicPr>
+          <p:cNvPr id="16" name="Image 8" descr="preencoded.png"/>
+          <p:cNvPicPr>
+            <a:picLocks noChangeAspect="1"/>
+          </p:cNvPicPr>
+          <p:nvPr/>
+        </p:nvPicPr>
+        <p:blipFill>
+          <a:blip r:embed="rId7"/>
+          <a:stretch>
+            <a:fillRect/>
+          </a:stretch>
+        </p:blipFill>
+        <p:spPr>
+          <a:xfrm>
+            <a:off x="1228694" y="3933727"/>
+            <a:ext cx="133347" cy="152396"/>
+          </a:xfrm>
+          <a:prstGeom prst="rect">
+            <a:avLst/>
+          </a:prstGeom>
+        </p:spPr>
+      </p:pic>
+      <p:sp>
+        <p:nvSpPr>
+          <p:cNvPr id="17" name="Text 6"/>
+          <p:cNvSpPr/>
+          <p:nvPr/>
+        </p:nvSpPr>
+        <p:spPr>
+          <a:xfrm>
+            <a:off x="1476338" y="3895628"/>
+            <a:ext cx="1380710" cy="247644"/>
+          </a:xfrm>
+          <a:prstGeom prst="rect">
+            <a:avLst/>
+          </a:prstGeom>
+          <a:noFill/>
+        </p:spPr>
+        <p:txBody>
+          <a:bodyPr wrap="none" lIns="0" tIns="0" rIns="0" bIns="0" rtlCol="0" anchor="ctr"/>
+          <a:lstStyle/>
+          <a:p>
+            <a:pPr marL="0" indent="0" algn="l">
+              <a:buNone/>
+            </a:pPr>
+            <a:r>
+              <a:rPr lang="en-US" sz="1200" dirty="0">
+                <a:solidFill>
+                  <a:srgbClr val="475569"/>
+                </a:solidFill>
+                <a:latin typeface="等线" panose="02010600030101010101" pitchFamily="34" charset="-122"/>
+                <a:ea typeface="等线" panose="02010600030101010101" pitchFamily="34" charset="-122"/>
+                <a:cs typeface="等线" panose="02010600030101010101" pitchFamily="34" charset="-120"/>
+              </a:rPr>
+              <a:t>定制化功能开发配合</a:t>
+            </a:r>
+            <a:endParaRPr lang="en-US" sz="1200" dirty="0"/>
+          </a:p>
+        </p:txBody>
+      </p:sp>
+      <p:pic>
+        <p:nvPicPr>
+          <p:cNvPr id="18" name="Image 9" descr="preencoded.png"/>
+          <p:cNvPicPr>
+            <a:picLocks noChangeAspect="1"/>
+          </p:cNvPicPr>
+          <p:nvPr/>
+        </p:nvPicPr>
+        <p:blipFill>
+          <a:blip r:embed="rId4"/>
+          <a:stretch>
+            <a:fillRect/>
+          </a:stretch>
+        </p:blipFill>
+        <p:spPr>
+          <a:xfrm>
+            <a:off x="6210145" y="2095448"/>
+            <a:ext cx="5067173" cy="2771706"/>
+          </a:xfrm>
+          <a:prstGeom prst="rect">
+            <a:avLst/>
+          </a:prstGeom>
+        </p:spPr>
+      </p:pic>
+      <p:pic>
+        <p:nvPicPr>
+          <p:cNvPr id="19" name="Image 10" descr="preencoded.png"/>
+          <p:cNvPicPr>
+            <a:picLocks noChangeAspect="1"/>
+          </p:cNvPicPr>
+          <p:nvPr/>
+        </p:nvPicPr>
+        <p:blipFill>
+          <a:blip r:embed="rId5"/>
+          <a:stretch>
+            <a:fillRect/>
+          </a:stretch>
+        </p:blipFill>
+        <p:spPr>
+          <a:xfrm>
+            <a:off x="6524462" y="2409765"/>
+            <a:ext cx="457189" cy="457189"/>
+          </a:xfrm>
+          <a:prstGeom prst="rect">
+            <a:avLst/>
+          </a:prstGeom>
+        </p:spPr>
+      </p:pic>
+      <p:pic>
+        <p:nvPicPr>
+          <p:cNvPr id="20" name="Image 11" descr="preencoded.png"/>
+          <p:cNvPicPr>
+            <a:picLocks noChangeAspect="1"/>
+          </p:cNvPicPr>
+          <p:nvPr/>
+        </p:nvPicPr>
+        <p:blipFill>
+          <a:blip r:embed="rId8"/>
+          <a:stretch>
+            <a:fillRect/>
+          </a:stretch>
+        </p:blipFill>
+        <p:spPr>
+          <a:xfrm>
+            <a:off x="6686383" y="2543111"/>
+            <a:ext cx="142871" cy="190495"/>
+          </a:xfrm>
+          <a:prstGeom prst="rect">
+            <a:avLst/>
+          </a:prstGeom>
+        </p:spPr>
+      </p:pic>
+      <p:sp>
+        <p:nvSpPr>
+          <p:cNvPr id="21" name="Text 7"/>
+          <p:cNvSpPr/>
+          <p:nvPr/>
+        </p:nvSpPr>
+        <p:spPr>
+          <a:xfrm>
+            <a:off x="7134047" y="2505012"/>
+            <a:ext cx="752075" cy="266693"/>
+          </a:xfrm>
+          <a:prstGeom prst="rect">
+            <a:avLst/>
+          </a:prstGeom>
+          <a:noFill/>
+        </p:spPr>
+        <p:txBody>
+          <a:bodyPr wrap="none" lIns="0" tIns="0" rIns="0" bIns="0" rtlCol="0" anchor="ctr"/>
+          <a:lstStyle/>
+          <a:p>
+            <a:pPr marL="0" indent="0" algn="l">
+              <a:buNone/>
+            </a:pPr>
+            <a:r>
+              <a:rPr lang="en-US" sz="1500" b="1" dirty="0">
+                <a:solidFill>
+                  <a:srgbClr val="0F172A"/>
+                </a:solidFill>
+                <a:latin typeface="等线" panose="02010600030101010101" pitchFamily="34" charset="-122"/>
+                <a:ea typeface="等线" panose="02010600030101010101" pitchFamily="34" charset="-122"/>
+                <a:cs typeface="等线" panose="02010600030101010101" pitchFamily="34" charset="-120"/>
+              </a:rPr>
+              <a:t>参与条件</a:t>
+            </a:r>
+            <a:endParaRPr lang="en-US" sz="1500" dirty="0"/>
+          </a:p>
+        </p:txBody>
+      </p:sp>
+      <p:pic>
+        <p:nvPicPr>
+          <p:cNvPr id="22" name="Image 12" descr="preencoded.png"/>
+          <p:cNvPicPr>
+            <a:picLocks noChangeAspect="1"/>
+          </p:cNvPicPr>
+          <p:nvPr/>
+        </p:nvPicPr>
+        <p:blipFill>
+          <a:blip r:embed="rId9"/>
+          <a:stretch>
+            <a:fillRect/>
+          </a:stretch>
+        </p:blipFill>
+        <p:spPr>
+          <a:xfrm>
+            <a:off x="6524462" y="3190795"/>
+            <a:ext cx="57149" cy="57149"/>
+          </a:xfrm>
+          <a:prstGeom prst="rect">
+            <a:avLst/>
+          </a:prstGeom>
+        </p:spPr>
+      </p:pic>
+      <p:sp>
+        <p:nvSpPr>
+          <p:cNvPr id="23" name="Text 8"/>
+          <p:cNvSpPr/>
+          <p:nvPr/>
+        </p:nvSpPr>
+        <p:spPr>
+          <a:xfrm>
+            <a:off x="6695908" y="3095548"/>
+            <a:ext cx="1066393" cy="247644"/>
+          </a:xfrm>
+          <a:prstGeom prst="rect">
+            <a:avLst/>
+          </a:prstGeom>
+          <a:noFill/>
+        </p:spPr>
+        <p:txBody>
+          <a:bodyPr wrap="none" lIns="0" tIns="0" rIns="0" bIns="0" rtlCol="0" anchor="ctr"/>
+          <a:lstStyle/>
+          <a:p>
+            <a:pPr marL="0" indent="0" algn="l">
+              <a:buNone/>
+            </a:pPr>
+            <a:r>
+              <a:rPr lang="en-US" sz="1200" dirty="0">
+                <a:solidFill>
+                  <a:srgbClr val="475569"/>
+                </a:solidFill>
+                <a:latin typeface="等线" panose="02010600030101010101" pitchFamily="34" charset="-122"/>
+                <a:ea typeface="等线" panose="02010600030101010101" pitchFamily="34" charset="-122"/>
+                <a:cs typeface="等线" panose="02010600030101010101" pitchFamily="34" charset="-120"/>
+              </a:rPr>
+              <a:t>具备基础IT环境</a:t>
+            </a:r>
+            <a:endParaRPr lang="en-US" sz="1200" dirty="0"/>
+          </a:p>
+        </p:txBody>
+      </p:sp>
+      <p:pic>
+        <p:nvPicPr>
+          <p:cNvPr id="24" name="Image 13" descr="preencoded.png"/>
+          <p:cNvPicPr>
+            <a:picLocks noChangeAspect="1"/>
+          </p:cNvPicPr>
+          <p:nvPr/>
+        </p:nvPicPr>
+        <p:blipFill>
+          <a:blip r:embed="rId9"/>
+          <a:stretch>
+            <a:fillRect/>
+          </a:stretch>
+        </p:blipFill>
+        <p:spPr>
+          <a:xfrm>
+            <a:off x="6524462" y="3590835"/>
+            <a:ext cx="57149" cy="57149"/>
+          </a:xfrm>
+          <a:prstGeom prst="rect">
+            <a:avLst/>
+          </a:prstGeom>
+        </p:spPr>
+      </p:pic>
+      <p:sp>
+        <p:nvSpPr>
+          <p:cNvPr id="25" name="Text 9"/>
+          <p:cNvSpPr/>
+          <p:nvPr/>
+        </p:nvSpPr>
+        <p:spPr>
+          <a:xfrm>
+            <a:off x="6695908" y="3495588"/>
+            <a:ext cx="1380710" cy="247644"/>
+          </a:xfrm>
+          <a:prstGeom prst="rect">
+            <a:avLst/>
+          </a:prstGeom>
+          <a:noFill/>
+        </p:spPr>
+        <p:txBody>
+          <a:bodyPr wrap="none" lIns="0" tIns="0" rIns="0" bIns="0" rtlCol="0" anchor="ctr"/>
+          <a:lstStyle/>
+          <a:p>
+            <a:pPr marL="0" indent="0" algn="l">
+              <a:buNone/>
+            </a:pPr>
+            <a:r>
+              <a:rPr lang="en-US" sz="1200" dirty="0">
+                <a:solidFill>
+                  <a:srgbClr val="475569"/>
+                </a:solidFill>
+                <a:latin typeface="等线" panose="02010600030101010101" pitchFamily="34" charset="-122"/>
+                <a:ea typeface="等线" panose="02010600030101010101" pitchFamily="34" charset="-122"/>
+                <a:cs typeface="等线" panose="02010600030101010101" pitchFamily="34" charset="-120"/>
+              </a:rPr>
+              <a:t>配合数据对接与测试</a:t>
+            </a:r>
+            <a:endParaRPr lang="en-US" sz="1200" dirty="0"/>
+          </a:p>
+        </p:txBody>
+      </p:sp>
+      <p:pic>
+        <p:nvPicPr>
+          <p:cNvPr id="26" name="Image 14" descr="preencoded.png"/>
+          <p:cNvPicPr>
+            <a:picLocks noChangeAspect="1"/>
+          </p:cNvPicPr>
+          <p:nvPr/>
+        </p:nvPicPr>
+        <p:blipFill>
+          <a:blip r:embed="rId9"/>
+          <a:stretch>
+            <a:fillRect/>
+          </a:stretch>
+        </p:blipFill>
+        <p:spPr>
+          <a:xfrm>
+            <a:off x="6524462" y="3990875"/>
+            <a:ext cx="57149" cy="57149"/>
+          </a:xfrm>
+          <a:prstGeom prst="rect">
+            <a:avLst/>
+          </a:prstGeom>
+        </p:spPr>
+      </p:pic>
+      <p:sp>
+        <p:nvSpPr>
+          <p:cNvPr id="27" name="Text 10"/>
+          <p:cNvSpPr/>
+          <p:nvPr/>
+        </p:nvSpPr>
+        <p:spPr>
+          <a:xfrm>
+            <a:off x="6695908" y="3895628"/>
+            <a:ext cx="1380710" cy="247644"/>
+          </a:xfrm>
+          <a:prstGeom prst="rect">
+            <a:avLst/>
+          </a:prstGeom>
+          <a:noFill/>
+        </p:spPr>
+        <p:txBody>
+          <a:bodyPr wrap="none" lIns="0" tIns="0" rIns="0" bIns="0" rtlCol="0" anchor="ctr"/>
+          <a:lstStyle/>
+          <a:p>
+            <a:pPr marL="0" indent="0" algn="l">
+              <a:buNone/>
+            </a:pPr>
+            <a:r>
+              <a:rPr lang="en-US" sz="1200" dirty="0">
+                <a:solidFill>
+                  <a:srgbClr val="475569"/>
+                </a:solidFill>
+                <a:latin typeface="等线" panose="02010600030101010101" pitchFamily="34" charset="-122"/>
+                <a:ea typeface="等线" panose="02010600030101010101" pitchFamily="34" charset="-122"/>
+                <a:cs typeface="等线" panose="02010600030101010101" pitchFamily="34" charset="-120"/>
+              </a:rPr>
+              <a:t>提供使用反馈与建议</a:t>
+            </a:r>
+            <a:endParaRPr lang="en-US" sz="1200" dirty="0"/>
+          </a:p>
+        </p:txBody>
+      </p:sp>
+      <p:pic>
+        <p:nvPicPr>
+          <p:cNvPr id="28" name="Image 15" descr="preencoded.png"/>
+          <p:cNvPicPr>
+            <a:picLocks noChangeAspect="1"/>
+          </p:cNvPicPr>
+          <p:nvPr/>
+        </p:nvPicPr>
+        <p:blipFill>
+          <a:blip r:embed="rId10"/>
+          <a:stretch>
+            <a:fillRect/>
+          </a:stretch>
+        </p:blipFill>
+        <p:spPr>
+          <a:xfrm>
+            <a:off x="914377" y="5095748"/>
+            <a:ext cx="10362941" cy="1238219"/>
+          </a:xfrm>
+          <a:prstGeom prst="rect">
+            <a:avLst/>
+          </a:prstGeom>
+        </p:spPr>
+      </p:pic>
+      <p:pic>
+        <p:nvPicPr>
+          <p:cNvPr id="29" name="Image 16" descr="preencoded.png"/>
+          <p:cNvPicPr>
+            <a:picLocks noChangeAspect="1"/>
+          </p:cNvPicPr>
+          <p:nvPr/>
+        </p:nvPicPr>
+        <p:blipFill>
+          <a:blip r:embed="rId11"/>
+          <a:stretch>
+            <a:fillRect/>
+          </a:stretch>
+        </p:blipFill>
+        <p:spPr>
+          <a:xfrm>
+            <a:off x="1219170" y="5400540"/>
+            <a:ext cx="457189" cy="457189"/>
+          </a:xfrm>
+          <a:prstGeom prst="rect">
+            <a:avLst/>
+          </a:prstGeom>
+        </p:spPr>
+      </p:pic>
+      <p:pic>
+        <p:nvPicPr>
+          <p:cNvPr id="30" name="Image 17" descr="preencoded.png"/>
+          <p:cNvPicPr>
+            <a:picLocks noChangeAspect="1"/>
+          </p:cNvPicPr>
+          <p:nvPr/>
+        </p:nvPicPr>
+        <p:blipFill>
+          <a:blip r:embed="rId12"/>
+          <a:stretch>
+            <a:fillRect/>
+          </a:stretch>
+        </p:blipFill>
+        <p:spPr>
+          <a:xfrm>
+            <a:off x="1352516" y="5533887"/>
+            <a:ext cx="190495" cy="190495"/>
+          </a:xfrm>
+          <a:prstGeom prst="rect">
+            <a:avLst/>
+          </a:prstGeom>
+        </p:spPr>
+      </p:pic>
+      <p:sp>
+        <p:nvSpPr>
+          <p:cNvPr id="31" name="Text 11"/>
+          <p:cNvSpPr/>
+          <p:nvPr/>
+        </p:nvSpPr>
+        <p:spPr>
+          <a:xfrm>
+            <a:off x="1866853" y="5400540"/>
+            <a:ext cx="3780950" cy="266693"/>
+          </a:xfrm>
+          <a:prstGeom prst="rect">
+            <a:avLst/>
+          </a:prstGeom>
+          <a:noFill/>
+        </p:spPr>
+        <p:txBody>
+          <a:bodyPr wrap="none" lIns="0" tIns="0" rIns="0" bIns="0" rtlCol="0" anchor="ctr"/>
+          <a:lstStyle/>
+          <a:p>
+            <a:pPr marL="0" indent="0" algn="l">
+              <a:buNone/>
+            </a:pPr>
+            <a:r>
+              <a:rPr lang="en-US" sz="1350" b="1" dirty="0">
+                <a:solidFill>
+                  <a:srgbClr val="FFFFFF"/>
+                </a:solidFill>
+                <a:latin typeface="等线" panose="02010600030101010101" pitchFamily="34" charset="-122"/>
+                <a:ea typeface="等线" panose="02010600030101010101" pitchFamily="34" charset="-122"/>
+                <a:cs typeface="等线" panose="02010600030101010101" pitchFamily="34" charset="-120"/>
+              </a:rPr>
+              <a:t>共同目标</a:t>
+            </a:r>
+            <a:endParaRPr lang="en-US" sz="1350" dirty="0"/>
+          </a:p>
+        </p:txBody>
+      </p:sp>
+      <p:sp>
+        <p:nvSpPr>
+          <p:cNvPr id="32" name="Text 12"/>
+          <p:cNvSpPr/>
+          <p:nvPr/>
+        </p:nvSpPr>
+        <p:spPr>
+          <a:xfrm>
+            <a:off x="1866853" y="5743431"/>
+            <a:ext cx="3780950" cy="285743"/>
+          </a:xfrm>
+          <a:prstGeom prst="rect">
+            <a:avLst/>
+          </a:prstGeom>
+          <a:noFill/>
+        </p:spPr>
+        <p:txBody>
+          <a:bodyPr wrap="none" lIns="0" tIns="0" rIns="0" bIns="0" rtlCol="0" anchor="ctr"/>
+          <a:lstStyle/>
+          <a:p>
+            <a:pPr marL="0" indent="0" algn="l">
+              <a:buNone/>
+            </a:pPr>
+            <a:r>
+              <a:rPr lang="en-US" sz="1350" dirty="0">
+                <a:solidFill>
+                  <a:srgbClr val="F0FDFA"/>
+                </a:solidFill>
+                <a:latin typeface="等线" panose="02010600030101010101" pitchFamily="34" charset="-122"/>
+                <a:ea typeface="等线" panose="02010600030101010101" pitchFamily="34" charset="-122"/>
+                <a:cs typeface="等线" panose="02010600030101010101" pitchFamily="34" charset="-120"/>
+              </a:rPr>
+              <a:t>推进基层医疗AI化进程，提升医疗服务质量与效率</a:t>
+            </a:r>
+            <a:endParaRPr lang="en-US" sz="1350" dirty="0"/>
+          </a:p>
+        </p:txBody>
+      </p:sp>
+      <p:pic>
+        <p:nvPicPr>
+          <p:cNvPr id="33" name="Image 18" descr="preencoded.png"/>
+          <p:cNvPicPr>
+            <a:picLocks noChangeAspect="1"/>
+          </p:cNvPicPr>
+          <p:nvPr/>
+        </p:nvPicPr>
+        <p:blipFill>
+          <a:blip r:embed="rId13"/>
+          <a:stretch>
+            <a:fillRect/>
+          </a:stretch>
+        </p:blipFill>
+        <p:spPr>
+          <a:xfrm>
+            <a:off x="8858029" y="5467213"/>
+            <a:ext cx="2124022" cy="495288"/>
+          </a:xfrm>
+          <a:prstGeom prst="rect">
+            <a:avLst/>
+          </a:prstGeom>
+        </p:spPr>
+      </p:pic>
+      <p:pic>
+        <p:nvPicPr>
+          <p:cNvPr id="34" name="Image 19" descr="preencoded.png"/>
+          <p:cNvPicPr>
+            <a:picLocks noChangeAspect="1"/>
+          </p:cNvPicPr>
+          <p:nvPr/>
+        </p:nvPicPr>
+        <p:blipFill>
+          <a:blip r:embed="rId14"/>
+          <a:stretch>
+            <a:fillRect/>
+          </a:stretch>
+        </p:blipFill>
+        <p:spPr>
+          <a:xfrm>
+            <a:off x="9172346" y="5619610"/>
+            <a:ext cx="190495" cy="190495"/>
+          </a:xfrm>
+          <a:prstGeom prst="rect">
+            <a:avLst/>
+          </a:prstGeom>
+        </p:spPr>
+      </p:pic>
+      <p:sp>
+        <p:nvSpPr>
+          <p:cNvPr id="35" name="Text 13"/>
+          <p:cNvSpPr/>
+          <p:nvPr/>
+        </p:nvSpPr>
+        <p:spPr>
+          <a:xfrm>
+            <a:off x="9477138" y="5467213"/>
+            <a:ext cx="1514056" cy="190495"/>
+          </a:xfrm>
+          <a:prstGeom prst="rect">
+            <a:avLst/>
+          </a:prstGeom>
+          <a:noFill/>
+        </p:spPr>
+        <p:txBody>
+          <a:bodyPr wrap="none" lIns="0" tIns="0" rIns="0" bIns="0" rtlCol="0" anchor="ctr"/>
+          <a:lstStyle/>
+          <a:p>
+            <a:pPr marL="0" indent="0" algn="l">
+              <a:buNone/>
+            </a:pPr>
+            <a:r>
+              <a:rPr lang="en-US" sz="1050" dirty="0">
+                <a:solidFill>
+                  <a:srgbClr val="CCFBF1"/>
+                </a:solidFill>
+                <a:latin typeface="等线" panose="02010600030101010101" pitchFamily="34" charset="-122"/>
+                <a:ea typeface="等线" panose="02010600030101010101" pitchFamily="34" charset="-122"/>
+                <a:cs typeface="等线" panose="02010600030101010101" pitchFamily="34" charset="-120"/>
+              </a:rPr>
+              <a:t>联系我们</a:t>
+            </a:r>
+            <a:r>
+              <a:rPr lang="zh-CN" altLang="en-US" sz="1050" dirty="0">
+                <a:solidFill>
+                  <a:srgbClr val="CCFBF1"/>
+                </a:solidFill>
+                <a:latin typeface="等线" panose="02010600030101010101" pitchFamily="34" charset="-122"/>
+                <a:ea typeface="等线" panose="02010600030101010101" pitchFamily="34" charset="-122"/>
+                <a:cs typeface="等线" panose="02010600030101010101" pitchFamily="34" charset="-120"/>
+              </a:rPr>
+              <a:t>：</a:t>
+            </a:r>
+            <a:endParaRPr lang="zh-CN" altLang="en-US" sz="1050" dirty="0">
+              <a:solidFill>
+                <a:srgbClr val="CCFBF1"/>
+              </a:solidFill>
+              <a:latin typeface="等线" panose="02010600030101010101" pitchFamily="34" charset="-122"/>
+              <a:ea typeface="等线" panose="02010600030101010101" pitchFamily="34" charset="-122"/>
+              <a:cs typeface="等线" panose="02010600030101010101" pitchFamily="34" charset="-120"/>
+            </a:endParaRPr>
+          </a:p>
+          <a:p>
+            <a:pPr marL="0" indent="0" algn="l">
+              <a:buNone/>
+            </a:pPr>
+            <a:r>
+              <a:rPr lang="zh-CN" altLang="en-US" sz="1050" dirty="0">
+                <a:solidFill>
+                  <a:srgbClr val="CCFBF1"/>
+                </a:solidFill>
+                <a:latin typeface="等线" panose="02010600030101010101" pitchFamily="34" charset="-122"/>
+                <a:ea typeface="等线" panose="02010600030101010101" pitchFamily="34" charset="-122"/>
+                <a:cs typeface="等线" panose="02010600030101010101" pitchFamily="34" charset="-120"/>
+              </a:rPr>
+              <a:t>刘朝晖</a:t>
+            </a:r>
+            <a:r>
+              <a:rPr lang="en-US" altLang="zh-CN" sz="1050" dirty="0">
+                <a:solidFill>
+                  <a:srgbClr val="CCFBF1"/>
+                </a:solidFill>
+                <a:latin typeface="等线" panose="02010600030101010101" pitchFamily="34" charset="-122"/>
+                <a:ea typeface="等线" panose="02010600030101010101" pitchFamily="34" charset="-122"/>
+                <a:cs typeface="等线" panose="02010600030101010101" pitchFamily="34" charset="-120"/>
+              </a:rPr>
+              <a:t> 13458003688</a:t>
+            </a:r>
+            <a:endParaRPr lang="en-US" altLang="zh-CN" sz="1050" dirty="0">
+              <a:solidFill>
+                <a:srgbClr val="CCFBF1"/>
+              </a:solidFill>
+              <a:latin typeface="等线" panose="02010600030101010101" pitchFamily="34" charset="-122"/>
+              <a:ea typeface="等线" panose="02010600030101010101" pitchFamily="34" charset="-122"/>
+              <a:cs typeface="等线" panose="02010600030101010101" pitchFamily="34" charset="-120"/>
+            </a:endParaRPr>
+          </a:p>
+        </p:txBody>
+      </p:sp>
+      <p:sp>
+        <p:nvSpPr>
+          <p:cNvPr id="36" name="Text 14"/>
+          <p:cNvSpPr/>
+          <p:nvPr/>
+        </p:nvSpPr>
+        <p:spPr>
+          <a:xfrm>
+            <a:off x="9477138" y="5695808"/>
+            <a:ext cx="1514056" cy="266693"/>
+          </a:xfrm>
+          <a:prstGeom prst="rect">
+            <a:avLst/>
+          </a:prstGeom>
+          <a:noFill/>
+        </p:spPr>
+        <p:txBody>
+          <a:bodyPr wrap="none" lIns="0" tIns="0" rIns="0" bIns="0" rtlCol="0" anchor="ctr"/>
+          <a:lstStyle/>
+          <a:p>
+            <a:pPr marL="0" indent="0" algn="l">
+              <a:buNone/>
+            </a:pPr>
+            <a:r>
+              <a:rPr lang="en-US" sz="1350" b="1" dirty="0">
+                <a:solidFill>
+                  <a:srgbClr val="FFFFFF"/>
+                </a:solidFill>
+                <a:latin typeface="等线" panose="02010600030101010101" pitchFamily="34" charset="-122"/>
+                <a:ea typeface="等线" panose="02010600030101010101" pitchFamily="34" charset="-122"/>
+                <a:cs typeface="等线" panose="02010600030101010101" pitchFamily="34" charset="-120"/>
+              </a:rPr>
+              <a:t>开启智慧医疗新篇章</a:t>
+            </a:r>
+            <a:endParaRPr lang="en-US" sz="1350" dirty="0"/>
+          </a:p>
+        </p:txBody>
+      </p:sp>
+      <p:pic>
+        <p:nvPicPr>
+          <p:cNvPr id="37" name="Image 20" descr="preencoded.png"/>
+          <p:cNvPicPr>
+            <a:picLocks noChangeAspect="1"/>
+          </p:cNvPicPr>
+          <p:nvPr/>
+        </p:nvPicPr>
+        <p:blipFill>
+          <a:blip r:embed="rId15">
+            <a:alphaModFix amt="6000"/>
           </a:blip>
           <a:stretch>
             <a:fillRect/>
@@ -38098,25 +41253,25 @@
         </p:blipFill>
         <p:spPr>
           <a:xfrm>
-            <a:off x="10448664" y="847704"/>
-            <a:ext cx="904852" cy="904852"/>
-          </a:xfrm>
-          <a:prstGeom prst="rect">
-            <a:avLst/>
-          </a:prstGeom>
-        </p:spPr>
-      </p:pic>
-      <p:pic>
-        <p:nvPicPr>
-          <p:cNvPr id="5" name="Image 3" descr="preencoded.png"/>
-          <p:cNvPicPr>
-            <a:picLocks noChangeAspect="1"/>
-          </p:cNvPicPr>
-          <p:nvPr/>
-        </p:nvPicPr>
-        <p:blipFill>
-          <a:blip r:embed="rId4">
-            <a:alphaModFix amt="7000"/>
+            <a:off x="10267693" y="438139"/>
+            <a:ext cx="1266793" cy="1266793"/>
+          </a:xfrm>
+          <a:prstGeom prst="rect">
+            <a:avLst/>
+          </a:prstGeom>
+        </p:spPr>
+      </p:pic>
+      <p:pic>
+        <p:nvPicPr>
+          <p:cNvPr id="38" name="Image 21" descr="preencoded.png"/>
+          <p:cNvPicPr>
+            <a:picLocks noChangeAspect="1"/>
+          </p:cNvPicPr>
+          <p:nvPr/>
+        </p:nvPicPr>
+        <p:blipFill>
+          <a:blip r:embed="rId16">
+            <a:alphaModFix amt="6000"/>
           </a:blip>
           <a:stretch>
             <a:fillRect/>
@@ -38124,254 +41279,32 @@
         </p:blipFill>
         <p:spPr>
           <a:xfrm>
-            <a:off x="10601060" y="1000100"/>
-            <a:ext cx="838179" cy="838179"/>
-          </a:xfrm>
-          <a:prstGeom prst="rect">
-            <a:avLst/>
-          </a:prstGeom>
-        </p:spPr>
-      </p:pic>
-      <p:pic>
-        <p:nvPicPr>
-          <p:cNvPr id="6" name="Image 4" descr="preencoded.png"/>
-          <p:cNvPicPr>
-            <a:picLocks noChangeAspect="1"/>
-          </p:cNvPicPr>
-          <p:nvPr/>
-        </p:nvPicPr>
-        <p:blipFill>
-          <a:blip r:embed="rId5">
-            <a:alphaModFix amt="5000"/>
-          </a:blip>
-          <a:stretch>
-            <a:fillRect/>
-          </a:stretch>
-        </p:blipFill>
-        <p:spPr>
-          <a:xfrm>
-            <a:off x="914377" y="5333867"/>
-            <a:ext cx="609585" cy="609585"/>
-          </a:xfrm>
-          <a:prstGeom prst="rect">
-            <a:avLst/>
-          </a:prstGeom>
-        </p:spPr>
-      </p:pic>
-      <p:pic>
-        <p:nvPicPr>
-          <p:cNvPr id="7" name="Image 5" descr="preencoded.png"/>
-          <p:cNvPicPr>
-            <a:picLocks noChangeAspect="1"/>
-          </p:cNvPicPr>
-          <p:nvPr/>
-        </p:nvPicPr>
-        <p:blipFill>
-          <a:blip r:embed="rId6"/>
-          <a:stretch>
-            <a:fillRect/>
-          </a:stretch>
-        </p:blipFill>
-        <p:spPr>
-          <a:xfrm>
-            <a:off x="5486263" y="2247844"/>
-            <a:ext cx="457189" cy="19050"/>
-          </a:xfrm>
-          <a:prstGeom prst="rect">
-            <a:avLst/>
-          </a:prstGeom>
-        </p:spPr>
-      </p:pic>
-      <p:pic>
-        <p:nvPicPr>
-          <p:cNvPr id="8" name="Image 6" descr="preencoded.png"/>
-          <p:cNvPicPr>
-            <a:picLocks noChangeAspect="1"/>
-          </p:cNvPicPr>
-          <p:nvPr/>
-        </p:nvPicPr>
-        <p:blipFill>
-          <a:blip r:embed="rId7"/>
-          <a:stretch>
-            <a:fillRect/>
-          </a:stretch>
-        </p:blipFill>
-        <p:spPr>
-          <a:xfrm>
-            <a:off x="6057749" y="2219270"/>
-            <a:ext cx="76198" cy="76198"/>
-          </a:xfrm>
-          <a:prstGeom prst="rect">
-            <a:avLst/>
-          </a:prstGeom>
-        </p:spPr>
-      </p:pic>
-      <p:pic>
-        <p:nvPicPr>
-          <p:cNvPr id="9" name="Image 7" descr="preencoded.png"/>
-          <p:cNvPicPr>
-            <a:picLocks noChangeAspect="1"/>
-          </p:cNvPicPr>
-          <p:nvPr/>
-        </p:nvPicPr>
-        <p:blipFill>
-          <a:blip r:embed="rId6"/>
-          <a:stretch>
-            <a:fillRect/>
-          </a:stretch>
-        </p:blipFill>
-        <p:spPr>
-          <a:xfrm>
-            <a:off x="6248244" y="2247844"/>
-            <a:ext cx="457189" cy="19050"/>
-          </a:xfrm>
-          <a:prstGeom prst="rect">
-            <a:avLst/>
-          </a:prstGeom>
-        </p:spPr>
-      </p:pic>
-      <p:sp>
-        <p:nvSpPr>
-          <p:cNvPr id="10" name="Text 0"/>
-          <p:cNvSpPr/>
-          <p:nvPr/>
-        </p:nvSpPr>
-        <p:spPr>
-          <a:xfrm>
-            <a:off x="4067073" y="2676458"/>
-            <a:ext cx="4076217" cy="609585"/>
-          </a:xfrm>
-          <a:prstGeom prst="rect">
-            <a:avLst/>
-          </a:prstGeom>
-          <a:noFill/>
-        </p:spPr>
-        <p:txBody>
-          <a:bodyPr wrap="none" lIns="0" tIns="0" rIns="0" bIns="0" rtlCol="0" anchor="ctr"/>
-          <a:lstStyle/>
-          <a:p>
-            <a:pPr marL="0" indent="0" algn="ctr">
-              <a:buNone/>
-            </a:pPr>
-            <a:r>
-              <a:rPr lang="en-US" sz="4800" b="1" dirty="0">
-                <a:solidFill>
-                  <a:srgbClr val="0F172A"/>
-                </a:solidFill>
-                <a:latin typeface="等线" panose="02010600030101010101" pitchFamily="34" charset="-122"/>
-                <a:ea typeface="等线" panose="02010600030101010101" pitchFamily="34" charset="-122"/>
-                <a:cs typeface="等线" panose="02010600030101010101" pitchFamily="34" charset="-120"/>
-              </a:rPr>
-              <a:t>感谢聆听</a:t>
-            </a:r>
-            <a:endParaRPr lang="en-US" sz="4800" dirty="0"/>
-          </a:p>
-        </p:txBody>
-      </p:sp>
-      <p:sp>
-        <p:nvSpPr>
-          <p:cNvPr id="11" name="Text 1"/>
-          <p:cNvSpPr/>
-          <p:nvPr/>
-        </p:nvSpPr>
-        <p:spPr>
-          <a:xfrm>
-            <a:off x="4067073" y="3590835"/>
-            <a:ext cx="4076217" cy="409565"/>
-          </a:xfrm>
-          <a:prstGeom prst="rect">
-            <a:avLst/>
-          </a:prstGeom>
-          <a:noFill/>
-        </p:spPr>
-        <p:txBody>
-          <a:bodyPr wrap="none" lIns="0" tIns="0" rIns="0" bIns="0" rtlCol="0" anchor="ctr"/>
-          <a:lstStyle/>
-          <a:p>
-            <a:pPr marL="0" indent="0" algn="ctr">
-              <a:buNone/>
-            </a:pPr>
-            <a:r>
-              <a:rPr lang="en-US" sz="1950" dirty="0">
-                <a:solidFill>
-                  <a:srgbClr val="475569"/>
-                </a:solidFill>
-                <a:latin typeface="等线" panose="02010600030101010101" pitchFamily="34" charset="-122"/>
-                <a:ea typeface="等线" panose="02010600030101010101" pitchFamily="34" charset="-122"/>
-                <a:cs typeface="等线" panose="02010600030101010101" pitchFamily="34" charset="-120"/>
-              </a:rPr>
-              <a:t>期待与您携手，共创智慧医疗新未来</a:t>
-            </a:r>
-            <a:endParaRPr lang="en-US" sz="1950" dirty="0"/>
-          </a:p>
-        </p:txBody>
-      </p:sp>
-      <p:pic>
-        <p:nvPicPr>
-          <p:cNvPr id="12" name="Image 8" descr="preencoded.png"/>
-          <p:cNvPicPr>
-            <a:picLocks noChangeAspect="1"/>
-          </p:cNvPicPr>
-          <p:nvPr/>
-        </p:nvPicPr>
-        <p:blipFill>
-          <a:blip r:embed="rId8"/>
-          <a:stretch>
-            <a:fillRect/>
-          </a:stretch>
-        </p:blipFill>
-        <p:spPr>
-          <a:xfrm>
-            <a:off x="4924302" y="4543311"/>
-            <a:ext cx="914377" cy="9525"/>
-          </a:xfrm>
-          <a:prstGeom prst="rect">
-            <a:avLst/>
-          </a:prstGeom>
-        </p:spPr>
-      </p:pic>
-      <p:pic>
-        <p:nvPicPr>
-          <p:cNvPr id="13" name="Image 9" descr="preencoded.png"/>
-          <p:cNvPicPr>
-            <a:picLocks noChangeAspect="1"/>
-          </p:cNvPicPr>
-          <p:nvPr/>
-        </p:nvPicPr>
-        <p:blipFill>
-          <a:blip r:embed="rId9"/>
-          <a:stretch>
-            <a:fillRect/>
-          </a:stretch>
-        </p:blipFill>
-        <p:spPr>
-          <a:xfrm>
-            <a:off x="5991075" y="4457589"/>
-            <a:ext cx="219070" cy="190495"/>
-          </a:xfrm>
-          <a:prstGeom prst="rect">
-            <a:avLst/>
-          </a:prstGeom>
-        </p:spPr>
-      </p:pic>
-      <p:pic>
-        <p:nvPicPr>
-          <p:cNvPr id="14" name="Image 10" descr="preencoded.png"/>
-          <p:cNvPicPr>
-            <a:picLocks noChangeAspect="1"/>
-          </p:cNvPicPr>
-          <p:nvPr/>
-        </p:nvPicPr>
-        <p:blipFill>
-          <a:blip r:embed="rId8"/>
-          <a:stretch>
-            <a:fillRect/>
-          </a:stretch>
-        </p:blipFill>
-        <p:spPr>
-          <a:xfrm>
-            <a:off x="6362541" y="4543311"/>
-            <a:ext cx="914377" cy="9525"/>
+            <a:off x="10505812" y="676258"/>
+            <a:ext cx="1181070" cy="1181070"/>
+          </a:xfrm>
+          <a:prstGeom prst="rect">
+            <a:avLst/>
+          </a:prstGeom>
+        </p:spPr>
+      </p:pic>
+      <p:pic>
+        <p:nvPicPr>
+          <p:cNvPr id="39" name="Image 22" descr="preencoded.png"/>
+          <p:cNvPicPr>
+            <a:picLocks noChangeAspect="1"/>
+          </p:cNvPicPr>
+          <p:nvPr/>
+        </p:nvPicPr>
+        <p:blipFill>
+          <a:blip r:embed="rId17"/>
+          <a:stretch>
+            <a:fillRect/>
+          </a:stretch>
+        </p:blipFill>
+        <p:spPr>
+          <a:xfrm>
+            <a:off x="914377" y="6314917"/>
+            <a:ext cx="10362941" cy="9525"/>
           </a:xfrm>
           <a:prstGeom prst="rect">
             <a:avLst/>
@@ -39449,6 +42382,377 @@
           <a:xfrm>
             <a:off x="914377" y="6238719"/>
             <a:ext cx="10362941" cy="9525"/>
+          </a:xfrm>
+          <a:prstGeom prst="rect">
+            <a:avLst/>
+          </a:prstGeom>
+        </p:spPr>
+      </p:pic>
+    </p:spTree>
+  </p:cSld>
+  <p:clrMapOvr>
+    <a:masterClrMapping/>
+  </p:clrMapOvr>
+</p:sld>
+</file>
+
+<file path=ppt/slides/slide30.xml><?xml version="1.0" encoding="utf-8"?>
+<p:sld xmlns:a="http://schemas.openxmlformats.org/drawingml/2006/main" xmlns:r="http://schemas.openxmlformats.org/officeDocument/2006/relationships" xmlns:p="http://schemas.openxmlformats.org/presentationml/2006/main">
+  <p:cSld>
+    <p:spTree>
+      <p:nvGrpSpPr>
+        <p:cNvPr id="1" name=""/>
+        <p:cNvGrpSpPr/>
+        <p:nvPr/>
+      </p:nvGrpSpPr>
+      <p:grpSpPr>
+        <a:xfrm>
+          <a:off x="0" y="0"/>
+          <a:ext cx="0" cy="0"/>
+          <a:chOff x="0" y="0"/>
+          <a:chExt cx="0" cy="0"/>
+        </a:xfrm>
+      </p:grpSpPr>
+      <p:pic>
+        <p:nvPicPr>
+          <p:cNvPr id="2" name="Image 0" descr="preencoded.png"/>
+          <p:cNvPicPr>
+            <a:picLocks noChangeAspect="1"/>
+          </p:cNvPicPr>
+          <p:nvPr/>
+        </p:nvPicPr>
+        <p:blipFill>
+          <a:blip r:embed="rId1"/>
+          <a:stretch>
+            <a:fillRect/>
+          </a:stretch>
+        </p:blipFill>
+        <p:spPr>
+          <a:xfrm>
+            <a:off x="0" y="0"/>
+            <a:ext cx="12191695" cy="6857829"/>
+          </a:xfrm>
+          <a:prstGeom prst="rect">
+            <a:avLst/>
+          </a:prstGeom>
+        </p:spPr>
+      </p:pic>
+      <p:pic>
+        <p:nvPicPr>
+          <p:cNvPr id="3" name="Image 1" descr="preencoded.png"/>
+          <p:cNvPicPr>
+            <a:picLocks noChangeAspect="1"/>
+          </p:cNvPicPr>
+          <p:nvPr/>
+        </p:nvPicPr>
+        <p:blipFill>
+          <a:blip r:embed="rId2"/>
+          <a:stretch>
+            <a:fillRect/>
+          </a:stretch>
+        </p:blipFill>
+        <p:spPr>
+          <a:xfrm>
+            <a:off x="0" y="2666933"/>
+            <a:ext cx="76198" cy="1523962"/>
+          </a:xfrm>
+          <a:prstGeom prst="rect">
+            <a:avLst/>
+          </a:prstGeom>
+        </p:spPr>
+      </p:pic>
+      <p:pic>
+        <p:nvPicPr>
+          <p:cNvPr id="4" name="Image 2" descr="preencoded.png"/>
+          <p:cNvPicPr>
+            <a:picLocks noChangeAspect="1"/>
+          </p:cNvPicPr>
+          <p:nvPr/>
+        </p:nvPicPr>
+        <p:blipFill>
+          <a:blip r:embed="rId3">
+            <a:alphaModFix amt="7000"/>
+          </a:blip>
+          <a:stretch>
+            <a:fillRect/>
+          </a:stretch>
+        </p:blipFill>
+        <p:spPr>
+          <a:xfrm>
+            <a:off x="10448664" y="847704"/>
+            <a:ext cx="904852" cy="904852"/>
+          </a:xfrm>
+          <a:prstGeom prst="rect">
+            <a:avLst/>
+          </a:prstGeom>
+        </p:spPr>
+      </p:pic>
+      <p:pic>
+        <p:nvPicPr>
+          <p:cNvPr id="5" name="Image 3" descr="preencoded.png"/>
+          <p:cNvPicPr>
+            <a:picLocks noChangeAspect="1"/>
+          </p:cNvPicPr>
+          <p:nvPr/>
+        </p:nvPicPr>
+        <p:blipFill>
+          <a:blip r:embed="rId4">
+            <a:alphaModFix amt="7000"/>
+          </a:blip>
+          <a:stretch>
+            <a:fillRect/>
+          </a:stretch>
+        </p:blipFill>
+        <p:spPr>
+          <a:xfrm>
+            <a:off x="10601060" y="1000100"/>
+            <a:ext cx="838179" cy="838179"/>
+          </a:xfrm>
+          <a:prstGeom prst="rect">
+            <a:avLst/>
+          </a:prstGeom>
+        </p:spPr>
+      </p:pic>
+      <p:pic>
+        <p:nvPicPr>
+          <p:cNvPr id="6" name="Image 4" descr="preencoded.png"/>
+          <p:cNvPicPr>
+            <a:picLocks noChangeAspect="1"/>
+          </p:cNvPicPr>
+          <p:nvPr/>
+        </p:nvPicPr>
+        <p:blipFill>
+          <a:blip r:embed="rId5">
+            <a:alphaModFix amt="5000"/>
+          </a:blip>
+          <a:stretch>
+            <a:fillRect/>
+          </a:stretch>
+        </p:blipFill>
+        <p:spPr>
+          <a:xfrm>
+            <a:off x="914377" y="5333867"/>
+            <a:ext cx="609585" cy="609585"/>
+          </a:xfrm>
+          <a:prstGeom prst="rect">
+            <a:avLst/>
+          </a:prstGeom>
+        </p:spPr>
+      </p:pic>
+      <p:pic>
+        <p:nvPicPr>
+          <p:cNvPr id="7" name="Image 5" descr="preencoded.png"/>
+          <p:cNvPicPr>
+            <a:picLocks noChangeAspect="1"/>
+          </p:cNvPicPr>
+          <p:nvPr/>
+        </p:nvPicPr>
+        <p:blipFill>
+          <a:blip r:embed="rId6"/>
+          <a:stretch>
+            <a:fillRect/>
+          </a:stretch>
+        </p:blipFill>
+        <p:spPr>
+          <a:xfrm>
+            <a:off x="5486263" y="2247844"/>
+            <a:ext cx="457189" cy="19050"/>
+          </a:xfrm>
+          <a:prstGeom prst="rect">
+            <a:avLst/>
+          </a:prstGeom>
+        </p:spPr>
+      </p:pic>
+      <p:pic>
+        <p:nvPicPr>
+          <p:cNvPr id="8" name="Image 6" descr="preencoded.png"/>
+          <p:cNvPicPr>
+            <a:picLocks noChangeAspect="1"/>
+          </p:cNvPicPr>
+          <p:nvPr/>
+        </p:nvPicPr>
+        <p:blipFill>
+          <a:blip r:embed="rId7"/>
+          <a:stretch>
+            <a:fillRect/>
+          </a:stretch>
+        </p:blipFill>
+        <p:spPr>
+          <a:xfrm>
+            <a:off x="6057749" y="2219270"/>
+            <a:ext cx="76198" cy="76198"/>
+          </a:xfrm>
+          <a:prstGeom prst="rect">
+            <a:avLst/>
+          </a:prstGeom>
+        </p:spPr>
+      </p:pic>
+      <p:pic>
+        <p:nvPicPr>
+          <p:cNvPr id="9" name="Image 7" descr="preencoded.png"/>
+          <p:cNvPicPr>
+            <a:picLocks noChangeAspect="1"/>
+          </p:cNvPicPr>
+          <p:nvPr/>
+        </p:nvPicPr>
+        <p:blipFill>
+          <a:blip r:embed="rId6"/>
+          <a:stretch>
+            <a:fillRect/>
+          </a:stretch>
+        </p:blipFill>
+        <p:spPr>
+          <a:xfrm>
+            <a:off x="6248244" y="2247844"/>
+            <a:ext cx="457189" cy="19050"/>
+          </a:xfrm>
+          <a:prstGeom prst="rect">
+            <a:avLst/>
+          </a:prstGeom>
+        </p:spPr>
+      </p:pic>
+      <p:sp>
+        <p:nvSpPr>
+          <p:cNvPr id="10" name="Text 0"/>
+          <p:cNvSpPr/>
+          <p:nvPr/>
+        </p:nvSpPr>
+        <p:spPr>
+          <a:xfrm>
+            <a:off x="4067073" y="2676458"/>
+            <a:ext cx="4076217" cy="609585"/>
+          </a:xfrm>
+          <a:prstGeom prst="rect">
+            <a:avLst/>
+          </a:prstGeom>
+          <a:noFill/>
+        </p:spPr>
+        <p:txBody>
+          <a:bodyPr wrap="none" lIns="0" tIns="0" rIns="0" bIns="0" rtlCol="0" anchor="ctr"/>
+          <a:lstStyle/>
+          <a:p>
+            <a:pPr marL="0" indent="0" algn="ctr">
+              <a:buNone/>
+            </a:pPr>
+            <a:r>
+              <a:rPr lang="en-US" sz="4800" b="1" dirty="0">
+                <a:solidFill>
+                  <a:srgbClr val="0F172A"/>
+                </a:solidFill>
+                <a:latin typeface="等线" panose="02010600030101010101" pitchFamily="34" charset="-122"/>
+                <a:ea typeface="等线" panose="02010600030101010101" pitchFamily="34" charset="-122"/>
+                <a:cs typeface="等线" panose="02010600030101010101" pitchFamily="34" charset="-120"/>
+              </a:rPr>
+              <a:t>感谢聆听</a:t>
+            </a:r>
+            <a:endParaRPr lang="en-US" sz="4800" dirty="0"/>
+          </a:p>
+        </p:txBody>
+      </p:sp>
+      <p:sp>
+        <p:nvSpPr>
+          <p:cNvPr id="11" name="Text 1"/>
+          <p:cNvSpPr/>
+          <p:nvPr/>
+        </p:nvSpPr>
+        <p:spPr>
+          <a:xfrm>
+            <a:off x="4067073" y="3590835"/>
+            <a:ext cx="4076217" cy="409565"/>
+          </a:xfrm>
+          <a:prstGeom prst="rect">
+            <a:avLst/>
+          </a:prstGeom>
+          <a:noFill/>
+        </p:spPr>
+        <p:txBody>
+          <a:bodyPr wrap="none" lIns="0" tIns="0" rIns="0" bIns="0" rtlCol="0" anchor="ctr"/>
+          <a:lstStyle/>
+          <a:p>
+            <a:pPr marL="0" indent="0" algn="ctr">
+              <a:buNone/>
+            </a:pPr>
+            <a:r>
+              <a:rPr lang="en-US" sz="1950" dirty="0">
+                <a:solidFill>
+                  <a:srgbClr val="475569"/>
+                </a:solidFill>
+                <a:latin typeface="等线" panose="02010600030101010101" pitchFamily="34" charset="-122"/>
+                <a:ea typeface="等线" panose="02010600030101010101" pitchFamily="34" charset="-122"/>
+                <a:cs typeface="等线" panose="02010600030101010101" pitchFamily="34" charset="-120"/>
+              </a:rPr>
+              <a:t>期待与您携手，共创智慧医疗新未来</a:t>
+            </a:r>
+            <a:endParaRPr lang="en-US" sz="1950" dirty="0"/>
+          </a:p>
+        </p:txBody>
+      </p:sp>
+      <p:pic>
+        <p:nvPicPr>
+          <p:cNvPr id="12" name="Image 8" descr="preencoded.png"/>
+          <p:cNvPicPr>
+            <a:picLocks noChangeAspect="1"/>
+          </p:cNvPicPr>
+          <p:nvPr/>
+        </p:nvPicPr>
+        <p:blipFill>
+          <a:blip r:embed="rId8"/>
+          <a:stretch>
+            <a:fillRect/>
+          </a:stretch>
+        </p:blipFill>
+        <p:spPr>
+          <a:xfrm>
+            <a:off x="4924302" y="4543311"/>
+            <a:ext cx="914377" cy="9525"/>
+          </a:xfrm>
+          <a:prstGeom prst="rect">
+            <a:avLst/>
+          </a:prstGeom>
+        </p:spPr>
+      </p:pic>
+      <p:pic>
+        <p:nvPicPr>
+          <p:cNvPr id="13" name="Image 9" descr="preencoded.png"/>
+          <p:cNvPicPr>
+            <a:picLocks noChangeAspect="1"/>
+          </p:cNvPicPr>
+          <p:nvPr/>
+        </p:nvPicPr>
+        <p:blipFill>
+          <a:blip r:embed="rId9"/>
+          <a:stretch>
+            <a:fillRect/>
+          </a:stretch>
+        </p:blipFill>
+        <p:spPr>
+          <a:xfrm>
+            <a:off x="5991075" y="4457589"/>
+            <a:ext cx="219070" cy="190495"/>
+          </a:xfrm>
+          <a:prstGeom prst="rect">
+            <a:avLst/>
+          </a:prstGeom>
+        </p:spPr>
+      </p:pic>
+      <p:pic>
+        <p:nvPicPr>
+          <p:cNvPr id="14" name="Image 10" descr="preencoded.png"/>
+          <p:cNvPicPr>
+            <a:picLocks noChangeAspect="1"/>
+          </p:cNvPicPr>
+          <p:nvPr/>
+        </p:nvPicPr>
+        <p:blipFill>
+          <a:blip r:embed="rId8"/>
+          <a:stretch>
+            <a:fillRect/>
+          </a:stretch>
+        </p:blipFill>
+        <p:spPr>
+          <a:xfrm>
+            <a:off x="6362541" y="4543311"/>
+            <a:ext cx="914377" cy="9525"/>
           </a:xfrm>
           <a:prstGeom prst="rect">
             <a:avLst/>

--- a/项目相关/宣发/医疗AI助手系统介绍 20260416.pptx
+++ b/项目相关/宣发/医疗AI助手系统介绍 20260416.pptx
@@ -11,7 +11,7 @@
     <p:sldId id="257" r:id="rId3"/>
     <p:sldId id="256" r:id="rId5"/>
     <p:sldId id="275" r:id="rId6"/>
-    <p:sldId id="258" r:id="rId7"/>
+    <p:sldId id="299" r:id="rId7"/>
     <p:sldId id="291" r:id="rId8"/>
     <p:sldId id="292" r:id="rId9"/>
     <p:sldId id="293" r:id="rId10"/>
@@ -42808,9 +42808,47 @@
           </a:prstGeom>
         </p:spPr>
       </p:pic>
-      <p:pic>
-        <p:nvPicPr>
-          <p:cNvPr id="3" name="Image 1" descr="preencoded.png"/>
+      <p:sp>
+        <p:nvSpPr>
+          <p:cNvPr id="3" name="Text 0"/>
+          <p:cNvSpPr/>
+          <p:nvPr/>
+        </p:nvSpPr>
+        <p:spPr>
+          <a:xfrm>
+            <a:off x="457189" y="457189"/>
+            <a:ext cx="11286462" cy="476238"/>
+          </a:xfrm>
+          <a:prstGeom prst="rect">
+            <a:avLst/>
+          </a:prstGeom>
+          <a:noFill/>
+        </p:spPr>
+        <p:txBody>
+          <a:bodyPr wrap="none" lIns="0" tIns="0" rIns="0" bIns="0" rtlCol="0" anchor="ctr"/>
+          <a:lstStyle/>
+          <a:p>
+            <a:pPr marL="0" indent="0" algn="l">
+              <a:buNone/>
+            </a:pPr>
+            <a:r>
+              <a:rPr lang="en-US" sz="3000" b="1" dirty="0">
+                <a:solidFill>
+                  <a:srgbClr val="0F172A"/>
+                </a:solidFill>
+                <a:latin typeface="等线" panose="02010600030101010101" pitchFamily="34" charset="-122"/>
+                <a:ea typeface="等线" panose="02010600030101010101" pitchFamily="34" charset="-122"/>
+                <a:cs typeface="等线" panose="02010600030101010101" pitchFamily="34" charset="-120"/>
+              </a:rPr>
+              <a:t>中国医院等级金字塔分布</a:t>
+            </a:r>
+            <a:endParaRPr lang="en-US" sz="3000" dirty="0"/>
+          </a:p>
+        </p:txBody>
+      </p:sp>
+      <p:pic>
+        <p:nvPicPr>
+          <p:cNvPr id="4" name="Image 1" descr="preencoded.png"/>
           <p:cNvPicPr>
             <a:picLocks noChangeAspect="1"/>
           </p:cNvPicPr>
@@ -42824,17 +42862,77 @@
         </p:blipFill>
         <p:spPr>
           <a:xfrm>
-            <a:off x="0" y="2819330"/>
-            <a:ext cx="57149" cy="1219170"/>
-          </a:xfrm>
-          <a:prstGeom prst="rect">
-            <a:avLst/>
-          </a:prstGeom>
-        </p:spPr>
-      </p:pic>
-      <p:pic>
-        <p:nvPicPr>
-          <p:cNvPr id="4" name="Image 2" descr="preencoded.png"/>
+            <a:off x="457189" y="1047724"/>
+            <a:ext cx="457189" cy="38099"/>
+          </a:xfrm>
+          <a:prstGeom prst="rect">
+            <a:avLst/>
+          </a:prstGeom>
+        </p:spPr>
+      </p:pic>
+      <p:sp>
+        <p:nvSpPr>
+          <p:cNvPr id="5" name="Text 1"/>
+          <p:cNvSpPr/>
+          <p:nvPr/>
+        </p:nvSpPr>
+        <p:spPr>
+          <a:xfrm>
+            <a:off x="457189" y="1314417"/>
+            <a:ext cx="5666853" cy="533387"/>
+          </a:xfrm>
+          <a:prstGeom prst="rect">
+            <a:avLst/>
+          </a:prstGeom>
+          <a:noFill/>
+        </p:spPr>
+        <p:txBody>
+          <a:bodyPr wrap="square" lIns="0" tIns="0" rIns="0" bIns="0" rtlCol="0" anchor="ctr"/>
+          <a:lstStyle/>
+          <a:p>
+            <a:pPr marL="0" indent="0" algn="l">
+              <a:buNone/>
+            </a:pPr>
+            <a:r>
+              <a:rPr lang="en-US" sz="1270" dirty="0">
+                <a:solidFill>
+                  <a:srgbClr val="334155"/>
+                </a:solidFill>
+                <a:latin typeface="等线" panose="02010600030101010101" pitchFamily="34" charset="-122"/>
+                <a:ea typeface="等线" panose="02010600030101010101" pitchFamily="34" charset="-122"/>
+                <a:cs typeface="等线" panose="02010600030101010101" pitchFamily="34" charset="-120"/>
+              </a:rPr>
+              <a:t>中国医疗机构呈现典型的</a:t>
+            </a:r>
+            <a:r>
+              <a:rPr lang="en-US" sz="1270" b="1" dirty="0">
+                <a:solidFill>
+                  <a:srgbClr val="0F172A"/>
+                </a:solidFill>
+                <a:latin typeface="等线" panose="02010600030101010101" pitchFamily="34" charset="-122"/>
+                <a:ea typeface="等线" panose="02010600030101010101" pitchFamily="34" charset="-122"/>
+                <a:cs typeface="等线" panose="02010600030101010101" pitchFamily="34" charset="-120"/>
+              </a:rPr>
+              <a:t>倒金字塔结构</a:t>
+            </a:r>
+            <a:r>
+              <a:rPr lang="en-US" sz="1270" dirty="0">
+                <a:solidFill>
+                  <a:srgbClr val="334155"/>
+                </a:solidFill>
+                <a:latin typeface="等线" panose="02010600030101010101" pitchFamily="34" charset="-122"/>
+                <a:ea typeface="等线" panose="02010600030101010101" pitchFamily="34" charset="-122"/>
+                <a:cs typeface="等线" panose="02010600030101010101" pitchFamily="34" charset="-120"/>
+              </a:rPr>
+              <a:t>，优质医疗资源高度集中，而承担基础诊疗服务的基层机构数量庞大。</a:t>
+            </a:r>
+            <a:endParaRPr lang="en-US" sz="1270" dirty="0"/>
+          </a:p>
+        </p:txBody>
+      </p:sp>
+      <p:pic>
+        <p:nvPicPr>
+          <p:cNvPr id="6" name="Image 2" descr="preencoded.png"/>
           <p:cNvPicPr>
             <a:picLocks noChangeAspect="1"/>
           </p:cNvPicPr>
@@ -42848,24 +42946,72 @@
         </p:blipFill>
         <p:spPr>
           <a:xfrm>
-            <a:off x="914377" y="695308"/>
-            <a:ext cx="457189" cy="19050"/>
-          </a:xfrm>
-          <a:prstGeom prst="rect">
-            <a:avLst/>
-          </a:prstGeom>
-        </p:spPr>
-      </p:pic>
-      <p:sp>
-        <p:nvSpPr>
-          <p:cNvPr id="5" name="Text 0"/>
-          <p:cNvSpPr/>
-          <p:nvPr/>
-        </p:nvSpPr>
-        <p:spPr>
-          <a:xfrm>
-            <a:off x="1523962" y="609585"/>
-            <a:ext cx="2104592" cy="190495"/>
+            <a:off x="457189" y="2000200"/>
+            <a:ext cx="5657709" cy="657209"/>
+          </a:xfrm>
+          <a:prstGeom prst="rect">
+            <a:avLst/>
+          </a:prstGeom>
+        </p:spPr>
+      </p:pic>
+      <p:pic>
+        <p:nvPicPr>
+          <p:cNvPr id="7" name="Image 3" descr="preencoded.png"/>
+          <p:cNvPicPr>
+            <a:picLocks noChangeAspect="1"/>
+          </p:cNvPicPr>
+          <p:nvPr/>
+        </p:nvPicPr>
+        <p:blipFill>
+          <a:blip r:embed="rId4"/>
+          <a:stretch>
+            <a:fillRect/>
+          </a:stretch>
+        </p:blipFill>
+        <p:spPr>
+          <a:xfrm>
+            <a:off x="581010" y="2143071"/>
+            <a:ext cx="304792" cy="304792"/>
+          </a:xfrm>
+          <a:prstGeom prst="rect">
+            <a:avLst/>
+          </a:prstGeom>
+        </p:spPr>
+      </p:pic>
+      <p:pic>
+        <p:nvPicPr>
+          <p:cNvPr id="8" name="Image 4" descr="preencoded.png"/>
+          <p:cNvPicPr>
+            <a:picLocks noChangeAspect="1"/>
+          </p:cNvPicPr>
+          <p:nvPr/>
+        </p:nvPicPr>
+        <p:blipFill>
+          <a:blip r:embed="rId5"/>
+          <a:stretch>
+            <a:fillRect/>
+          </a:stretch>
+        </p:blipFill>
+        <p:spPr>
+          <a:xfrm>
+            <a:off x="666733" y="2228794"/>
+            <a:ext cx="152396" cy="133347"/>
+          </a:xfrm>
+          <a:prstGeom prst="rect">
+            <a:avLst/>
+          </a:prstGeom>
+        </p:spPr>
+      </p:pic>
+      <p:sp>
+        <p:nvSpPr>
+          <p:cNvPr id="9" name="Text 2"/>
+          <p:cNvSpPr/>
+          <p:nvPr/>
+        </p:nvSpPr>
+        <p:spPr>
+          <a:xfrm>
+            <a:off x="1000100" y="2124022"/>
+            <a:ext cx="5000119" cy="219070"/>
           </a:xfrm>
           <a:prstGeom prst="rect">
             <a:avLst/>
@@ -42880,7 +43026,752 @@
               <a:buNone/>
             </a:pPr>
             <a:r>
-              <a:rPr lang="en-US" sz="1050" b="1" dirty="0">
+              <a:rPr lang="en-US" sz="1120" b="1" dirty="0">
+                <a:solidFill>
+                  <a:srgbClr val="0F172A"/>
+                </a:solidFill>
+                <a:latin typeface="等线" panose="02010600030101010101" pitchFamily="34" charset="-122"/>
+                <a:ea typeface="等线" panose="02010600030101010101" pitchFamily="34" charset="-122"/>
+                <a:cs typeface="等线" panose="02010600030101010101" pitchFamily="34" charset="-120"/>
+              </a:rPr>
+              <a:t>顶级医院（复旦百强）</a:t>
+            </a:r>
+            <a:endParaRPr lang="en-US" sz="1120" dirty="0"/>
+          </a:p>
+        </p:txBody>
+      </p:sp>
+      <p:sp>
+        <p:nvSpPr>
+          <p:cNvPr id="10" name="Text 3"/>
+          <p:cNvSpPr/>
+          <p:nvPr/>
+        </p:nvSpPr>
+        <p:spPr>
+          <a:xfrm>
+            <a:off x="1000100" y="2352616"/>
+            <a:ext cx="5000119" cy="171446"/>
+          </a:xfrm>
+          <a:prstGeom prst="rect">
+            <a:avLst/>
+          </a:prstGeom>
+          <a:noFill/>
+        </p:spPr>
+        <p:txBody>
+          <a:bodyPr wrap="none" lIns="0" tIns="0" rIns="0" bIns="0" rtlCol="0" anchor="ctr"/>
+          <a:lstStyle/>
+          <a:p>
+            <a:pPr marL="0" indent="0" algn="l">
+              <a:buNone/>
+            </a:pPr>
+            <a:r>
+              <a:rPr lang="en-US" sz="970" dirty="0">
+                <a:solidFill>
+                  <a:srgbClr val="475569"/>
+                </a:solidFill>
+                <a:latin typeface="等线" panose="02010600030101010101" pitchFamily="34" charset="-122"/>
+                <a:ea typeface="等线" panose="02010600030101010101" pitchFamily="34" charset="-122"/>
+                <a:cs typeface="等线" panose="02010600030101010101" pitchFamily="34" charset="-120"/>
+              </a:rPr>
+              <a:t>约</a:t>
+            </a:r>
+            <a:r>
+              <a:rPr lang="en-US" sz="970" b="1" dirty="0">
+                <a:solidFill>
+                  <a:srgbClr val="0F766E"/>
+                </a:solidFill>
+                <a:latin typeface="等线" panose="02010600030101010101" pitchFamily="34" charset="-122"/>
+                <a:ea typeface="等线" panose="02010600030101010101" pitchFamily="34" charset="-122"/>
+                <a:cs typeface="等线" panose="02010600030101010101" pitchFamily="34" charset="-120"/>
+              </a:rPr>
+              <a:t>100家</a:t>
+            </a:r>
+            <a:r>
+              <a:rPr lang="en-US" sz="970" dirty="0">
+                <a:solidFill>
+                  <a:srgbClr val="475569"/>
+                </a:solidFill>
+                <a:latin typeface="等线" panose="02010600030101010101" pitchFamily="34" charset="-122"/>
+                <a:ea typeface="等线" panose="02010600030101010101" pitchFamily="34" charset="-122"/>
+                <a:cs typeface="等线" panose="02010600030101010101" pitchFamily="34" charset="-120"/>
+              </a:rPr>
+              <a:t>，仅分布在23个城市，超过90%的地级市无百强医院。</a:t>
+            </a:r>
+            <a:endParaRPr lang="en-US" sz="970" dirty="0"/>
+          </a:p>
+        </p:txBody>
+      </p:sp>
+      <p:pic>
+        <p:nvPicPr>
+          <p:cNvPr id="11" name="Image 5" descr="preencoded.png"/>
+          <p:cNvPicPr>
+            <a:picLocks noChangeAspect="1"/>
+          </p:cNvPicPr>
+          <p:nvPr/>
+        </p:nvPicPr>
+        <p:blipFill>
+          <a:blip r:embed="rId6"/>
+          <a:stretch>
+            <a:fillRect/>
+          </a:stretch>
+        </p:blipFill>
+        <p:spPr>
+          <a:xfrm>
+            <a:off x="457189" y="2762181"/>
+            <a:ext cx="5657709" cy="828654"/>
+          </a:xfrm>
+          <a:prstGeom prst="rect">
+            <a:avLst/>
+          </a:prstGeom>
+        </p:spPr>
+      </p:pic>
+      <p:pic>
+        <p:nvPicPr>
+          <p:cNvPr id="12" name="Image 6" descr="preencoded.png"/>
+          <p:cNvPicPr>
+            <a:picLocks noChangeAspect="1"/>
+          </p:cNvPicPr>
+          <p:nvPr/>
+        </p:nvPicPr>
+        <p:blipFill>
+          <a:blip r:embed="rId4"/>
+          <a:stretch>
+            <a:fillRect/>
+          </a:stretch>
+        </p:blipFill>
+        <p:spPr>
+          <a:xfrm>
+            <a:off x="581010" y="2905052"/>
+            <a:ext cx="304792" cy="304792"/>
+          </a:xfrm>
+          <a:prstGeom prst="rect">
+            <a:avLst/>
+          </a:prstGeom>
+        </p:spPr>
+      </p:pic>
+      <p:pic>
+        <p:nvPicPr>
+          <p:cNvPr id="13" name="Image 7" descr="preencoded.png"/>
+          <p:cNvPicPr>
+            <a:picLocks noChangeAspect="1"/>
+          </p:cNvPicPr>
+          <p:nvPr/>
+        </p:nvPicPr>
+        <p:blipFill>
+          <a:blip r:embed="rId7"/>
+          <a:stretch>
+            <a:fillRect/>
+          </a:stretch>
+        </p:blipFill>
+        <p:spPr>
+          <a:xfrm>
+            <a:off x="657209" y="2990775"/>
+            <a:ext cx="171446" cy="133347"/>
+          </a:xfrm>
+          <a:prstGeom prst="rect">
+            <a:avLst/>
+          </a:prstGeom>
+        </p:spPr>
+      </p:pic>
+      <p:sp>
+        <p:nvSpPr>
+          <p:cNvPr id="14" name="Text 4"/>
+          <p:cNvSpPr/>
+          <p:nvPr/>
+        </p:nvSpPr>
+        <p:spPr>
+          <a:xfrm>
+            <a:off x="1000100" y="2886003"/>
+            <a:ext cx="5000119" cy="219070"/>
+          </a:xfrm>
+          <a:prstGeom prst="rect">
+            <a:avLst/>
+          </a:prstGeom>
+          <a:noFill/>
+        </p:spPr>
+        <p:txBody>
+          <a:bodyPr wrap="none" lIns="0" tIns="0" rIns="0" bIns="0" rtlCol="0" anchor="ctr"/>
+          <a:lstStyle/>
+          <a:p>
+            <a:pPr marL="0" indent="0" algn="l">
+              <a:buNone/>
+            </a:pPr>
+            <a:r>
+              <a:rPr lang="en-US" sz="1120" b="1" dirty="0">
+                <a:solidFill>
+                  <a:srgbClr val="0F172A"/>
+                </a:solidFill>
+                <a:latin typeface="等线" panose="02010600030101010101" pitchFamily="34" charset="-122"/>
+                <a:ea typeface="等线" panose="02010600030101010101" pitchFamily="34" charset="-122"/>
+                <a:cs typeface="等线" panose="02010600030101010101" pitchFamily="34" charset="-120"/>
+              </a:rPr>
+              <a:t>三甲医院</a:t>
+            </a:r>
+            <a:endParaRPr lang="en-US" sz="1120" dirty="0"/>
+          </a:p>
+        </p:txBody>
+      </p:sp>
+      <p:sp>
+        <p:nvSpPr>
+          <p:cNvPr id="15" name="Text 5"/>
+          <p:cNvSpPr/>
+          <p:nvPr/>
+        </p:nvSpPr>
+        <p:spPr>
+          <a:xfrm>
+            <a:off x="1000100" y="3124122"/>
+            <a:ext cx="5000119" cy="342891"/>
+          </a:xfrm>
+          <a:prstGeom prst="rect">
+            <a:avLst/>
+          </a:prstGeom>
+          <a:noFill/>
+        </p:spPr>
+        <p:txBody>
+          <a:bodyPr wrap="square" lIns="0" tIns="0" rIns="0" bIns="0" rtlCol="0" anchor="ctr"/>
+          <a:lstStyle/>
+          <a:p>
+            <a:pPr marL="0" indent="0" algn="l">
+              <a:buNone/>
+            </a:pPr>
+            <a:r>
+              <a:rPr lang="en-US" sz="970" b="1" dirty="0">
+                <a:solidFill>
+                  <a:srgbClr val="0F766E"/>
+                </a:solidFill>
+                <a:latin typeface="等线" panose="02010600030101010101" pitchFamily="34" charset="-122"/>
+                <a:ea typeface="等线" panose="02010600030101010101" pitchFamily="34" charset="-122"/>
+                <a:cs typeface="等线" panose="02010600030101010101" pitchFamily="34" charset="-120"/>
+              </a:rPr>
+              <a:t>1,876家</a:t>
+            </a:r>
+            <a:r>
+              <a:rPr lang="en-US" sz="970" dirty="0">
+                <a:solidFill>
+                  <a:srgbClr val="475569"/>
+                </a:solidFill>
+                <a:latin typeface="等线" panose="02010600030101010101" pitchFamily="34" charset="-122"/>
+                <a:ea typeface="等线" panose="02010600030101010101" pitchFamily="34" charset="-122"/>
+                <a:cs typeface="等线" panose="02010600030101010101" pitchFamily="34" charset="-120"/>
+              </a:rPr>
+              <a:t>，占全国医院总数不足5%，却承担了最大比例的诊疗量（2024年28.7亿人次），虹吸效应严重。</a:t>
+            </a:r>
+            <a:endParaRPr lang="en-US" sz="970" dirty="0"/>
+          </a:p>
+        </p:txBody>
+      </p:sp>
+      <p:pic>
+        <p:nvPicPr>
+          <p:cNvPr id="16" name="Image 8" descr="preencoded.png"/>
+          <p:cNvPicPr>
+            <a:picLocks noChangeAspect="1"/>
+          </p:cNvPicPr>
+          <p:nvPr/>
+        </p:nvPicPr>
+        <p:blipFill>
+          <a:blip r:embed="rId3"/>
+          <a:stretch>
+            <a:fillRect/>
+          </a:stretch>
+        </p:blipFill>
+        <p:spPr>
+          <a:xfrm>
+            <a:off x="457189" y="3695608"/>
+            <a:ext cx="5657709" cy="657209"/>
+          </a:xfrm>
+          <a:prstGeom prst="rect">
+            <a:avLst/>
+          </a:prstGeom>
+        </p:spPr>
+      </p:pic>
+      <p:pic>
+        <p:nvPicPr>
+          <p:cNvPr id="17" name="Image 9" descr="preencoded.png"/>
+          <p:cNvPicPr>
+            <a:picLocks noChangeAspect="1"/>
+          </p:cNvPicPr>
+          <p:nvPr/>
+        </p:nvPicPr>
+        <p:blipFill>
+          <a:blip r:embed="rId4"/>
+          <a:stretch>
+            <a:fillRect/>
+          </a:stretch>
+        </p:blipFill>
+        <p:spPr>
+          <a:xfrm>
+            <a:off x="581010" y="3838479"/>
+            <a:ext cx="304792" cy="304792"/>
+          </a:xfrm>
+          <a:prstGeom prst="rect">
+            <a:avLst/>
+          </a:prstGeom>
+        </p:spPr>
+      </p:pic>
+      <p:pic>
+        <p:nvPicPr>
+          <p:cNvPr id="18" name="Image 10" descr="preencoded.png"/>
+          <p:cNvPicPr>
+            <a:picLocks noChangeAspect="1"/>
+          </p:cNvPicPr>
+          <p:nvPr/>
+        </p:nvPicPr>
+        <p:blipFill>
+          <a:blip r:embed="rId7"/>
+          <a:stretch>
+            <a:fillRect/>
+          </a:stretch>
+        </p:blipFill>
+        <p:spPr>
+          <a:xfrm>
+            <a:off x="657209" y="3924202"/>
+            <a:ext cx="171446" cy="133347"/>
+          </a:xfrm>
+          <a:prstGeom prst="rect">
+            <a:avLst/>
+          </a:prstGeom>
+        </p:spPr>
+      </p:pic>
+      <p:sp>
+        <p:nvSpPr>
+          <p:cNvPr id="19" name="Text 6"/>
+          <p:cNvSpPr/>
+          <p:nvPr/>
+        </p:nvSpPr>
+        <p:spPr>
+          <a:xfrm>
+            <a:off x="1000100" y="3819430"/>
+            <a:ext cx="5000119" cy="219070"/>
+          </a:xfrm>
+          <a:prstGeom prst="rect">
+            <a:avLst/>
+          </a:prstGeom>
+          <a:noFill/>
+        </p:spPr>
+        <p:txBody>
+          <a:bodyPr wrap="none" lIns="0" tIns="0" rIns="0" bIns="0" rtlCol="0" anchor="ctr"/>
+          <a:lstStyle/>
+          <a:p>
+            <a:pPr marL="0" indent="0" algn="l">
+              <a:buNone/>
+            </a:pPr>
+            <a:r>
+              <a:rPr lang="en-US" sz="1120" b="1" dirty="0">
+                <a:solidFill>
+                  <a:srgbClr val="0F172A"/>
+                </a:solidFill>
+                <a:latin typeface="等线" panose="02010600030101010101" pitchFamily="34" charset="-122"/>
+                <a:ea typeface="等线" panose="02010600030101010101" pitchFamily="34" charset="-122"/>
+                <a:cs typeface="等线" panose="02010600030101010101" pitchFamily="34" charset="-120"/>
+              </a:rPr>
+              <a:t>其他医院</a:t>
+            </a:r>
+            <a:endParaRPr lang="en-US" sz="1120" dirty="0"/>
+          </a:p>
+        </p:txBody>
+      </p:sp>
+      <p:sp>
+        <p:nvSpPr>
+          <p:cNvPr id="20" name="Text 7"/>
+          <p:cNvSpPr/>
+          <p:nvPr/>
+        </p:nvSpPr>
+        <p:spPr>
+          <a:xfrm>
+            <a:off x="1000100" y="4057549"/>
+            <a:ext cx="5000119" cy="171446"/>
+          </a:xfrm>
+          <a:prstGeom prst="rect">
+            <a:avLst/>
+          </a:prstGeom>
+          <a:noFill/>
+        </p:spPr>
+        <p:txBody>
+          <a:bodyPr wrap="none" lIns="0" tIns="0" rIns="0" bIns="0" rtlCol="0" anchor="ctr"/>
+          <a:lstStyle/>
+          <a:p>
+            <a:pPr marL="0" indent="0" algn="l">
+              <a:buNone/>
+            </a:pPr>
+            <a:r>
+              <a:rPr lang="en-US" sz="970" dirty="0">
+                <a:solidFill>
+                  <a:srgbClr val="475569"/>
+                </a:solidFill>
+                <a:latin typeface="等线" panose="02010600030101010101" pitchFamily="34" charset="-122"/>
+                <a:ea typeface="等线" panose="02010600030101010101" pitchFamily="34" charset="-122"/>
+                <a:cs typeface="等线" panose="02010600030101010101" pitchFamily="34" charset="-120"/>
+              </a:rPr>
+              <a:t>包括三乙、二级、一级及未定级医院，合计约</a:t>
+            </a:r>
+            <a:r>
+              <a:rPr lang="en-US" sz="970" b="1" dirty="0">
+                <a:solidFill>
+                  <a:srgbClr val="0F766E"/>
+                </a:solidFill>
+                <a:latin typeface="等线" panose="02010600030101010101" pitchFamily="34" charset="-122"/>
+                <a:ea typeface="等线" panose="02010600030101010101" pitchFamily="34" charset="-122"/>
+                <a:cs typeface="等线" panose="02010600030101010101" pitchFamily="34" charset="-120"/>
+              </a:rPr>
+              <a:t>3.7万家</a:t>
+            </a:r>
+            <a:r>
+              <a:rPr lang="en-US" sz="970" dirty="0">
+                <a:solidFill>
+                  <a:srgbClr val="475569"/>
+                </a:solidFill>
+                <a:latin typeface="等线" panose="02010600030101010101" pitchFamily="34" charset="-122"/>
+                <a:ea typeface="等线" panose="02010600030101010101" pitchFamily="34" charset="-122"/>
+                <a:cs typeface="等线" panose="02010600030101010101" pitchFamily="34" charset="-120"/>
+              </a:rPr>
+              <a:t>，是连接顶层与基层的关键环节。</a:t>
+            </a:r>
+            <a:endParaRPr lang="en-US" sz="970" dirty="0"/>
+          </a:p>
+        </p:txBody>
+      </p:sp>
+      <p:pic>
+        <p:nvPicPr>
+          <p:cNvPr id="21" name="Image 11" descr="preencoded.png"/>
+          <p:cNvPicPr>
+            <a:picLocks noChangeAspect="1"/>
+          </p:cNvPicPr>
+          <p:nvPr/>
+        </p:nvPicPr>
+        <p:blipFill>
+          <a:blip r:embed="rId8"/>
+          <a:stretch>
+            <a:fillRect/>
+          </a:stretch>
+        </p:blipFill>
+        <p:spPr>
+          <a:xfrm>
+            <a:off x="457189" y="4467113"/>
+            <a:ext cx="5657709" cy="828654"/>
+          </a:xfrm>
+          <a:prstGeom prst="rect">
+            <a:avLst/>
+          </a:prstGeom>
+        </p:spPr>
+      </p:pic>
+      <p:pic>
+        <p:nvPicPr>
+          <p:cNvPr id="22" name="Image 12" descr="preencoded.png"/>
+          <p:cNvPicPr>
+            <a:picLocks noChangeAspect="1"/>
+          </p:cNvPicPr>
+          <p:nvPr/>
+        </p:nvPicPr>
+        <p:blipFill>
+          <a:blip r:embed="rId4"/>
+          <a:stretch>
+            <a:fillRect/>
+          </a:stretch>
+        </p:blipFill>
+        <p:spPr>
+          <a:xfrm>
+            <a:off x="600060" y="4609985"/>
+            <a:ext cx="304792" cy="304792"/>
+          </a:xfrm>
+          <a:prstGeom prst="rect">
+            <a:avLst/>
+          </a:prstGeom>
+        </p:spPr>
+      </p:pic>
+      <p:pic>
+        <p:nvPicPr>
+          <p:cNvPr id="23" name="Image 13" descr="preencoded.png"/>
+          <p:cNvPicPr>
+            <a:picLocks noChangeAspect="1"/>
+          </p:cNvPicPr>
+          <p:nvPr/>
+        </p:nvPicPr>
+        <p:blipFill>
+          <a:blip r:embed="rId9"/>
+          <a:stretch>
+            <a:fillRect/>
+          </a:stretch>
+        </p:blipFill>
+        <p:spPr>
+          <a:xfrm>
+            <a:off x="685783" y="4695708"/>
+            <a:ext cx="152396" cy="133347"/>
+          </a:xfrm>
+          <a:prstGeom prst="rect">
+            <a:avLst/>
+          </a:prstGeom>
+        </p:spPr>
+      </p:pic>
+      <p:sp>
+        <p:nvSpPr>
+          <p:cNvPr id="24" name="Text 8"/>
+          <p:cNvSpPr/>
+          <p:nvPr/>
+        </p:nvSpPr>
+        <p:spPr>
+          <a:xfrm>
+            <a:off x="1019150" y="4590935"/>
+            <a:ext cx="4981070" cy="219070"/>
+          </a:xfrm>
+          <a:prstGeom prst="rect">
+            <a:avLst/>
+          </a:prstGeom>
+          <a:noFill/>
+        </p:spPr>
+        <p:txBody>
+          <a:bodyPr wrap="none" lIns="0" tIns="0" rIns="0" bIns="0" rtlCol="0" anchor="ctr"/>
+          <a:lstStyle/>
+          <a:p>
+            <a:pPr marL="0" indent="0" algn="l">
+              <a:buNone/>
+            </a:pPr>
+            <a:r>
+              <a:rPr lang="en-US" sz="1120" b="1" dirty="0">
+                <a:solidFill>
+                  <a:srgbClr val="0F172A"/>
+                </a:solidFill>
+                <a:latin typeface="等线" panose="02010600030101010101" pitchFamily="34" charset="-122"/>
+                <a:ea typeface="等线" panose="02010600030101010101" pitchFamily="34" charset="-122"/>
+                <a:cs typeface="等线" panose="02010600030101010101" pitchFamily="34" charset="-120"/>
+              </a:rPr>
+              <a:t>基层医疗卫生机构</a:t>
+            </a:r>
+            <a:endParaRPr lang="en-US" sz="1120" dirty="0"/>
+          </a:p>
+        </p:txBody>
+      </p:sp>
+      <p:sp>
+        <p:nvSpPr>
+          <p:cNvPr id="25" name="Text 9"/>
+          <p:cNvSpPr/>
+          <p:nvPr/>
+        </p:nvSpPr>
+        <p:spPr>
+          <a:xfrm>
+            <a:off x="1019150" y="4819530"/>
+            <a:ext cx="4981070" cy="342891"/>
+          </a:xfrm>
+          <a:prstGeom prst="rect">
+            <a:avLst/>
+          </a:prstGeom>
+          <a:noFill/>
+        </p:spPr>
+        <p:txBody>
+          <a:bodyPr wrap="square" lIns="0" tIns="0" rIns="0" bIns="0" rtlCol="0" anchor="ctr"/>
+          <a:lstStyle/>
+          <a:p>
+            <a:pPr marL="0" indent="0" algn="l">
+              <a:buNone/>
+            </a:pPr>
+            <a:r>
+              <a:rPr lang="en-US" sz="970" dirty="0">
+                <a:solidFill>
+                  <a:srgbClr val="475569"/>
+                </a:solidFill>
+                <a:latin typeface="等线" panose="02010600030101010101" pitchFamily="34" charset="-122"/>
+                <a:ea typeface="等线" panose="02010600030101010101" pitchFamily="34" charset="-122"/>
+                <a:cs typeface="等线" panose="02010600030101010101" pitchFamily="34" charset="-120"/>
+              </a:rPr>
+              <a:t>约</a:t>
+            </a:r>
+            <a:r>
+              <a:rPr lang="en-US" sz="970" b="1" dirty="0">
+                <a:solidFill>
+                  <a:srgbClr val="0F766E"/>
+                </a:solidFill>
+                <a:latin typeface="等线" panose="02010600030101010101" pitchFamily="34" charset="-122"/>
+                <a:ea typeface="等线" panose="02010600030101010101" pitchFamily="34" charset="-122"/>
+                <a:cs typeface="等线" panose="02010600030101010101" pitchFamily="34" charset="-120"/>
+              </a:rPr>
+              <a:t>105.5万个</a:t>
+            </a:r>
+            <a:r>
+              <a:rPr lang="en-US" sz="970" dirty="0">
+                <a:solidFill>
+                  <a:srgbClr val="475569"/>
+                </a:solidFill>
+                <a:latin typeface="等线" panose="02010600030101010101" pitchFamily="34" charset="-122"/>
+                <a:ea typeface="等线" panose="02010600030101010101" pitchFamily="34" charset="-122"/>
+                <a:cs typeface="等线" panose="02010600030101010101" pitchFamily="34" charset="-120"/>
+              </a:rPr>
+              <a:t>，构成服务体系的绝对主体。其中村卫生室（56.0万）和诊所（42.4万）占比最高，是服务民众的"第一道防线"。</a:t>
+            </a:r>
+            <a:endParaRPr lang="en-US" sz="970" dirty="0"/>
+          </a:p>
+        </p:txBody>
+      </p:sp>
+      <p:pic>
+        <p:nvPicPr>
+          <p:cNvPr id="26" name="Image 14" descr="preencoded.png"/>
+          <p:cNvPicPr>
+            <a:picLocks noChangeAspect="1"/>
+          </p:cNvPicPr>
+          <p:nvPr/>
+        </p:nvPicPr>
+        <p:blipFill>
+          <a:blip r:embed="rId10"/>
+          <a:stretch>
+            <a:fillRect/>
+          </a:stretch>
+        </p:blipFill>
+        <p:spPr>
+          <a:xfrm>
+            <a:off x="457189" y="5810105"/>
+            <a:ext cx="5657709" cy="561961"/>
+          </a:xfrm>
+          <a:prstGeom prst="rect">
+            <a:avLst/>
+          </a:prstGeom>
+        </p:spPr>
+      </p:pic>
+      <p:pic>
+        <p:nvPicPr>
+          <p:cNvPr id="27" name="Image 15" descr="preencoded.png"/>
+          <p:cNvPicPr>
+            <a:picLocks noChangeAspect="1"/>
+          </p:cNvPicPr>
+          <p:nvPr/>
+        </p:nvPicPr>
+        <p:blipFill>
+          <a:blip r:embed="rId11"/>
+          <a:stretch>
+            <a:fillRect/>
+          </a:stretch>
+        </p:blipFill>
+        <p:spPr>
+          <a:xfrm>
+            <a:off x="457189" y="5972026"/>
+            <a:ext cx="104772" cy="133347"/>
+          </a:xfrm>
+          <a:prstGeom prst="rect">
+            <a:avLst/>
+          </a:prstGeom>
+        </p:spPr>
+      </p:pic>
+      <p:sp>
+        <p:nvSpPr>
+          <p:cNvPr id="28" name="Text 10"/>
+          <p:cNvSpPr/>
+          <p:nvPr/>
+        </p:nvSpPr>
+        <p:spPr>
+          <a:xfrm>
+            <a:off x="457189" y="5962501"/>
+            <a:ext cx="5419209" cy="371466"/>
+          </a:xfrm>
+          <a:prstGeom prst="rect">
+            <a:avLst/>
+          </a:prstGeom>
+          <a:noFill/>
+        </p:spPr>
+        <p:txBody>
+          <a:bodyPr wrap="square" lIns="0" tIns="0" rIns="0" bIns="0" rtlCol="0" anchor="ctr"/>
+          <a:lstStyle/>
+          <a:p>
+            <a:pPr marL="0" indent="0" algn="l">
+              <a:buNone/>
+            </a:pPr>
+            <a:r>
+              <a:rPr lang="en-US" sz="1050" dirty="0">
+                <a:solidFill>
+                  <a:srgbClr val="475569"/>
+                </a:solidFill>
+                <a:latin typeface="等线" panose="02010600030101010101" pitchFamily="34" charset="-122"/>
+                <a:ea typeface="等线" panose="02010600030101010101" pitchFamily="34" charset="-122"/>
+                <a:cs typeface="等线" panose="02010600030101010101" pitchFamily="34" charset="-120"/>
+              </a:rPr>
+              <a:t>庞大的基层机构数量与有限的诊疗能力形成巨大反差，为医疗AI系统提供了广阔的应用空间。</a:t>
+            </a:r>
+            <a:endParaRPr lang="en-US" sz="1050" dirty="0"/>
+          </a:p>
+        </p:txBody>
+      </p:sp>
+      <p:pic>
+        <p:nvPicPr>
+          <p:cNvPr id="29" name="Image 16" descr="preencoded.png"/>
+          <p:cNvPicPr>
+            <a:picLocks noChangeAspect="1"/>
+          </p:cNvPicPr>
+          <p:nvPr/>
+        </p:nvPicPr>
+        <p:blipFill>
+          <a:blip r:embed="rId12"/>
+          <a:stretch>
+            <a:fillRect/>
+          </a:stretch>
+        </p:blipFill>
+        <p:spPr>
+          <a:xfrm>
+            <a:off x="6495888" y="1276318"/>
+            <a:ext cx="5238619" cy="5124322"/>
+          </a:xfrm>
+          <a:prstGeom prst="rect">
+            <a:avLst/>
+          </a:prstGeom>
+        </p:spPr>
+      </p:pic>
+      <p:sp>
+        <p:nvSpPr>
+          <p:cNvPr id="30" name="Text 11"/>
+          <p:cNvSpPr/>
+          <p:nvPr/>
+        </p:nvSpPr>
+        <p:spPr>
+          <a:xfrm>
+            <a:off x="6695908" y="1476338"/>
+            <a:ext cx="4847723" cy="257169"/>
+          </a:xfrm>
+          <a:prstGeom prst="rect">
+            <a:avLst/>
+          </a:prstGeom>
+          <a:noFill/>
+        </p:spPr>
+        <p:txBody>
+          <a:bodyPr wrap="none" lIns="0" tIns="0" rIns="0" bIns="0" rtlCol="0" anchor="ctr"/>
+          <a:lstStyle/>
+          <a:p>
+            <a:pPr marL="0" indent="0" algn="l">
+              <a:buNone/>
+            </a:pPr>
+            <a:r>
+              <a:rPr lang="en-US" sz="1350" b="1" dirty="0">
+                <a:solidFill>
+                  <a:srgbClr val="0F172A"/>
+                </a:solidFill>
+                <a:latin typeface="等线" panose="02010600030101010101" pitchFamily="34" charset="-122"/>
+                <a:ea typeface="等线" panose="02010600030101010101" pitchFamily="34" charset="-122"/>
+                <a:cs typeface="等线" panose="02010600030101010101" pitchFamily="34" charset="-120"/>
+              </a:rPr>
+              <a:t>中国医疗机构数量分布</a:t>
+            </a:r>
+            <a:endParaRPr lang="en-US" sz="1350" dirty="0"/>
+          </a:p>
+        </p:txBody>
+      </p:sp>
+      <p:sp>
+        <p:nvSpPr>
+          <p:cNvPr id="31" name="Text 12"/>
+          <p:cNvSpPr/>
+          <p:nvPr/>
+        </p:nvSpPr>
+        <p:spPr>
+          <a:xfrm>
+            <a:off x="6695908" y="1771606"/>
+            <a:ext cx="4847723" cy="171446"/>
+          </a:xfrm>
+          <a:prstGeom prst="rect">
+            <a:avLst/>
+          </a:prstGeom>
+          <a:noFill/>
+        </p:spPr>
+        <p:txBody>
+          <a:bodyPr wrap="none" lIns="0" tIns="0" rIns="0" bIns="0" rtlCol="0" anchor="ctr"/>
+          <a:lstStyle/>
+          <a:p>
+            <a:pPr marL="0" indent="0" algn="l">
+              <a:buNone/>
+            </a:pPr>
+            <a:r>
+              <a:rPr lang="en-US" sz="900" dirty="0">
                 <a:solidFill>
                   <a:srgbClr val="64748B"/>
                 </a:solidFill>
@@ -42888,139 +43779,30 @@
                 <a:ea typeface="等线" panose="02010600030101010101" pitchFamily="34" charset="-122"/>
                 <a:cs typeface="等线" panose="02010600030101010101" pitchFamily="34" charset="-120"/>
               </a:rPr>
-              <a:t>Current Challenges</a:t>
-            </a:r>
-            <a:endParaRPr lang="en-US" sz="1050" dirty="0"/>
-          </a:p>
-        </p:txBody>
-      </p:sp>
-      <p:sp>
-        <p:nvSpPr>
-          <p:cNvPr id="6" name="Text 1"/>
-          <p:cNvSpPr/>
-          <p:nvPr/>
-        </p:nvSpPr>
-        <p:spPr>
-          <a:xfrm>
-            <a:off x="914377" y="952476"/>
-            <a:ext cx="10372085" cy="600060"/>
-          </a:xfrm>
-          <a:prstGeom prst="rect">
-            <a:avLst/>
-          </a:prstGeom>
-          <a:noFill/>
-        </p:spPr>
-        <p:txBody>
-          <a:bodyPr wrap="none" lIns="0" tIns="0" rIns="0" bIns="0" rtlCol="0" anchor="ctr"/>
-          <a:lstStyle/>
-          <a:p>
-            <a:pPr marL="0" indent="0" algn="l">
-              <a:buNone/>
-            </a:pPr>
-            <a:r>
-              <a:rPr lang="en-US" sz="3150" b="1" dirty="0">
-                <a:solidFill>
-                  <a:srgbClr val="0F172A"/>
-                </a:solidFill>
-                <a:latin typeface="等线" panose="02010600030101010101" pitchFamily="34" charset="-122"/>
-                <a:ea typeface="等线" panose="02010600030101010101" pitchFamily="34" charset="-122"/>
-                <a:cs typeface="等线" panose="02010600030101010101" pitchFamily="34" charset="-120"/>
-              </a:rPr>
-              <a:t>医疗</a:t>
-            </a:r>
-            <a:r>
-              <a:rPr lang="zh-CN" altLang="en-US" sz="3150" b="1" dirty="0">
-                <a:solidFill>
-                  <a:srgbClr val="0F172A"/>
-                </a:solidFill>
-                <a:latin typeface="等线" panose="02010600030101010101" pitchFamily="34" charset="-122"/>
-                <a:ea typeface="等线" panose="02010600030101010101" pitchFamily="34" charset="-122"/>
-                <a:cs typeface="等线" panose="02010600030101010101" pitchFamily="34" charset="-120"/>
-              </a:rPr>
-              <a:t>机构金字塔</a:t>
-            </a:r>
-            <a:endParaRPr lang="zh-CN" altLang="en-US" sz="3150" b="1" dirty="0">
-              <a:solidFill>
-                <a:srgbClr val="0F172A"/>
-              </a:solidFill>
-              <a:latin typeface="等线" panose="02010600030101010101" pitchFamily="34" charset="-122"/>
-              <a:ea typeface="等线" panose="02010600030101010101" pitchFamily="34" charset="-122"/>
-              <a:cs typeface="等线" panose="02010600030101010101" pitchFamily="34" charset="-120"/>
-            </a:endParaRPr>
-          </a:p>
-        </p:txBody>
-      </p:sp>
-      <p:pic>
-        <p:nvPicPr>
-          <p:cNvPr id="38" name="Image 21" descr="preencoded.png"/>
-          <p:cNvPicPr>
-            <a:picLocks noChangeAspect="1"/>
-          </p:cNvPicPr>
-          <p:nvPr/>
-        </p:nvPicPr>
-        <p:blipFill>
-          <a:blip r:embed="rId4">
-            <a:alphaModFix amt="6000"/>
-          </a:blip>
-          <a:stretch>
-            <a:fillRect/>
-          </a:stretch>
-        </p:blipFill>
-        <p:spPr>
-          <a:xfrm>
-            <a:off x="10105772" y="504812"/>
-            <a:ext cx="1447764" cy="1447764"/>
-          </a:xfrm>
-          <a:prstGeom prst="rect">
-            <a:avLst/>
-          </a:prstGeom>
-        </p:spPr>
-      </p:pic>
-      <p:pic>
-        <p:nvPicPr>
-          <p:cNvPr id="39" name="Image 22" descr="preencoded.png"/>
-          <p:cNvPicPr>
-            <a:picLocks noChangeAspect="1"/>
-          </p:cNvPicPr>
-          <p:nvPr/>
-        </p:nvPicPr>
-        <p:blipFill>
-          <a:blip r:embed="rId5">
-            <a:alphaModFix amt="6000"/>
-          </a:blip>
-          <a:stretch>
-            <a:fillRect/>
-          </a:stretch>
-        </p:blipFill>
-        <p:spPr>
-          <a:xfrm>
-            <a:off x="10381990" y="781030"/>
-            <a:ext cx="1342991" cy="1342991"/>
-          </a:xfrm>
-          <a:prstGeom prst="rect">
-            <a:avLst/>
-          </a:prstGeom>
-        </p:spPr>
-      </p:pic>
-      <p:pic>
-        <p:nvPicPr>
-          <p:cNvPr id="41" name="图片 40" descr="医疗机构金字塔"/>
-          <p:cNvPicPr>
-            <a:picLocks noChangeAspect="1"/>
-          </p:cNvPicPr>
-          <p:nvPr/>
-        </p:nvPicPr>
-        <p:blipFill>
-          <a:blip r:embed="rId6"/>
-          <a:srcRect/>
-          <a:stretch>
-            <a:fillRect/>
-          </a:stretch>
-        </p:blipFill>
-        <p:spPr>
-          <a:xfrm>
-            <a:off x="2569845" y="-281305"/>
-            <a:ext cx="7051040" cy="7051040"/>
+              <a:t>单位：家/个（采用对数坐标展示数量级差异）</a:t>
+            </a:r>
+            <a:endParaRPr lang="en-US" sz="900" dirty="0"/>
+          </a:p>
+        </p:txBody>
+      </p:sp>
+      <p:pic>
+        <p:nvPicPr>
+          <p:cNvPr id="32" name="Image 17" descr="preencoded.png"/>
+          <p:cNvPicPr>
+            <a:picLocks noChangeAspect="1"/>
+          </p:cNvPicPr>
+          <p:nvPr/>
+        </p:nvPicPr>
+        <p:blipFill>
+          <a:blip r:embed="rId13"/>
+          <a:stretch>
+            <a:fillRect/>
+          </a:stretch>
+        </p:blipFill>
+        <p:spPr>
+          <a:xfrm>
+            <a:off x="6695908" y="2019250"/>
+            <a:ext cx="4838579" cy="4181370"/>
           </a:xfrm>
           <a:prstGeom prst="rect">
             <a:avLst/>

--- a/项目相关/宣发/医疗AI助手系统介绍 20260416.pptx
+++ b/项目相关/宣发/医疗AI助手系统介绍 20260416.pptx
@@ -12757,10 +12757,14 @@
           <p:cNvPicPr>
             <a:picLocks noChangeAspect="1"/>
           </p:cNvPicPr>
-          <p:nvPr/>
-        </p:nvPicPr>
-        <p:blipFill>
-          <a:blip r:embed="rId4"/>
+          <p:nvPr>
+            <p:custDataLst>
+              <p:tags r:id="rId4"/>
+            </p:custDataLst>
+          </p:nvPr>
+        </p:nvPicPr>
+        <p:blipFill>
+          <a:blip r:embed="rId5"/>
           <a:stretch>
             <a:fillRect/>
           </a:stretch>
@@ -12781,10 +12785,14 @@
           <p:cNvPicPr>
             <a:picLocks noChangeAspect="1"/>
           </p:cNvPicPr>
-          <p:nvPr/>
-        </p:nvPicPr>
-        <p:blipFill>
-          <a:blip r:embed="rId5"/>
+          <p:nvPr>
+            <p:custDataLst>
+              <p:tags r:id="rId6"/>
+            </p:custDataLst>
+          </p:nvPr>
+        </p:nvPicPr>
+        <p:blipFill>
+          <a:blip r:embed="rId7"/>
           <a:stretch>
             <a:fillRect/>
           </a:stretch>
@@ -12805,10 +12813,14 @@
           <p:cNvPicPr>
             <a:picLocks noChangeAspect="1"/>
           </p:cNvPicPr>
-          <p:nvPr/>
-        </p:nvPicPr>
-        <p:blipFill>
-          <a:blip r:embed="rId6"/>
+          <p:nvPr>
+            <p:custDataLst>
+              <p:tags r:id="rId8"/>
+            </p:custDataLst>
+          </p:nvPr>
+        </p:nvPicPr>
+        <p:blipFill>
+          <a:blip r:embed="rId9"/>
           <a:stretch>
             <a:fillRect/>
           </a:stretch>
@@ -12827,7 +12839,11 @@
         <p:nvSpPr>
           <p:cNvPr id="11" name="Text 3"/>
           <p:cNvSpPr/>
-          <p:nvPr/>
+          <p:nvPr>
+            <p:custDataLst>
+              <p:tags r:id="rId10"/>
+            </p:custDataLst>
+          </p:nvPr>
         </p:nvSpPr>
         <p:spPr>
           <a:xfrm>
@@ -12865,7 +12881,11 @@
         <p:nvSpPr>
           <p:cNvPr id="12" name="Text 4"/>
           <p:cNvSpPr/>
-          <p:nvPr/>
+          <p:nvPr>
+            <p:custDataLst>
+              <p:tags r:id="rId11"/>
+            </p:custDataLst>
+          </p:nvPr>
         </p:nvSpPr>
         <p:spPr>
           <a:xfrm>
@@ -12885,17 +12905,18 @@
               <a:buNone/>
             </a:pPr>
             <a:r>
-              <a:rPr lang="en-US" sz="1050" dirty="0">
-                <a:solidFill>
-                  <a:srgbClr val="475569"/>
-                </a:solidFill>
-                <a:latin typeface="等线" panose="02010600030101010101" pitchFamily="34" charset="-122"/>
-                <a:ea typeface="等线" panose="02010600030101010101" pitchFamily="34" charset="-122"/>
-                <a:cs typeface="等线" panose="02010600030101010101" pitchFamily="34" charset="-120"/>
-              </a:rPr>
-              <a:t>诊断编码不完整直接导致DRG分组不准确，医院无法获得应有的医保支付。</a:t>
-            </a:r>
-            <a:endParaRPr lang="en-US" sz="1050" dirty="0"/>
+              <a:rPr lang="zh-CN" altLang="en-US" sz="1050" dirty="0"/>
+              <a:t>诊断编码的完整性与准确性不足，将直接影响</a:t>
+            </a:r>
+            <a:r>
+              <a:rPr lang="en-US" altLang="zh-CN" sz="1050" dirty="0"/>
+              <a:t>DRG</a:t>
+            </a:r>
+            <a:r>
+              <a:rPr lang="zh-CN" altLang="en-US" sz="1050" dirty="0"/>
+              <a:t>分组的精准度，导致医保支付未能充分反映医疗机构的实际服务成本与医疗价值。</a:t>
+            </a:r>
+            <a:endParaRPr lang="zh-CN" altLang="en-US" sz="1050" dirty="0"/>
           </a:p>
         </p:txBody>
       </p:sp>
@@ -12905,10 +12926,14 @@
           <p:cNvPicPr>
             <a:picLocks noChangeAspect="1"/>
           </p:cNvPicPr>
-          <p:nvPr/>
-        </p:nvPicPr>
-        <p:blipFill>
-          <a:blip r:embed="rId4"/>
+          <p:nvPr>
+            <p:custDataLst>
+              <p:tags r:id="rId12"/>
+            </p:custDataLst>
+          </p:nvPr>
+        </p:nvPicPr>
+        <p:blipFill>
+          <a:blip r:embed="rId5"/>
           <a:stretch>
             <a:fillRect/>
           </a:stretch>
@@ -12929,10 +12954,14 @@
           <p:cNvPicPr>
             <a:picLocks noChangeAspect="1"/>
           </p:cNvPicPr>
-          <p:nvPr/>
-        </p:nvPicPr>
-        <p:blipFill>
-          <a:blip r:embed="rId5"/>
+          <p:nvPr>
+            <p:custDataLst>
+              <p:tags r:id="rId13"/>
+            </p:custDataLst>
+          </p:nvPr>
+        </p:nvPicPr>
+        <p:blipFill>
+          <a:blip r:embed="rId7"/>
           <a:stretch>
             <a:fillRect/>
           </a:stretch>
@@ -12953,10 +12982,14 @@
           <p:cNvPicPr>
             <a:picLocks noChangeAspect="1"/>
           </p:cNvPicPr>
-          <p:nvPr/>
-        </p:nvPicPr>
-        <p:blipFill>
-          <a:blip r:embed="rId7"/>
+          <p:nvPr>
+            <p:custDataLst>
+              <p:tags r:id="rId14"/>
+            </p:custDataLst>
+          </p:nvPr>
+        </p:nvPicPr>
+        <p:blipFill>
+          <a:blip r:embed="rId15"/>
           <a:stretch>
             <a:fillRect/>
           </a:stretch>
@@ -12975,7 +13008,11 @@
         <p:nvSpPr>
           <p:cNvPr id="16" name="Text 5"/>
           <p:cNvSpPr/>
-          <p:nvPr/>
+          <p:nvPr>
+            <p:custDataLst>
+              <p:tags r:id="rId16"/>
+            </p:custDataLst>
+          </p:nvPr>
         </p:nvSpPr>
         <p:spPr>
           <a:xfrm>
@@ -13013,7 +13050,11 @@
         <p:nvSpPr>
           <p:cNvPr id="17" name="Text 6"/>
           <p:cNvSpPr/>
-          <p:nvPr/>
+          <p:nvPr>
+            <p:custDataLst>
+              <p:tags r:id="rId17"/>
+            </p:custDataLst>
+          </p:nvPr>
         </p:nvSpPr>
         <p:spPr>
           <a:xfrm>
@@ -13053,10 +13094,14 @@
           <p:cNvPicPr>
             <a:picLocks noChangeAspect="1"/>
           </p:cNvPicPr>
-          <p:nvPr/>
-        </p:nvPicPr>
-        <p:blipFill>
-          <a:blip r:embed="rId4"/>
+          <p:nvPr>
+            <p:custDataLst>
+              <p:tags r:id="rId18"/>
+            </p:custDataLst>
+          </p:nvPr>
+        </p:nvPicPr>
+        <p:blipFill>
+          <a:blip r:embed="rId5"/>
           <a:stretch>
             <a:fillRect/>
           </a:stretch>
@@ -13077,10 +13122,14 @@
           <p:cNvPicPr>
             <a:picLocks noChangeAspect="1"/>
           </p:cNvPicPr>
-          <p:nvPr/>
-        </p:nvPicPr>
-        <p:blipFill>
-          <a:blip r:embed="rId5"/>
+          <p:nvPr>
+            <p:custDataLst>
+              <p:tags r:id="rId19"/>
+            </p:custDataLst>
+          </p:nvPr>
+        </p:nvPicPr>
+        <p:blipFill>
+          <a:blip r:embed="rId7"/>
           <a:stretch>
             <a:fillRect/>
           </a:stretch>
@@ -13101,10 +13150,14 @@
           <p:cNvPicPr>
             <a:picLocks noChangeAspect="1"/>
           </p:cNvPicPr>
-          <p:nvPr/>
-        </p:nvPicPr>
-        <p:blipFill>
-          <a:blip r:embed="rId8"/>
+          <p:nvPr>
+            <p:custDataLst>
+              <p:tags r:id="rId20"/>
+            </p:custDataLst>
+          </p:nvPr>
+        </p:nvPicPr>
+        <p:blipFill>
+          <a:blip r:embed="rId21"/>
           <a:stretch>
             <a:fillRect/>
           </a:stretch>
@@ -13123,7 +13176,11 @@
         <p:nvSpPr>
           <p:cNvPr id="21" name="Text 7"/>
           <p:cNvSpPr/>
-          <p:nvPr/>
+          <p:nvPr>
+            <p:custDataLst>
+              <p:tags r:id="rId22"/>
+            </p:custDataLst>
+          </p:nvPr>
         </p:nvSpPr>
         <p:spPr>
           <a:xfrm>
@@ -13161,7 +13218,11 @@
         <p:nvSpPr>
           <p:cNvPr id="22" name="Text 8"/>
           <p:cNvSpPr/>
-          <p:nvPr/>
+          <p:nvPr>
+            <p:custDataLst>
+              <p:tags r:id="rId23"/>
+            </p:custDataLst>
+          </p:nvPr>
         </p:nvSpPr>
         <p:spPr>
           <a:xfrm>
@@ -13201,10 +13262,14 @@
           <p:cNvPicPr>
             <a:picLocks noChangeAspect="1"/>
           </p:cNvPicPr>
-          <p:nvPr/>
-        </p:nvPicPr>
-        <p:blipFill>
-          <a:blip r:embed="rId4"/>
+          <p:nvPr>
+            <p:custDataLst>
+              <p:tags r:id="rId24"/>
+            </p:custDataLst>
+          </p:nvPr>
+        </p:nvPicPr>
+        <p:blipFill>
+          <a:blip r:embed="rId5"/>
           <a:stretch>
             <a:fillRect/>
           </a:stretch>
@@ -13225,10 +13290,14 @@
           <p:cNvPicPr>
             <a:picLocks noChangeAspect="1"/>
           </p:cNvPicPr>
-          <p:nvPr/>
-        </p:nvPicPr>
-        <p:blipFill>
-          <a:blip r:embed="rId5"/>
+          <p:nvPr>
+            <p:custDataLst>
+              <p:tags r:id="rId25"/>
+            </p:custDataLst>
+          </p:nvPr>
+        </p:nvPicPr>
+        <p:blipFill>
+          <a:blip r:embed="rId7"/>
           <a:stretch>
             <a:fillRect/>
           </a:stretch>
@@ -13249,10 +13318,14 @@
           <p:cNvPicPr>
             <a:picLocks noChangeAspect="1"/>
           </p:cNvPicPr>
-          <p:nvPr/>
-        </p:nvPicPr>
-        <p:blipFill>
-          <a:blip r:embed="rId9"/>
+          <p:nvPr>
+            <p:custDataLst>
+              <p:tags r:id="rId26"/>
+            </p:custDataLst>
+          </p:nvPr>
+        </p:nvPicPr>
+        <p:blipFill>
+          <a:blip r:embed="rId27"/>
           <a:stretch>
             <a:fillRect/>
           </a:stretch>
@@ -13271,7 +13344,11 @@
         <p:nvSpPr>
           <p:cNvPr id="26" name="Text 9"/>
           <p:cNvSpPr/>
-          <p:nvPr/>
+          <p:nvPr>
+            <p:custDataLst>
+              <p:tags r:id="rId28"/>
+            </p:custDataLst>
+          </p:nvPr>
         </p:nvSpPr>
         <p:spPr>
           <a:xfrm>
@@ -13309,7 +13386,11 @@
         <p:nvSpPr>
           <p:cNvPr id="27" name="Text 10"/>
           <p:cNvSpPr/>
-          <p:nvPr/>
+          <p:nvPr>
+            <p:custDataLst>
+              <p:tags r:id="rId29"/>
+            </p:custDataLst>
+          </p:nvPr>
         </p:nvSpPr>
         <p:spPr>
           <a:xfrm>
@@ -13349,10 +13430,14 @@
           <p:cNvPicPr>
             <a:picLocks noChangeAspect="1"/>
           </p:cNvPicPr>
-          <p:nvPr/>
-        </p:nvPicPr>
-        <p:blipFill>
-          <a:blip r:embed="rId4"/>
+          <p:nvPr>
+            <p:custDataLst>
+              <p:tags r:id="rId30"/>
+            </p:custDataLst>
+          </p:nvPr>
+        </p:nvPicPr>
+        <p:blipFill>
+          <a:blip r:embed="rId5"/>
           <a:stretch>
             <a:fillRect/>
           </a:stretch>
@@ -13373,10 +13458,14 @@
           <p:cNvPicPr>
             <a:picLocks noChangeAspect="1"/>
           </p:cNvPicPr>
-          <p:nvPr/>
-        </p:nvPicPr>
-        <p:blipFill>
-          <a:blip r:embed="rId5"/>
+          <p:nvPr>
+            <p:custDataLst>
+              <p:tags r:id="rId31"/>
+            </p:custDataLst>
+          </p:nvPr>
+        </p:nvPicPr>
+        <p:blipFill>
+          <a:blip r:embed="rId7"/>
           <a:stretch>
             <a:fillRect/>
           </a:stretch>
@@ -13397,10 +13486,14 @@
           <p:cNvPicPr>
             <a:picLocks noChangeAspect="1"/>
           </p:cNvPicPr>
-          <p:nvPr/>
-        </p:nvPicPr>
-        <p:blipFill>
-          <a:blip r:embed="rId10"/>
+          <p:nvPr>
+            <p:custDataLst>
+              <p:tags r:id="rId32"/>
+            </p:custDataLst>
+          </p:nvPr>
+        </p:nvPicPr>
+        <p:blipFill>
+          <a:blip r:embed="rId33"/>
           <a:stretch>
             <a:fillRect/>
           </a:stretch>
@@ -13419,7 +13512,11 @@
         <p:nvSpPr>
           <p:cNvPr id="31" name="Text 11"/>
           <p:cNvSpPr/>
-          <p:nvPr/>
+          <p:nvPr>
+            <p:custDataLst>
+              <p:tags r:id="rId34"/>
+            </p:custDataLst>
+          </p:nvPr>
         </p:nvSpPr>
         <p:spPr>
           <a:xfrm>
@@ -13457,7 +13554,11 @@
         <p:nvSpPr>
           <p:cNvPr id="32" name="Text 12"/>
           <p:cNvSpPr/>
-          <p:nvPr/>
+          <p:nvPr>
+            <p:custDataLst>
+              <p:tags r:id="rId35"/>
+            </p:custDataLst>
+          </p:nvPr>
         </p:nvSpPr>
         <p:spPr>
           <a:xfrm>
@@ -13497,10 +13598,14 @@
           <p:cNvPicPr>
             <a:picLocks noChangeAspect="1"/>
           </p:cNvPicPr>
-          <p:nvPr/>
-        </p:nvPicPr>
-        <p:blipFill>
-          <a:blip r:embed="rId4"/>
+          <p:nvPr>
+            <p:custDataLst>
+              <p:tags r:id="rId36"/>
+            </p:custDataLst>
+          </p:nvPr>
+        </p:nvPicPr>
+        <p:blipFill>
+          <a:blip r:embed="rId5"/>
           <a:stretch>
             <a:fillRect/>
           </a:stretch>
@@ -13521,10 +13626,14 @@
           <p:cNvPicPr>
             <a:picLocks noChangeAspect="1"/>
           </p:cNvPicPr>
-          <p:nvPr/>
-        </p:nvPicPr>
-        <p:blipFill>
-          <a:blip r:embed="rId5"/>
+          <p:nvPr>
+            <p:custDataLst>
+              <p:tags r:id="rId37"/>
+            </p:custDataLst>
+          </p:nvPr>
+        </p:nvPicPr>
+        <p:blipFill>
+          <a:blip r:embed="rId7"/>
           <a:stretch>
             <a:fillRect/>
           </a:stretch>
@@ -13545,10 +13654,14 @@
           <p:cNvPicPr>
             <a:picLocks noChangeAspect="1"/>
           </p:cNvPicPr>
-          <p:nvPr/>
-        </p:nvPicPr>
-        <p:blipFill>
-          <a:blip r:embed="rId11"/>
+          <p:nvPr>
+            <p:custDataLst>
+              <p:tags r:id="rId38"/>
+            </p:custDataLst>
+          </p:nvPr>
+        </p:nvPicPr>
+        <p:blipFill>
+          <a:blip r:embed="rId39"/>
           <a:stretch>
             <a:fillRect/>
           </a:stretch>
@@ -13567,7 +13680,11 @@
         <p:nvSpPr>
           <p:cNvPr id="36" name="Text 13"/>
           <p:cNvSpPr/>
-          <p:nvPr/>
+          <p:nvPr>
+            <p:custDataLst>
+              <p:tags r:id="rId40"/>
+            </p:custDataLst>
+          </p:nvPr>
         </p:nvSpPr>
         <p:spPr>
           <a:xfrm>
@@ -13605,7 +13722,11 @@
         <p:nvSpPr>
           <p:cNvPr id="37" name="Text 14"/>
           <p:cNvSpPr/>
-          <p:nvPr/>
+          <p:nvPr>
+            <p:custDataLst>
+              <p:tags r:id="rId41"/>
+            </p:custDataLst>
+          </p:nvPr>
         </p:nvSpPr>
         <p:spPr>
           <a:xfrm>
@@ -13645,10 +13766,14 @@
           <p:cNvPicPr>
             <a:picLocks noChangeAspect="1"/>
           </p:cNvPicPr>
-          <p:nvPr/>
-        </p:nvPicPr>
-        <p:blipFill>
-          <a:blip r:embed="rId4"/>
+          <p:nvPr>
+            <p:custDataLst>
+              <p:tags r:id="rId42"/>
+            </p:custDataLst>
+          </p:nvPr>
+        </p:nvPicPr>
+        <p:blipFill>
+          <a:blip r:embed="rId5"/>
           <a:stretch>
             <a:fillRect/>
           </a:stretch>
@@ -13669,10 +13794,14 @@
           <p:cNvPicPr>
             <a:picLocks noChangeAspect="1"/>
           </p:cNvPicPr>
-          <p:nvPr/>
-        </p:nvPicPr>
-        <p:blipFill>
-          <a:blip r:embed="rId5"/>
+          <p:nvPr>
+            <p:custDataLst>
+              <p:tags r:id="rId43"/>
+            </p:custDataLst>
+          </p:nvPr>
+        </p:nvPicPr>
+        <p:blipFill>
+          <a:blip r:embed="rId7"/>
           <a:stretch>
             <a:fillRect/>
           </a:stretch>
@@ -13693,10 +13822,14 @@
           <p:cNvPicPr>
             <a:picLocks noChangeAspect="1"/>
           </p:cNvPicPr>
-          <p:nvPr/>
-        </p:nvPicPr>
-        <p:blipFill>
-          <a:blip r:embed="rId12"/>
+          <p:nvPr>
+            <p:custDataLst>
+              <p:tags r:id="rId44"/>
+            </p:custDataLst>
+          </p:nvPr>
+        </p:nvPicPr>
+        <p:blipFill>
+          <a:blip r:embed="rId45"/>
           <a:stretch>
             <a:fillRect/>
           </a:stretch>
@@ -13715,7 +13848,11 @@
         <p:nvSpPr>
           <p:cNvPr id="41" name="Text 15"/>
           <p:cNvSpPr/>
-          <p:nvPr/>
+          <p:nvPr>
+            <p:custDataLst>
+              <p:tags r:id="rId46"/>
+            </p:custDataLst>
+          </p:nvPr>
         </p:nvSpPr>
         <p:spPr>
           <a:xfrm>
@@ -13753,7 +13890,11 @@
         <p:nvSpPr>
           <p:cNvPr id="42" name="Text 16"/>
           <p:cNvSpPr/>
-          <p:nvPr/>
+          <p:nvPr>
+            <p:custDataLst>
+              <p:tags r:id="rId47"/>
+            </p:custDataLst>
+          </p:nvPr>
         </p:nvSpPr>
         <p:spPr>
           <a:xfrm>
@@ -13796,7 +13937,7 @@
           <p:nvPr/>
         </p:nvPicPr>
         <p:blipFill>
-          <a:blip r:embed="rId13">
+          <a:blip r:embed="rId48">
             <a:alphaModFix amt="6000"/>
           </a:blip>
           <a:stretch>
@@ -13822,7 +13963,7 @@
           <p:nvPr/>
         </p:nvPicPr>
         <p:blipFill>
-          <a:blip r:embed="rId14">
+          <a:blip r:embed="rId49">
             <a:alphaModFix amt="6000"/>
           </a:blip>
           <a:stretch>
@@ -13845,10 +13986,14 @@
           <p:cNvPicPr>
             <a:picLocks noChangeAspect="1"/>
           </p:cNvPicPr>
-          <p:nvPr/>
-        </p:nvPicPr>
-        <p:blipFill>
-          <a:blip r:embed="rId15"/>
+          <p:nvPr>
+            <p:custDataLst>
+              <p:tags r:id="rId50"/>
+            </p:custDataLst>
+          </p:nvPr>
+        </p:nvPicPr>
+        <p:blipFill>
+          <a:blip r:embed="rId51"/>
           <a:stretch>
             <a:fillRect/>
           </a:stretch>
@@ -50403,6 +50548,66 @@
 </p:tagLst>
 </file>
 
+<file path=ppt/tags/tag100.xml><?xml version="1.0" encoding="utf-8"?>
+<p:tagLst xmlns:p="http://schemas.openxmlformats.org/presentationml/2006/main">
+  <p:tag name="KSO_WM_DIAGRAM_VIRTUALLY_FRAME" val="{&quot;height&quot;:217.4945669291338,&quot;left&quot;:71.99818897637795,&quot;top&quot;:280.49299212598424,&quot;width&quot;:815.9796062992125}"/>
+</p:tagLst>
+</file>
+
+<file path=ppt/tags/tag101.xml><?xml version="1.0" encoding="utf-8"?>
+<p:tagLst xmlns:p="http://schemas.openxmlformats.org/presentationml/2006/main">
+  <p:tag name="KSO_WM_DIAGRAM_VIRTUALLY_FRAME" val="{&quot;height&quot;:217.4945669291338,&quot;left&quot;:71.99818897637795,&quot;top&quot;:280.49299212598424,&quot;width&quot;:815.9796062992125}"/>
+</p:tagLst>
+</file>
+
+<file path=ppt/tags/tag102.xml><?xml version="1.0" encoding="utf-8"?>
+<p:tagLst xmlns:p="http://schemas.openxmlformats.org/presentationml/2006/main">
+  <p:tag name="KSO_WM_DIAGRAM_VIRTUALLY_FRAME" val="{&quot;height&quot;:217.4945669291338,&quot;left&quot;:71.99818897637795,&quot;top&quot;:280.49299212598424,&quot;width&quot;:815.9796062992125}"/>
+</p:tagLst>
+</file>
+
+<file path=ppt/tags/tag103.xml><?xml version="1.0" encoding="utf-8"?>
+<p:tagLst xmlns:p="http://schemas.openxmlformats.org/presentationml/2006/main">
+  <p:tag name="KSO_WM_DIAGRAM_VIRTUALLY_FRAME" val="{&quot;height&quot;:217.4945669291338,&quot;left&quot;:71.99818897637795,&quot;top&quot;:280.49299212598424,&quot;width&quot;:815.9796062992125}"/>
+</p:tagLst>
+</file>
+
+<file path=ppt/tags/tag104.xml><?xml version="1.0" encoding="utf-8"?>
+<p:tagLst xmlns:p="http://schemas.openxmlformats.org/presentationml/2006/main">
+  <p:tag name="KSO_WM_DIAGRAM_VIRTUALLY_FRAME" val="{&quot;height&quot;:217.4945669291338,&quot;left&quot;:71.99818897637795,&quot;top&quot;:280.49299212598424,&quot;width&quot;:815.9796062992125}"/>
+</p:tagLst>
+</file>
+
+<file path=ppt/tags/tag105.xml><?xml version="1.0" encoding="utf-8"?>
+<p:tagLst xmlns:p="http://schemas.openxmlformats.org/presentationml/2006/main">
+  <p:tag name="KSO_WM_DIAGRAM_VIRTUALLY_FRAME" val="{&quot;height&quot;:217.4945669291338,&quot;left&quot;:71.99818897637795,&quot;top&quot;:280.49299212598424,&quot;width&quot;:815.9796062992125}"/>
+</p:tagLst>
+</file>
+
+<file path=ppt/tags/tag106.xml><?xml version="1.0" encoding="utf-8"?>
+<p:tagLst xmlns:p="http://schemas.openxmlformats.org/presentationml/2006/main">
+  <p:tag name="KSO_WM_DIAGRAM_VIRTUALLY_FRAME" val="{&quot;height&quot;:217.4945669291338,&quot;left&quot;:71.99818897637795,&quot;top&quot;:280.49299212598424,&quot;width&quot;:815.9796062992125}"/>
+</p:tagLst>
+</file>
+
+<file path=ppt/tags/tag107.xml><?xml version="1.0" encoding="utf-8"?>
+<p:tagLst xmlns:p="http://schemas.openxmlformats.org/presentationml/2006/main">
+  <p:tag name="KSO_WM_DIAGRAM_VIRTUALLY_FRAME" val="{&quot;height&quot;:217.4945669291338,&quot;left&quot;:71.99818897637795,&quot;top&quot;:280.49299212598424,&quot;width&quot;:815.9796062992125}"/>
+</p:tagLst>
+</file>
+
+<file path=ppt/tags/tag108.xml><?xml version="1.0" encoding="utf-8"?>
+<p:tagLst xmlns:p="http://schemas.openxmlformats.org/presentationml/2006/main">
+  <p:tag name="KSO_WM_DIAGRAM_VIRTUALLY_FRAME" val="{&quot;height&quot;:217.4945669291338,&quot;left&quot;:71.99818897637795,&quot;top&quot;:280.49299212598424,&quot;width&quot;:815.9796062992125}"/>
+</p:tagLst>
+</file>
+
+<file path=ppt/tags/tag109.xml><?xml version="1.0" encoding="utf-8"?>
+<p:tagLst xmlns:p="http://schemas.openxmlformats.org/presentationml/2006/main">
+  <p:tag name="KSO_WM_DIAGRAM_VIRTUALLY_FRAME" val="{&quot;height&quot;:217.4945669291338,&quot;left&quot;:71.99818897637795,&quot;top&quot;:280.49299212598424,&quot;width&quot;:815.9796062992125}"/>
+</p:tagLst>
+</file>
+
 <file path=ppt/tags/tag11.xml><?xml version="1.0" encoding="utf-8"?>
 <p:tagLst xmlns:p="http://schemas.openxmlformats.org/presentationml/2006/main">
   <p:tag name="KSO_WM_BEAUTIFY_FLAG" val="#fgm#"/>
@@ -50410,6 +50615,66 @@
   <p:tag name="KSO_WM_FIGMA_FLAG" val="#fgm#"/>
   <p:tag name="KSO_WM_UNIT_INDEX" val="1_2_1"/>
   <p:tag name="KSO_WM_UNIT_TYPE" val="l_h_f"/>
+</p:tagLst>
+</file>
+
+<file path=ppt/tags/tag110.xml><?xml version="1.0" encoding="utf-8"?>
+<p:tagLst xmlns:p="http://schemas.openxmlformats.org/presentationml/2006/main">
+  <p:tag name="KSO_WM_DIAGRAM_VIRTUALLY_FRAME" val="{&quot;height&quot;:217.4945669291338,&quot;left&quot;:71.99818897637795,&quot;top&quot;:280.49299212598424,&quot;width&quot;:815.9796062992125}"/>
+</p:tagLst>
+</file>
+
+<file path=ppt/tags/tag111.xml><?xml version="1.0" encoding="utf-8"?>
+<p:tagLst xmlns:p="http://schemas.openxmlformats.org/presentationml/2006/main">
+  <p:tag name="KSO_WM_DIAGRAM_VIRTUALLY_FRAME" val="{&quot;height&quot;:217.4945669291338,&quot;left&quot;:71.99818897637795,&quot;top&quot;:280.49299212598424,&quot;width&quot;:815.9796062992125}"/>
+</p:tagLst>
+</file>
+
+<file path=ppt/tags/tag112.xml><?xml version="1.0" encoding="utf-8"?>
+<p:tagLst xmlns:p="http://schemas.openxmlformats.org/presentationml/2006/main">
+  <p:tag name="KSO_WM_DIAGRAM_VIRTUALLY_FRAME" val="{&quot;height&quot;:217.4945669291338,&quot;left&quot;:71.99818897637795,&quot;top&quot;:280.49299212598424,&quot;width&quot;:815.9796062992125}"/>
+</p:tagLst>
+</file>
+
+<file path=ppt/tags/tag113.xml><?xml version="1.0" encoding="utf-8"?>
+<p:tagLst xmlns:p="http://schemas.openxmlformats.org/presentationml/2006/main">
+  <p:tag name="KSO_WM_DIAGRAM_VIRTUALLY_FRAME" val="{&quot;height&quot;:217.4945669291338,&quot;left&quot;:71.99818897637795,&quot;top&quot;:280.49299212598424,&quot;width&quot;:815.9796062992125}"/>
+</p:tagLst>
+</file>
+
+<file path=ppt/tags/tag114.xml><?xml version="1.0" encoding="utf-8"?>
+<p:tagLst xmlns:p="http://schemas.openxmlformats.org/presentationml/2006/main">
+  <p:tag name="KSO_WM_DIAGRAM_VIRTUALLY_FRAME" val="{&quot;height&quot;:217.4945669291338,&quot;left&quot;:71.99818897637795,&quot;top&quot;:280.49299212598424,&quot;width&quot;:815.9796062992125}"/>
+</p:tagLst>
+</file>
+
+<file path=ppt/tags/tag115.xml><?xml version="1.0" encoding="utf-8"?>
+<p:tagLst xmlns:p="http://schemas.openxmlformats.org/presentationml/2006/main">
+  <p:tag name="KSO_WM_DIAGRAM_VIRTUALLY_FRAME" val="{&quot;height&quot;:217.4945669291338,&quot;left&quot;:71.99818897637795,&quot;top&quot;:280.49299212598424,&quot;width&quot;:815.9796062992125}"/>
+</p:tagLst>
+</file>
+
+<file path=ppt/tags/tag116.xml><?xml version="1.0" encoding="utf-8"?>
+<p:tagLst xmlns:p="http://schemas.openxmlformats.org/presentationml/2006/main">
+  <p:tag name="KSO_WM_DIAGRAM_VIRTUALLY_FRAME" val="{&quot;height&quot;:217.4945669291338,&quot;left&quot;:71.99818897637795,&quot;top&quot;:280.49299212598424,&quot;width&quot;:815.9796062992125}"/>
+</p:tagLst>
+</file>
+
+<file path=ppt/tags/tag117.xml><?xml version="1.0" encoding="utf-8"?>
+<p:tagLst xmlns:p="http://schemas.openxmlformats.org/presentationml/2006/main">
+  <p:tag name="KSO_WM_DIAGRAM_VIRTUALLY_FRAME" val="{&quot;height&quot;:217.4945669291338,&quot;left&quot;:71.99818897637795,&quot;top&quot;:280.49299212598424,&quot;width&quot;:815.9796062992125}"/>
+</p:tagLst>
+</file>
+
+<file path=ppt/tags/tag118.xml><?xml version="1.0" encoding="utf-8"?>
+<p:tagLst xmlns:p="http://schemas.openxmlformats.org/presentationml/2006/main">
+  <p:tag name="KSO_WM_DIAGRAM_VIRTUALLY_FRAME" val="{&quot;height&quot;:217.4945669291338,&quot;left&quot;:71.99818897637795,&quot;top&quot;:280.49299212598424,&quot;width&quot;:815.9796062992125}"/>
+</p:tagLst>
+</file>
+
+<file path=ppt/tags/tag119.xml><?xml version="1.0" encoding="utf-8"?>
+<p:tagLst xmlns:p="http://schemas.openxmlformats.org/presentationml/2006/main">
+  <p:tag name="KSO_WM_DIAGRAM_VIRTUALLY_FRAME" val="{&quot;height&quot;:217.4945669291338,&quot;left&quot;:71.99818897637795,&quot;top&quot;:280.49299212598424,&quot;width&quot;:815.9796062992125}"/>
 </p:tagLst>
 </file>
 
@@ -51048,43 +51313,43 @@
 
 <file path=ppt/tags/tag63.xml><?xml version="1.0" encoding="utf-8"?>
 <p:tagLst xmlns:p="http://schemas.openxmlformats.org/presentationml/2006/main">
-  <p:tag name="KSO_WM_DIAGRAM_VIRTUALLY_FRAME" val="{&quot;height&quot;:217.4945669291338,&quot;left&quot;:71.99818897637795,&quot;top&quot;:280.49299212598424,&quot;width&quot;:815.9796062992125}"/>
+  <p:tag name="KSO_WM_DIAGRAM_VIRTUALLY_FRAME" val="{&quot;height&quot;:338.24157480314955,&quot;left&quot;:71.99818897637795,&quot;top&quot;:160.4959842519685,&quot;width&quot;:815.9796062992125}"/>
 </p:tagLst>
 </file>
 
 <file path=ppt/tags/tag64.xml><?xml version="1.0" encoding="utf-8"?>
 <p:tagLst xmlns:p="http://schemas.openxmlformats.org/presentationml/2006/main">
-  <p:tag name="KSO_WM_DIAGRAM_VIRTUALLY_FRAME" val="{&quot;height&quot;:217.4945669291338,&quot;left&quot;:71.99818897637795,&quot;top&quot;:280.49299212598424,&quot;width&quot;:815.9796062992125}"/>
+  <p:tag name="KSO_WM_DIAGRAM_VIRTUALLY_FRAME" val="{&quot;height&quot;:338.24157480314955,&quot;left&quot;:71.99818897637795,&quot;top&quot;:160.4959842519685,&quot;width&quot;:815.9796062992125}"/>
 </p:tagLst>
 </file>
 
 <file path=ppt/tags/tag65.xml><?xml version="1.0" encoding="utf-8"?>
 <p:tagLst xmlns:p="http://schemas.openxmlformats.org/presentationml/2006/main">
-  <p:tag name="KSO_WM_DIAGRAM_VIRTUALLY_FRAME" val="{&quot;height&quot;:217.4945669291338,&quot;left&quot;:71.99818897637795,&quot;top&quot;:280.49299212598424,&quot;width&quot;:815.9796062992125}"/>
+  <p:tag name="KSO_WM_DIAGRAM_VIRTUALLY_FRAME" val="{&quot;height&quot;:338.24157480314955,&quot;left&quot;:71.99818897637795,&quot;top&quot;:160.4959842519685,&quot;width&quot;:815.9796062992125}"/>
 </p:tagLst>
 </file>
 
 <file path=ppt/tags/tag66.xml><?xml version="1.0" encoding="utf-8"?>
 <p:tagLst xmlns:p="http://schemas.openxmlformats.org/presentationml/2006/main">
-  <p:tag name="KSO_WM_DIAGRAM_VIRTUALLY_FRAME" val="{&quot;height&quot;:217.4945669291338,&quot;left&quot;:71.99818897637795,&quot;top&quot;:280.49299212598424,&quot;width&quot;:815.9796062992125}"/>
+  <p:tag name="KSO_WM_DIAGRAM_VIRTUALLY_FRAME" val="{&quot;height&quot;:338.24157480314955,&quot;left&quot;:71.99818897637795,&quot;top&quot;:160.4959842519685,&quot;width&quot;:815.9796062992125}"/>
 </p:tagLst>
 </file>
 
 <file path=ppt/tags/tag67.xml><?xml version="1.0" encoding="utf-8"?>
 <p:tagLst xmlns:p="http://schemas.openxmlformats.org/presentationml/2006/main">
-  <p:tag name="KSO_WM_DIAGRAM_VIRTUALLY_FRAME" val="{&quot;height&quot;:217.4945669291338,&quot;left&quot;:71.99818897637795,&quot;top&quot;:280.49299212598424,&quot;width&quot;:815.9796062992125}"/>
+  <p:tag name="KSO_WM_DIAGRAM_VIRTUALLY_FRAME" val="{&quot;height&quot;:338.24157480314955,&quot;left&quot;:71.99818897637795,&quot;top&quot;:160.4959842519685,&quot;width&quot;:815.9796062992125}"/>
 </p:tagLst>
 </file>
 
 <file path=ppt/tags/tag68.xml><?xml version="1.0" encoding="utf-8"?>
 <p:tagLst xmlns:p="http://schemas.openxmlformats.org/presentationml/2006/main">
-  <p:tag name="KSO_WM_DIAGRAM_VIRTUALLY_FRAME" val="{&quot;height&quot;:217.4945669291338,&quot;left&quot;:71.99818897637795,&quot;top&quot;:280.49299212598424,&quot;width&quot;:815.9796062992125}"/>
+  <p:tag name="KSO_WM_DIAGRAM_VIRTUALLY_FRAME" val="{&quot;height&quot;:338.24157480314955,&quot;left&quot;:71.99818897637795,&quot;top&quot;:160.4959842519685,&quot;width&quot;:815.9796062992125}"/>
 </p:tagLst>
 </file>
 
 <file path=ppt/tags/tag69.xml><?xml version="1.0" encoding="utf-8"?>
 <p:tagLst xmlns:p="http://schemas.openxmlformats.org/presentationml/2006/main">
-  <p:tag name="KSO_WM_DIAGRAM_VIRTUALLY_FRAME" val="{&quot;height&quot;:217.4945669291338,&quot;left&quot;:71.99818897637795,&quot;top&quot;:280.49299212598424,&quot;width&quot;:815.9796062992125}"/>
+  <p:tag name="KSO_WM_DIAGRAM_VIRTUALLY_FRAME" val="{&quot;height&quot;:338.24157480314955,&quot;left&quot;:71.99818897637795,&quot;top&quot;:160.4959842519685,&quot;width&quot;:815.9796062992125}"/>
 </p:tagLst>
 </file>
 
@@ -51100,61 +51365,61 @@
 
 <file path=ppt/tags/tag70.xml><?xml version="1.0" encoding="utf-8"?>
 <p:tagLst xmlns:p="http://schemas.openxmlformats.org/presentationml/2006/main">
-  <p:tag name="KSO_WM_DIAGRAM_VIRTUALLY_FRAME" val="{&quot;height&quot;:217.4945669291338,&quot;left&quot;:71.99818897637795,&quot;top&quot;:280.49299212598424,&quot;width&quot;:815.9796062992125}"/>
+  <p:tag name="KSO_WM_DIAGRAM_VIRTUALLY_FRAME" val="{&quot;height&quot;:338.24157480314955,&quot;left&quot;:71.99818897637795,&quot;top&quot;:160.4959842519685,&quot;width&quot;:815.9796062992125}"/>
 </p:tagLst>
 </file>
 
 <file path=ppt/tags/tag71.xml><?xml version="1.0" encoding="utf-8"?>
 <p:tagLst xmlns:p="http://schemas.openxmlformats.org/presentationml/2006/main">
-  <p:tag name="KSO_WM_DIAGRAM_VIRTUALLY_FRAME" val="{&quot;height&quot;:217.4945669291338,&quot;left&quot;:71.99818897637795,&quot;top&quot;:280.49299212598424,&quot;width&quot;:815.9796062992125}"/>
+  <p:tag name="KSO_WM_DIAGRAM_VIRTUALLY_FRAME" val="{&quot;height&quot;:338.24157480314955,&quot;left&quot;:71.99818897637795,&quot;top&quot;:160.4959842519685,&quot;width&quot;:815.9796062992125}"/>
 </p:tagLst>
 </file>
 
 <file path=ppt/tags/tag72.xml><?xml version="1.0" encoding="utf-8"?>
 <p:tagLst xmlns:p="http://schemas.openxmlformats.org/presentationml/2006/main">
-  <p:tag name="KSO_WM_DIAGRAM_VIRTUALLY_FRAME" val="{&quot;height&quot;:217.4945669291338,&quot;left&quot;:71.99818897637795,&quot;top&quot;:280.49299212598424,&quot;width&quot;:815.9796062992125}"/>
+  <p:tag name="KSO_WM_DIAGRAM_VIRTUALLY_FRAME" val="{&quot;height&quot;:338.24157480314955,&quot;left&quot;:71.99818897637795,&quot;top&quot;:160.4959842519685,&quot;width&quot;:815.9796062992125}"/>
 </p:tagLst>
 </file>
 
 <file path=ppt/tags/tag73.xml><?xml version="1.0" encoding="utf-8"?>
 <p:tagLst xmlns:p="http://schemas.openxmlformats.org/presentationml/2006/main">
-  <p:tag name="KSO_WM_DIAGRAM_VIRTUALLY_FRAME" val="{&quot;height&quot;:217.4945669291338,&quot;left&quot;:71.99818897637795,&quot;top&quot;:280.49299212598424,&quot;width&quot;:815.9796062992125}"/>
+  <p:tag name="KSO_WM_DIAGRAM_VIRTUALLY_FRAME" val="{&quot;height&quot;:338.24157480314955,&quot;left&quot;:71.99818897637795,&quot;top&quot;:160.4959842519685,&quot;width&quot;:815.9796062992125}"/>
 </p:tagLst>
 </file>
 
 <file path=ppt/tags/tag74.xml><?xml version="1.0" encoding="utf-8"?>
 <p:tagLst xmlns:p="http://schemas.openxmlformats.org/presentationml/2006/main">
-  <p:tag name="KSO_WM_DIAGRAM_VIRTUALLY_FRAME" val="{&quot;height&quot;:217.4945669291338,&quot;left&quot;:71.99818897637795,&quot;top&quot;:280.49299212598424,&quot;width&quot;:815.9796062992125}"/>
+  <p:tag name="KSO_WM_DIAGRAM_VIRTUALLY_FRAME" val="{&quot;height&quot;:338.24157480314955,&quot;left&quot;:71.99818897637795,&quot;top&quot;:160.4959842519685,&quot;width&quot;:815.9796062992125}"/>
 </p:tagLst>
 </file>
 
 <file path=ppt/tags/tag75.xml><?xml version="1.0" encoding="utf-8"?>
 <p:tagLst xmlns:p="http://schemas.openxmlformats.org/presentationml/2006/main">
-  <p:tag name="KSO_WM_DIAGRAM_VIRTUALLY_FRAME" val="{&quot;height&quot;:217.4945669291338,&quot;left&quot;:71.99818897637795,&quot;top&quot;:280.49299212598424,&quot;width&quot;:815.9796062992125}"/>
+  <p:tag name="KSO_WM_DIAGRAM_VIRTUALLY_FRAME" val="{&quot;height&quot;:338.24157480314955,&quot;left&quot;:71.99818897637795,&quot;top&quot;:160.4959842519685,&quot;width&quot;:815.9796062992125}"/>
 </p:tagLst>
 </file>
 
 <file path=ppt/tags/tag76.xml><?xml version="1.0" encoding="utf-8"?>
 <p:tagLst xmlns:p="http://schemas.openxmlformats.org/presentationml/2006/main">
-  <p:tag name="KSO_WM_DIAGRAM_VIRTUALLY_FRAME" val="{&quot;height&quot;:217.4945669291338,&quot;left&quot;:71.99818897637795,&quot;top&quot;:280.49299212598424,&quot;width&quot;:815.9796062992125}"/>
+  <p:tag name="KSO_WM_DIAGRAM_VIRTUALLY_FRAME" val="{&quot;height&quot;:338.24157480314955,&quot;left&quot;:71.99818897637795,&quot;top&quot;:160.4959842519685,&quot;width&quot;:815.9796062992125}"/>
 </p:tagLst>
 </file>
 
 <file path=ppt/tags/tag77.xml><?xml version="1.0" encoding="utf-8"?>
 <p:tagLst xmlns:p="http://schemas.openxmlformats.org/presentationml/2006/main">
-  <p:tag name="KSO_WM_DIAGRAM_VIRTUALLY_FRAME" val="{&quot;height&quot;:217.4945669291338,&quot;left&quot;:71.99818897637795,&quot;top&quot;:280.49299212598424,&quot;width&quot;:815.9796062992125}"/>
+  <p:tag name="KSO_WM_DIAGRAM_VIRTUALLY_FRAME" val="{&quot;height&quot;:338.24157480314955,&quot;left&quot;:71.99818897637795,&quot;top&quot;:160.4959842519685,&quot;width&quot;:815.9796062992125}"/>
 </p:tagLst>
 </file>
 
 <file path=ppt/tags/tag78.xml><?xml version="1.0" encoding="utf-8"?>
 <p:tagLst xmlns:p="http://schemas.openxmlformats.org/presentationml/2006/main">
-  <p:tag name="KSO_WM_DIAGRAM_VIRTUALLY_FRAME" val="{&quot;height&quot;:217.4945669291338,&quot;left&quot;:71.99818897637795,&quot;top&quot;:280.49299212598424,&quot;width&quot;:815.9796062992125}"/>
+  <p:tag name="KSO_WM_DIAGRAM_VIRTUALLY_FRAME" val="{&quot;height&quot;:338.24157480314955,&quot;left&quot;:71.99818897637795,&quot;top&quot;:160.4959842519685,&quot;width&quot;:815.9796062992125}"/>
 </p:tagLst>
 </file>
 
 <file path=ppt/tags/tag79.xml><?xml version="1.0" encoding="utf-8"?>
 <p:tagLst xmlns:p="http://schemas.openxmlformats.org/presentationml/2006/main">
-  <p:tag name="KSO_WM_DIAGRAM_VIRTUALLY_FRAME" val="{&quot;height&quot;:217.4945669291338,&quot;left&quot;:71.99818897637795,&quot;top&quot;:280.49299212598424,&quot;width&quot;:815.9796062992125}"/>
+  <p:tag name="KSO_WM_DIAGRAM_VIRTUALLY_FRAME" val="{&quot;height&quot;:338.24157480314955,&quot;left&quot;:71.99818897637795,&quot;top&quot;:160.4959842519685,&quot;width&quot;:815.9796062992125}"/>
 </p:tagLst>
 </file>
 
@@ -51170,25 +51435,61 @@
 
 <file path=ppt/tags/tag80.xml><?xml version="1.0" encoding="utf-8"?>
 <p:tagLst xmlns:p="http://schemas.openxmlformats.org/presentationml/2006/main">
-  <p:tag name="KSO_WM_DIAGRAM_VIRTUALLY_FRAME" val="{&quot;height&quot;:217.4945669291338,&quot;left&quot;:71.99818897637795,&quot;top&quot;:280.49299212598424,&quot;width&quot;:815.9796062992125}"/>
+  <p:tag name="KSO_WM_DIAGRAM_VIRTUALLY_FRAME" val="{&quot;height&quot;:338.24157480314955,&quot;left&quot;:71.99818897637795,&quot;top&quot;:160.4959842519685,&quot;width&quot;:815.9796062992125}"/>
 </p:tagLst>
 </file>
 
 <file path=ppt/tags/tag81.xml><?xml version="1.0" encoding="utf-8"?>
 <p:tagLst xmlns:p="http://schemas.openxmlformats.org/presentationml/2006/main">
-  <p:tag name="KSO_WM_DIAGRAM_VIRTUALLY_FRAME" val="{&quot;height&quot;:217.4945669291338,&quot;left&quot;:71.99818897637795,&quot;top&quot;:280.49299212598424,&quot;width&quot;:815.9796062992125}"/>
+  <p:tag name="KSO_WM_DIAGRAM_VIRTUALLY_FRAME" val="{&quot;height&quot;:338.24157480314955,&quot;left&quot;:71.99818897637795,&quot;top&quot;:160.4959842519685,&quot;width&quot;:815.9796062992125}"/>
 </p:tagLst>
 </file>
 
 <file path=ppt/tags/tag82.xml><?xml version="1.0" encoding="utf-8"?>
 <p:tagLst xmlns:p="http://schemas.openxmlformats.org/presentationml/2006/main">
-  <p:tag name="KSO_WM_DIAGRAM_VIRTUALLY_FRAME" val="{&quot;height&quot;:217.4945669291338,&quot;left&quot;:71.99818897637795,&quot;top&quot;:280.49299212598424,&quot;width&quot;:815.9796062992125}"/>
+  <p:tag name="KSO_WM_DIAGRAM_VIRTUALLY_FRAME" val="{&quot;height&quot;:338.24157480314955,&quot;left&quot;:71.99818897637795,&quot;top&quot;:160.4959842519685,&quot;width&quot;:815.9796062992125}"/>
 </p:tagLst>
 </file>
 
 <file path=ppt/tags/tag83.xml><?xml version="1.0" encoding="utf-8"?>
 <p:tagLst xmlns:p="http://schemas.openxmlformats.org/presentationml/2006/main">
-  <p:tag name="KSO_WM_DIAGRAM_VIRTUALLY_FRAME" val="{&quot;height&quot;:217.4945669291338,&quot;left&quot;:71.99818897637795,&quot;top&quot;:280.49299212598424,&quot;width&quot;:815.9796062992125}"/>
+  <p:tag name="KSO_WM_DIAGRAM_VIRTUALLY_FRAME" val="{&quot;height&quot;:338.24157480314955,&quot;left&quot;:71.99818897637795,&quot;top&quot;:160.4959842519685,&quot;width&quot;:815.9796062992125}"/>
+</p:tagLst>
+</file>
+
+<file path=ppt/tags/tag84.xml><?xml version="1.0" encoding="utf-8"?>
+<p:tagLst xmlns:p="http://schemas.openxmlformats.org/presentationml/2006/main">
+  <p:tag name="KSO_WM_DIAGRAM_VIRTUALLY_FRAME" val="{&quot;height&quot;:338.24157480314955,&quot;left&quot;:71.99818897637795,&quot;top&quot;:160.4959842519685,&quot;width&quot;:815.9796062992125}"/>
+</p:tagLst>
+</file>
+
+<file path=ppt/tags/tag85.xml><?xml version="1.0" encoding="utf-8"?>
+<p:tagLst xmlns:p="http://schemas.openxmlformats.org/presentationml/2006/main">
+  <p:tag name="KSO_WM_DIAGRAM_VIRTUALLY_FRAME" val="{&quot;height&quot;:338.24157480314955,&quot;left&quot;:71.99818897637795,&quot;top&quot;:160.4959842519685,&quot;width&quot;:815.9796062992125}"/>
+</p:tagLst>
+</file>
+
+<file path=ppt/tags/tag86.xml><?xml version="1.0" encoding="utf-8"?>
+<p:tagLst xmlns:p="http://schemas.openxmlformats.org/presentationml/2006/main">
+  <p:tag name="KSO_WM_DIAGRAM_VIRTUALLY_FRAME" val="{&quot;height&quot;:338.24157480314955,&quot;left&quot;:71.99818897637795,&quot;top&quot;:160.4959842519685,&quot;width&quot;:815.9796062992125}"/>
+</p:tagLst>
+</file>
+
+<file path=ppt/tags/tag87.xml><?xml version="1.0" encoding="utf-8"?>
+<p:tagLst xmlns:p="http://schemas.openxmlformats.org/presentationml/2006/main">
+  <p:tag name="KSO_WM_DIAGRAM_VIRTUALLY_FRAME" val="{&quot;height&quot;:338.24157480314955,&quot;left&quot;:71.99818897637795,&quot;top&quot;:160.4959842519685,&quot;width&quot;:815.9796062992125}"/>
+</p:tagLst>
+</file>
+
+<file path=ppt/tags/tag88.xml><?xml version="1.0" encoding="utf-8"?>
+<p:tagLst xmlns:p="http://schemas.openxmlformats.org/presentationml/2006/main">
+  <p:tag name="KSO_WM_DIAGRAM_VIRTUALLY_FRAME" val="{&quot;height&quot;:338.24157480314955,&quot;left&quot;:71.99818897637795,&quot;top&quot;:160.4959842519685,&quot;width&quot;:815.9796062992125}"/>
+</p:tagLst>
+</file>
+
+<file path=ppt/tags/tag89.xml><?xml version="1.0" encoding="utf-8"?>
+<p:tagLst xmlns:p="http://schemas.openxmlformats.org/presentationml/2006/main">
+  <p:tag name="KSO_WM_DIAGRAM_VIRTUALLY_FRAME" val="{&quot;height&quot;:338.24157480314955,&quot;left&quot;:71.99818897637795,&quot;top&quot;:160.4959842519685,&quot;width&quot;:815.9796062992125}"/>
 </p:tagLst>
 </file>
 
@@ -51202,6 +51503,66 @@
   <p:tag name="KSO_WM_SYNC_SLIDE_TEXT" val="1"/>
   <p:tag name="KSO_WM_UNIT_INDEX" val="1_2_1"/>
   <p:tag name="KSO_WM_UNIT_TYPE" val="l_h_i"/>
+</p:tagLst>
+</file>
+
+<file path=ppt/tags/tag90.xml><?xml version="1.0" encoding="utf-8"?>
+<p:tagLst xmlns:p="http://schemas.openxmlformats.org/presentationml/2006/main">
+  <p:tag name="KSO_WM_DIAGRAM_VIRTUALLY_FRAME" val="{&quot;height&quot;:338.24157480314955,&quot;left&quot;:71.99818897637795,&quot;top&quot;:160.4959842519685,&quot;width&quot;:815.9796062992125}"/>
+</p:tagLst>
+</file>
+
+<file path=ppt/tags/tag91.xml><?xml version="1.0" encoding="utf-8"?>
+<p:tagLst xmlns:p="http://schemas.openxmlformats.org/presentationml/2006/main">
+  <p:tag name="KSO_WM_DIAGRAM_VIRTUALLY_FRAME" val="{&quot;height&quot;:338.24157480314955,&quot;left&quot;:71.99818897637795,&quot;top&quot;:160.4959842519685,&quot;width&quot;:815.9796062992125}"/>
+</p:tagLst>
+</file>
+
+<file path=ppt/tags/tag92.xml><?xml version="1.0" encoding="utf-8"?>
+<p:tagLst xmlns:p="http://schemas.openxmlformats.org/presentationml/2006/main">
+  <p:tag name="KSO_WM_DIAGRAM_VIRTUALLY_FRAME" val="{&quot;height&quot;:338.24157480314955,&quot;left&quot;:71.99818897637795,&quot;top&quot;:160.4959842519685,&quot;width&quot;:815.9796062992125}"/>
+</p:tagLst>
+</file>
+
+<file path=ppt/tags/tag93.xml><?xml version="1.0" encoding="utf-8"?>
+<p:tagLst xmlns:p="http://schemas.openxmlformats.org/presentationml/2006/main">
+  <p:tag name="KSO_WM_DIAGRAM_VIRTUALLY_FRAME" val="{&quot;height&quot;:338.24157480314955,&quot;left&quot;:71.99818897637795,&quot;top&quot;:160.4959842519685,&quot;width&quot;:815.9796062992125}"/>
+</p:tagLst>
+</file>
+
+<file path=ppt/tags/tag94.xml><?xml version="1.0" encoding="utf-8"?>
+<p:tagLst xmlns:p="http://schemas.openxmlformats.org/presentationml/2006/main">
+  <p:tag name="KSO_WM_DIAGRAM_VIRTUALLY_FRAME" val="{&quot;height&quot;:338.24157480314955,&quot;left&quot;:71.99818897637795,&quot;top&quot;:160.4959842519685,&quot;width&quot;:815.9796062992125}"/>
+</p:tagLst>
+</file>
+
+<file path=ppt/tags/tag95.xml><?xml version="1.0" encoding="utf-8"?>
+<p:tagLst xmlns:p="http://schemas.openxmlformats.org/presentationml/2006/main">
+  <p:tag name="KSO_WM_DIAGRAM_VIRTUALLY_FRAME" val="{&quot;height&quot;:338.24157480314955,&quot;left&quot;:71.99818897637795,&quot;top&quot;:160.4959842519685,&quot;width&quot;:815.9796062992125}"/>
+</p:tagLst>
+</file>
+
+<file path=ppt/tags/tag96.xml><?xml version="1.0" encoding="utf-8"?>
+<p:tagLst xmlns:p="http://schemas.openxmlformats.org/presentationml/2006/main">
+  <p:tag name="KSO_WM_DIAGRAM_VIRTUALLY_FRAME" val="{&quot;height&quot;:338.24157480314955,&quot;left&quot;:71.99818897637795,&quot;top&quot;:160.4959842519685,&quot;width&quot;:815.9796062992125}"/>
+</p:tagLst>
+</file>
+
+<file path=ppt/tags/tag97.xml><?xml version="1.0" encoding="utf-8"?>
+<p:tagLst xmlns:p="http://schemas.openxmlformats.org/presentationml/2006/main">
+  <p:tag name="KSO_WM_DIAGRAM_VIRTUALLY_FRAME" val="{&quot;height&quot;:338.24157480314955,&quot;left&quot;:71.99818897637795,&quot;top&quot;:160.4959842519685,&quot;width&quot;:815.9796062992125}"/>
+</p:tagLst>
+</file>
+
+<file path=ppt/tags/tag98.xml><?xml version="1.0" encoding="utf-8"?>
+<p:tagLst xmlns:p="http://schemas.openxmlformats.org/presentationml/2006/main">
+  <p:tag name="KSO_WM_DIAGRAM_VIRTUALLY_FRAME" val="{&quot;height&quot;:338.24157480314955,&quot;left&quot;:71.99818897637795,&quot;top&quot;:160.4959842519685,&quot;width&quot;:815.9796062992125}"/>
+</p:tagLst>
+</file>
+
+<file path=ppt/tags/tag99.xml><?xml version="1.0" encoding="utf-8"?>
+<p:tagLst xmlns:p="http://schemas.openxmlformats.org/presentationml/2006/main">
+  <p:tag name="KSO_WM_DIAGRAM_VIRTUALLY_FRAME" val="{&quot;height&quot;:217.4945669291338,&quot;left&quot;:71.99818897637795,&quot;top&quot;:280.49299212598424,&quot;width&quot;:815.9796062992125}"/>
 </p:tagLst>
 </file>
 
